--- a/Fase 2/Evidencias Proyecto/Presentacion Proyecto.pptx
+++ b/Fase 2/Evidencias Proyecto/Presentacion Proyecto.pptx
@@ -1572,7 +1572,7 @@
           <a:p>
             <a:r>
               <a:rPr lang="en-US" dirty="0"/>
-              <a:t>Mapa tecnológico por capas. Todo lo sólido ya está en uso en la app; lo punteado, Django REST y PostgreSQL, es la siguiente fase. Recorrer de arriba hacia abajo: interfaz en Compose, lógica con MVVM, datos locales con Room, las piezas de Android que hacen el monitoreo, seguridad e informes, y las herramientas de trabajo del equipo.</a:t>
+              <a:t>Mapa tecnológico por capas, con el logo de cada tecnología que tiene uno. Todo lo sólido ya está en uso en la app; lo punteado, Django REST y PostgreSQL, es la siguiente fase. Recorrer de arriba hacia abajo: interfaz en Compose, lógica con Kotlin y MVVM, datos locales con Room sobre SQLite, las piezas de Android que hacen el monitoreo (UsageStatsManager y WorkManager son parte de Android), seguridad e informes, y las herramientas de trabajo del equipo. MVVM, Flow, KSP, SHA-256 y similares son patrones o utilidades sin logo propio.</a:t>
             </a:r>
             <a:endParaRPr lang="en-US" dirty="0"/>
           </a:p>
@@ -12489,7 +12489,7 @@
         </p:nvSpPr>
         <p:spPr>
           <a:xfrm>
-            <a:off x="812800" y="812800"/>
+            <a:off x="812800" y="711200"/>
             <a:ext cx="10883392" cy="528241"/>
           </a:xfrm>
           <a:prstGeom prst="rect">
@@ -12533,7 +12533,7 @@
         </p:nvSpPr>
         <p:spPr>
           <a:xfrm>
-            <a:off x="812800" y="1569641"/>
+            <a:off x="812800" y="1432520"/>
             <a:ext cx="2485390" cy="274241"/>
           </a:xfrm>
           <a:prstGeom prst="rect">
@@ -12571,14 +12571,14 @@
       </p:sp>
       <p:sp>
         <p:nvSpPr>
-          <p:cNvPr id="4" name="Text 2"/>
-          <p:cNvSpPr/>
-          <p:nvPr/>
-        </p:nvSpPr>
-        <p:spPr>
-          <a:xfrm>
-            <a:off x="3378200" y="1518841"/>
-            <a:ext cx="1806575" cy="350441"/>
+          <p:cNvPr id="4" name="Shape 2"/>
+          <p:cNvSpPr/>
+          <p:nvPr/>
+        </p:nvSpPr>
+        <p:spPr>
+          <a:xfrm>
+            <a:off x="3378200" y="1366441"/>
+            <a:ext cx="2098675" cy="381000"/>
           </a:xfrm>
           <a:prstGeom prst="roundRect">
             <a:avLst>
@@ -12590,43 +12590,17 @@
           </a:solidFill>
           <a:ln/>
         </p:spPr>
-        <p:txBody>
-          <a:bodyPr wrap="none" lIns="0" tIns="0" rIns="0" bIns="0" rtlCol="0" anchor="ctr">
-            <a:normAutofit/>
-          </a:bodyPr>
-          <a:lstStyle/>
-          <a:p>
-            <a:pPr algn="ctr" indent="0" marL="0">
-              <a:lnSpc>
-                <a:spcPts val="1960"/>
-              </a:lnSpc>
-              <a:buNone/>
-            </a:pPr>
-            <a:r>
-              <a:rPr lang="en-US" sz="1400" dirty="0">
-                <a:solidFill>
-                  <a:srgbClr val="EAF2F6"/>
-                </a:solidFill>
-                <a:latin typeface="DM Sans" pitchFamily="34" charset="0"/>
-                <a:ea typeface="DM Sans" pitchFamily="34" charset="-122"/>
-                <a:cs typeface="DM Sans" pitchFamily="34" charset="-120"/>
-              </a:rPr>
-              <a:t>Jetpack Compose</a:t>
-            </a:r>
-            <a:endParaRPr lang="en-US" sz="1400" dirty="0"/>
-          </a:p>
-        </p:txBody>
-      </p:sp>
-      <p:sp>
-        <p:nvSpPr>
-          <p:cNvPr id="5" name="Text 3"/>
-          <p:cNvSpPr/>
-          <p:nvPr/>
-        </p:nvSpPr>
-        <p:spPr>
-          <a:xfrm>
-            <a:off x="5286375" y="1518841"/>
-            <a:ext cx="1114028" cy="350441"/>
+      </p:sp>
+      <p:sp>
+        <p:nvSpPr>
+          <p:cNvPr id="5" name="Shape 3"/>
+          <p:cNvSpPr/>
+          <p:nvPr/>
+        </p:nvSpPr>
+        <p:spPr>
+          <a:xfrm>
+            <a:off x="3416300" y="1404541"/>
+            <a:ext cx="304800" cy="304800"/>
           </a:xfrm>
           <a:prstGeom prst="roundRect">
             <a:avLst>
@@ -12634,17 +12608,58 @@
             </a:avLst>
           </a:prstGeom>
           <a:solidFill>
-            <a:srgbClr val="065A82"/>
+            <a:srgbClr val="FFFFFF"/>
           </a:solidFill>
           <a:ln/>
         </p:spPr>
-        <p:txBody>
-          <a:bodyPr wrap="none" lIns="0" tIns="0" rIns="0" bIns="0" rtlCol="0" anchor="ctr">
+      </p:sp>
+      <p:pic>
+        <p:nvPicPr>
+          <p:cNvPr id="6" name="Image 0" descr="Logo de Jetpack Compose">    </p:cNvPr>
+          <p:cNvPicPr>
+            <a:picLocks noChangeAspect="1"/>
+          </p:cNvPicPr>
+          <p:nvPr/>
+        </p:nvPicPr>
+        <p:blipFill>
+          <a:blip r:embed="rId1"/>
+          <a:srcRect l="0" r="0" t="0" b="0"/>
+          <a:stretch/>
+        </p:blipFill>
+        <p:spPr>
+          <a:xfrm>
+            <a:off x="3467100" y="1455341"/>
+            <a:ext cx="203200" cy="203200"/>
+          </a:xfrm>
+          <a:prstGeom prst="rect">
+            <a:avLst/>
+          </a:prstGeom>
+        </p:spPr>
+      </p:pic>
+      <p:sp>
+        <p:nvSpPr>
+          <p:cNvPr id="7" name="Text 4"/>
+          <p:cNvSpPr/>
+          <p:nvPr/>
+        </p:nvSpPr>
+        <p:spPr>
+          <a:xfrm>
+            <a:off x="3797300" y="1432520"/>
+            <a:ext cx="1679575" cy="274241"/>
+          </a:xfrm>
+          <a:prstGeom prst="rect">
+            <a:avLst/>
+          </a:prstGeom>
+          <a:noFill/>
+          <a:ln/>
+        </p:spPr>
+        <p:txBody>
+          <a:bodyPr wrap="square" lIns="0" tIns="0" rIns="0" bIns="0" rtlCol="0" anchor="t">
             <a:normAutofit/>
           </a:bodyPr>
           <a:lstStyle/>
           <a:p>
-            <a:pPr algn="ctr" indent="0" marL="0">
+            <a:pPr algn="l" indent="0" marL="0">
               <a:lnSpc>
                 <a:spcPts val="1960"/>
               </a:lnSpc>
@@ -12659,7 +12674,7 @@
                 <a:ea typeface="DM Sans" pitchFamily="34" charset="-122"/>
                 <a:cs typeface="DM Sans" pitchFamily="34" charset="-120"/>
               </a:rPr>
-              <a:t>Material 3</a:t>
+              <a:t>Jetpack Compose</a:t>
             </a:r>
             <a:endParaRPr lang="en-US" sz="1400" dirty="0"/>
           </a:p>
@@ -12667,14 +12682,14 @@
       </p:sp>
       <p:sp>
         <p:nvSpPr>
-          <p:cNvPr id="6" name="Text 4"/>
-          <p:cNvSpPr/>
-          <p:nvPr/>
-        </p:nvSpPr>
-        <p:spPr>
-          <a:xfrm>
-            <a:off x="6502003" y="1518841"/>
-            <a:ext cx="2016323" cy="350441"/>
+          <p:cNvPr id="8" name="Shape 5"/>
+          <p:cNvSpPr/>
+          <p:nvPr/>
+        </p:nvSpPr>
+        <p:spPr>
+          <a:xfrm>
+            <a:off x="5578475" y="1366441"/>
+            <a:ext cx="1406128" cy="381000"/>
           </a:xfrm>
           <a:prstGeom prst="roundRect">
             <a:avLst>
@@ -12686,87 +12701,17 @@
           </a:solidFill>
           <a:ln/>
         </p:spPr>
-        <p:txBody>
-          <a:bodyPr wrap="none" lIns="0" tIns="0" rIns="0" bIns="0" rtlCol="0" anchor="ctr">
-            <a:normAutofit/>
-          </a:bodyPr>
-          <a:lstStyle/>
-          <a:p>
-            <a:pPr algn="ctr" indent="0" marL="0">
-              <a:lnSpc>
-                <a:spcPts val="1960"/>
-              </a:lnSpc>
-              <a:buNone/>
-            </a:pPr>
-            <a:r>
-              <a:rPr lang="en-US" sz="1400" dirty="0">
-                <a:solidFill>
-                  <a:srgbClr val="EAF2F6"/>
-                </a:solidFill>
-                <a:latin typeface="DM Sans" pitchFamily="34" charset="0"/>
-                <a:ea typeface="DM Sans" pitchFamily="34" charset="-122"/>
-                <a:cs typeface="DM Sans" pitchFamily="34" charset="-120"/>
-              </a:rPr>
-              <a:t>Navigation Compose</a:t>
-            </a:r>
-            <a:endParaRPr lang="en-US" sz="1400" dirty="0"/>
-          </a:p>
-        </p:txBody>
-      </p:sp>
-      <p:sp>
-        <p:nvSpPr>
-          <p:cNvPr id="7" name="Text 5"/>
-          <p:cNvSpPr/>
-          <p:nvPr/>
-        </p:nvSpPr>
-        <p:spPr>
-          <a:xfrm>
-            <a:off x="812800" y="2123281"/>
-            <a:ext cx="2485390" cy="274241"/>
-          </a:xfrm>
-          <a:prstGeom prst="rect">
-            <a:avLst/>
-          </a:prstGeom>
-          <a:noFill/>
-          <a:ln/>
-        </p:spPr>
-        <p:txBody>
-          <a:bodyPr wrap="square" lIns="0" tIns="0" rIns="0" bIns="0" rtlCol="0" anchor="t">
-            <a:normAutofit/>
-          </a:bodyPr>
-          <a:lstStyle/>
-          <a:p>
-            <a:pPr algn="l" indent="0" marL="0">
-              <a:lnSpc>
-                <a:spcPts val="1960"/>
-              </a:lnSpc>
-              <a:buNone/>
-            </a:pPr>
-            <a:r>
-              <a:rPr lang="en-US" sz="1400" b="1" dirty="0">
-                <a:solidFill>
-                  <a:srgbClr val="17203E"/>
-                </a:solidFill>
-                <a:latin typeface="DM Sans" pitchFamily="34" charset="0"/>
-                <a:ea typeface="DM Sans" pitchFamily="34" charset="-122"/>
-                <a:cs typeface="DM Sans" pitchFamily="34" charset="-120"/>
-              </a:rPr>
-              <a:t>Lógica</a:t>
-            </a:r>
-            <a:endParaRPr lang="en-US" sz="1400" dirty="0"/>
-          </a:p>
-        </p:txBody>
-      </p:sp>
-      <p:sp>
-        <p:nvSpPr>
-          <p:cNvPr id="8" name="Text 6"/>
-          <p:cNvSpPr/>
-          <p:nvPr/>
-        </p:nvSpPr>
-        <p:spPr>
-          <a:xfrm>
-            <a:off x="3378200" y="2072481"/>
-            <a:ext cx="758726" cy="350441"/>
+      </p:sp>
+      <p:sp>
+        <p:nvSpPr>
+          <p:cNvPr id="9" name="Shape 6"/>
+          <p:cNvSpPr/>
+          <p:nvPr/>
+        </p:nvSpPr>
+        <p:spPr>
+          <a:xfrm>
+            <a:off x="5616575" y="1404541"/>
+            <a:ext cx="304800" cy="304800"/>
           </a:xfrm>
           <a:prstGeom prst="roundRect">
             <a:avLst>
@@ -12774,17 +12719,58 @@
             </a:avLst>
           </a:prstGeom>
           <a:solidFill>
-            <a:srgbClr val="065A82"/>
+            <a:srgbClr val="FFFFFF"/>
           </a:solidFill>
           <a:ln/>
         </p:spPr>
-        <p:txBody>
-          <a:bodyPr wrap="none" lIns="0" tIns="0" rIns="0" bIns="0" rtlCol="0" anchor="ctr">
+      </p:sp>
+      <p:pic>
+        <p:nvPicPr>
+          <p:cNvPr id="10" name="Image 1" descr="Logo de Material Design">    </p:cNvPr>
+          <p:cNvPicPr>
+            <a:picLocks noChangeAspect="1"/>
+          </p:cNvPicPr>
+          <p:nvPr/>
+        </p:nvPicPr>
+        <p:blipFill>
+          <a:blip r:embed="rId2"/>
+          <a:srcRect l="0" r="0" t="0" b="0"/>
+          <a:stretch/>
+        </p:blipFill>
+        <p:spPr>
+          <a:xfrm>
+            <a:off x="5667375" y="1455341"/>
+            <a:ext cx="203200" cy="203200"/>
+          </a:xfrm>
+          <a:prstGeom prst="rect">
+            <a:avLst/>
+          </a:prstGeom>
+        </p:spPr>
+      </p:pic>
+      <p:sp>
+        <p:nvSpPr>
+          <p:cNvPr id="11" name="Text 7"/>
+          <p:cNvSpPr/>
+          <p:nvPr/>
+        </p:nvSpPr>
+        <p:spPr>
+          <a:xfrm>
+            <a:off x="5997575" y="1432520"/>
+            <a:ext cx="971074" cy="274241"/>
+          </a:xfrm>
+          <a:prstGeom prst="rect">
+            <a:avLst/>
+          </a:prstGeom>
+          <a:noFill/>
+          <a:ln/>
+        </p:spPr>
+        <p:txBody>
+          <a:bodyPr wrap="square" lIns="0" tIns="0" rIns="0" bIns="0" rtlCol="0" anchor="t">
             <a:normAutofit/>
           </a:bodyPr>
           <a:lstStyle/>
           <a:p>
-            <a:pPr algn="ctr" indent="0" marL="0">
+            <a:pPr algn="l" indent="0" marL="0">
               <a:lnSpc>
                 <a:spcPts val="1960"/>
               </a:lnSpc>
@@ -12799,7 +12785,7 @@
                 <a:ea typeface="DM Sans" pitchFamily="34" charset="-122"/>
                 <a:cs typeface="DM Sans" pitchFamily="34" charset="-120"/>
               </a:rPr>
-              <a:t>Kotlin</a:t>
+              <a:t>Material 3</a:t>
             </a:r>
             <a:endParaRPr lang="en-US" sz="1400" dirty="0"/>
           </a:p>
@@ -12807,14 +12793,14 @@
       </p:sp>
       <p:sp>
         <p:nvSpPr>
-          <p:cNvPr id="9" name="Text 7"/>
-          <p:cNvSpPr/>
-          <p:nvPr/>
-        </p:nvSpPr>
-        <p:spPr>
-          <a:xfrm>
-            <a:off x="4238526" y="2072481"/>
-            <a:ext cx="841772" cy="350441"/>
+          <p:cNvPr id="12" name="Shape 8"/>
+          <p:cNvSpPr/>
+          <p:nvPr/>
+        </p:nvSpPr>
+        <p:spPr>
+          <a:xfrm>
+            <a:off x="7086203" y="1366441"/>
+            <a:ext cx="2308423" cy="381000"/>
           </a:xfrm>
           <a:prstGeom prst="roundRect">
             <a:avLst>
@@ -12826,43 +12812,17 @@
           </a:solidFill>
           <a:ln/>
         </p:spPr>
-        <p:txBody>
-          <a:bodyPr wrap="none" lIns="0" tIns="0" rIns="0" bIns="0" rtlCol="0" anchor="ctr">
-            <a:normAutofit/>
-          </a:bodyPr>
-          <a:lstStyle/>
-          <a:p>
-            <a:pPr algn="ctr" indent="0" marL="0">
-              <a:lnSpc>
-                <a:spcPts val="1960"/>
-              </a:lnSpc>
-              <a:buNone/>
-            </a:pPr>
-            <a:r>
-              <a:rPr lang="en-US" sz="1400" dirty="0">
-                <a:solidFill>
-                  <a:srgbClr val="EAF2F6"/>
-                </a:solidFill>
-                <a:latin typeface="DM Sans" pitchFamily="34" charset="0"/>
-                <a:ea typeface="DM Sans" pitchFamily="34" charset="-122"/>
-                <a:cs typeface="DM Sans" pitchFamily="34" charset="-120"/>
-              </a:rPr>
-              <a:t>MVVM</a:t>
-            </a:r>
-            <a:endParaRPr lang="en-US" sz="1400" dirty="0"/>
-          </a:p>
-        </p:txBody>
-      </p:sp>
-      <p:sp>
-        <p:nvSpPr>
-          <p:cNvPr id="10" name="Text 8"/>
-          <p:cNvSpPr/>
-          <p:nvPr/>
-        </p:nvSpPr>
-        <p:spPr>
-          <a:xfrm>
-            <a:off x="5181898" y="2072481"/>
-            <a:ext cx="1206698" cy="350441"/>
+      </p:sp>
+      <p:sp>
+        <p:nvSpPr>
+          <p:cNvPr id="13" name="Shape 9"/>
+          <p:cNvSpPr/>
+          <p:nvPr/>
+        </p:nvSpPr>
+        <p:spPr>
+          <a:xfrm>
+            <a:off x="7124303" y="1404541"/>
+            <a:ext cx="304800" cy="304800"/>
           </a:xfrm>
           <a:prstGeom prst="roundRect">
             <a:avLst>
@@ -12870,17 +12830,58 @@
             </a:avLst>
           </a:prstGeom>
           <a:solidFill>
-            <a:srgbClr val="065A82"/>
+            <a:srgbClr val="FFFFFF"/>
           </a:solidFill>
           <a:ln/>
         </p:spPr>
-        <p:txBody>
-          <a:bodyPr wrap="none" lIns="0" tIns="0" rIns="0" bIns="0" rtlCol="0" anchor="ctr">
+      </p:sp>
+      <p:pic>
+        <p:nvPicPr>
+          <p:cNvPr id="14" name="Image 2" descr="Logo de Jetpack Compose">    </p:cNvPr>
+          <p:cNvPicPr>
+            <a:picLocks noChangeAspect="1"/>
+          </p:cNvPicPr>
+          <p:nvPr/>
+        </p:nvPicPr>
+        <p:blipFill>
+          <a:blip r:embed="rId3"/>
+          <a:srcRect l="0" r="0" t="0" b="0"/>
+          <a:stretch/>
+        </p:blipFill>
+        <p:spPr>
+          <a:xfrm>
+            <a:off x="7175103" y="1455341"/>
+            <a:ext cx="203200" cy="203200"/>
+          </a:xfrm>
+          <a:prstGeom prst="rect">
+            <a:avLst/>
+          </a:prstGeom>
+        </p:spPr>
+      </p:pic>
+      <p:sp>
+        <p:nvSpPr>
+          <p:cNvPr id="15" name="Text 10"/>
+          <p:cNvSpPr/>
+          <p:nvPr/>
+        </p:nvSpPr>
+        <p:spPr>
+          <a:xfrm>
+            <a:off x="7505303" y="1432520"/>
+            <a:ext cx="1889323" cy="274241"/>
+          </a:xfrm>
+          <a:prstGeom prst="rect">
+            <a:avLst/>
+          </a:prstGeom>
+          <a:noFill/>
+          <a:ln/>
+        </p:spPr>
+        <p:txBody>
+          <a:bodyPr wrap="square" lIns="0" tIns="0" rIns="0" bIns="0" rtlCol="0" anchor="t">
             <a:normAutofit/>
           </a:bodyPr>
           <a:lstStyle/>
           <a:p>
-            <a:pPr algn="ctr" indent="0" marL="0">
+            <a:pPr algn="l" indent="0" marL="0">
               <a:lnSpc>
                 <a:spcPts val="1960"/>
               </a:lnSpc>
@@ -12895,7 +12896,7 @@
                 <a:ea typeface="DM Sans" pitchFamily="34" charset="-122"/>
                 <a:cs typeface="DM Sans" pitchFamily="34" charset="-120"/>
               </a:rPr>
-              <a:t>ViewModel</a:t>
+              <a:t>Navigation Compose</a:t>
             </a:r>
             <a:endParaRPr lang="en-US" sz="1400" dirty="0"/>
           </a:p>
@@ -12903,14 +12904,58 @@
       </p:sp>
       <p:sp>
         <p:nvSpPr>
-          <p:cNvPr id="11" name="Text 9"/>
-          <p:cNvSpPr/>
-          <p:nvPr/>
-        </p:nvSpPr>
-        <p:spPr>
-          <a:xfrm>
-            <a:off x="6490196" y="2072481"/>
-            <a:ext cx="677366" cy="350441"/>
+          <p:cNvPr id="16" name="Text 11"/>
+          <p:cNvSpPr/>
+          <p:nvPr/>
+        </p:nvSpPr>
+        <p:spPr>
+          <a:xfrm>
+            <a:off x="812800" y="1965920"/>
+            <a:ext cx="2485390" cy="274241"/>
+          </a:xfrm>
+          <a:prstGeom prst="rect">
+            <a:avLst/>
+          </a:prstGeom>
+          <a:noFill/>
+          <a:ln/>
+        </p:spPr>
+        <p:txBody>
+          <a:bodyPr wrap="square" lIns="0" tIns="0" rIns="0" bIns="0" rtlCol="0" anchor="t">
+            <a:normAutofit/>
+          </a:bodyPr>
+          <a:lstStyle/>
+          <a:p>
+            <a:pPr algn="l" indent="0" marL="0">
+              <a:lnSpc>
+                <a:spcPts val="1960"/>
+              </a:lnSpc>
+              <a:buNone/>
+            </a:pPr>
+            <a:r>
+              <a:rPr lang="en-US" sz="1400" b="1" dirty="0">
+                <a:solidFill>
+                  <a:srgbClr val="17203E"/>
+                </a:solidFill>
+                <a:latin typeface="DM Sans" pitchFamily="34" charset="0"/>
+                <a:ea typeface="DM Sans" pitchFamily="34" charset="-122"/>
+                <a:cs typeface="DM Sans" pitchFamily="34" charset="-120"/>
+              </a:rPr>
+              <a:t>Lógica</a:t>
+            </a:r>
+            <a:endParaRPr lang="en-US" sz="1400" dirty="0"/>
+          </a:p>
+        </p:txBody>
+      </p:sp>
+      <p:sp>
+        <p:nvSpPr>
+          <p:cNvPr id="17" name="Shape 12"/>
+          <p:cNvSpPr/>
+          <p:nvPr/>
+        </p:nvSpPr>
+        <p:spPr>
+          <a:xfrm>
+            <a:off x="3378200" y="1899841"/>
+            <a:ext cx="1050826" cy="381000"/>
           </a:xfrm>
           <a:prstGeom prst="roundRect">
             <a:avLst>
@@ -12922,87 +12967,17 @@
           </a:solidFill>
           <a:ln/>
         </p:spPr>
-        <p:txBody>
-          <a:bodyPr wrap="none" lIns="0" tIns="0" rIns="0" bIns="0" rtlCol="0" anchor="ctr">
-            <a:normAutofit/>
-          </a:bodyPr>
-          <a:lstStyle/>
-          <a:p>
-            <a:pPr algn="ctr" indent="0" marL="0">
-              <a:lnSpc>
-                <a:spcPts val="1960"/>
-              </a:lnSpc>
-              <a:buNone/>
-            </a:pPr>
-            <a:r>
-              <a:rPr lang="en-US" sz="1400" dirty="0">
-                <a:solidFill>
-                  <a:srgbClr val="EAF2F6"/>
-                </a:solidFill>
-                <a:latin typeface="DM Sans" pitchFamily="34" charset="0"/>
-                <a:ea typeface="DM Sans" pitchFamily="34" charset="-122"/>
-                <a:cs typeface="DM Sans" pitchFamily="34" charset="-120"/>
-              </a:rPr>
-              <a:t>Flow</a:t>
-            </a:r>
-            <a:endParaRPr lang="en-US" sz="1400" dirty="0"/>
-          </a:p>
-        </p:txBody>
-      </p:sp>
-      <p:sp>
-        <p:nvSpPr>
-          <p:cNvPr id="12" name="Text 10"/>
-          <p:cNvSpPr/>
-          <p:nvPr/>
-        </p:nvSpPr>
-        <p:spPr>
-          <a:xfrm>
-            <a:off x="812800" y="2676922"/>
-            <a:ext cx="2485390" cy="274241"/>
-          </a:xfrm>
-          <a:prstGeom prst="rect">
-            <a:avLst/>
-          </a:prstGeom>
-          <a:noFill/>
-          <a:ln/>
-        </p:spPr>
-        <p:txBody>
-          <a:bodyPr wrap="square" lIns="0" tIns="0" rIns="0" bIns="0" rtlCol="0" anchor="t">
-            <a:normAutofit/>
-          </a:bodyPr>
-          <a:lstStyle/>
-          <a:p>
-            <a:pPr algn="l" indent="0" marL="0">
-              <a:lnSpc>
-                <a:spcPts val="1960"/>
-              </a:lnSpc>
-              <a:buNone/>
-            </a:pPr>
-            <a:r>
-              <a:rPr lang="en-US" sz="1400" b="1" dirty="0">
-                <a:solidFill>
-                  <a:srgbClr val="17203E"/>
-                </a:solidFill>
-                <a:latin typeface="DM Sans" pitchFamily="34" charset="0"/>
-                <a:ea typeface="DM Sans" pitchFamily="34" charset="-122"/>
-                <a:cs typeface="DM Sans" pitchFamily="34" charset="-120"/>
-              </a:rPr>
-              <a:t>Datos locales</a:t>
-            </a:r>
-            <a:endParaRPr lang="en-US" sz="1400" dirty="0"/>
-          </a:p>
-        </p:txBody>
-      </p:sp>
-      <p:sp>
-        <p:nvSpPr>
-          <p:cNvPr id="13" name="Text 11"/>
-          <p:cNvSpPr/>
-          <p:nvPr/>
-        </p:nvSpPr>
-        <p:spPr>
-          <a:xfrm>
-            <a:off x="3378200" y="2626122"/>
-            <a:ext cx="1499691" cy="350441"/>
+      </p:sp>
+      <p:sp>
+        <p:nvSpPr>
+          <p:cNvPr id="18" name="Shape 13"/>
+          <p:cNvSpPr/>
+          <p:nvPr/>
+        </p:nvSpPr>
+        <p:spPr>
+          <a:xfrm>
+            <a:off x="3416300" y="1937941"/>
+            <a:ext cx="304800" cy="304800"/>
           </a:xfrm>
           <a:prstGeom prst="roundRect">
             <a:avLst>
@@ -13010,17 +12985,58 @@
             </a:avLst>
           </a:prstGeom>
           <a:solidFill>
-            <a:srgbClr val="065A82"/>
+            <a:srgbClr val="FFFFFF"/>
           </a:solidFill>
           <a:ln/>
         </p:spPr>
-        <p:txBody>
-          <a:bodyPr wrap="none" lIns="0" tIns="0" rIns="0" bIns="0" rtlCol="0" anchor="ctr">
+      </p:sp>
+      <p:pic>
+        <p:nvPicPr>
+          <p:cNvPr id="19" name="Image 3" descr="Logo de Kotlin">    </p:cNvPr>
+          <p:cNvPicPr>
+            <a:picLocks noChangeAspect="1"/>
+          </p:cNvPicPr>
+          <p:nvPr/>
+        </p:nvPicPr>
+        <p:blipFill>
+          <a:blip r:embed="rId4"/>
+          <a:srcRect l="0" r="0" t="0" b="0"/>
+          <a:stretch/>
+        </p:blipFill>
+        <p:spPr>
+          <a:xfrm>
+            <a:off x="3467100" y="1988741"/>
+            <a:ext cx="203200" cy="203200"/>
+          </a:xfrm>
+          <a:prstGeom prst="rect">
+            <a:avLst/>
+          </a:prstGeom>
+        </p:spPr>
+      </p:pic>
+      <p:sp>
+        <p:nvSpPr>
+          <p:cNvPr id="20" name="Text 14"/>
+          <p:cNvSpPr/>
+          <p:nvPr/>
+        </p:nvSpPr>
+        <p:spPr>
+          <a:xfrm>
+            <a:off x="3797300" y="1965920"/>
+            <a:ext cx="544711" cy="274241"/>
+          </a:xfrm>
+          <a:prstGeom prst="rect">
+            <a:avLst/>
+          </a:prstGeom>
+          <a:noFill/>
+          <a:ln/>
+        </p:spPr>
+        <p:txBody>
+          <a:bodyPr wrap="square" lIns="0" tIns="0" rIns="0" bIns="0" rtlCol="0" anchor="t">
             <a:normAutofit/>
           </a:bodyPr>
           <a:lstStyle/>
           <a:p>
-            <a:pPr algn="ctr" indent="0" marL="0">
+            <a:pPr algn="l" indent="0" marL="0">
               <a:lnSpc>
                 <a:spcPts val="1960"/>
               </a:lnSpc>
@@ -13035,7 +13051,7 @@
                 <a:ea typeface="DM Sans" pitchFamily="34" charset="-122"/>
                 <a:cs typeface="DM Sans" pitchFamily="34" charset="-120"/>
               </a:rPr>
-              <a:t>Room (SQLite)</a:t>
+              <a:t>Kotlin</a:t>
             </a:r>
             <a:endParaRPr lang="en-US" sz="1400" dirty="0"/>
           </a:p>
@@ -13043,14 +13059,14 @@
       </p:sp>
       <p:sp>
         <p:nvSpPr>
-          <p:cNvPr id="14" name="Text 12"/>
-          <p:cNvSpPr/>
-          <p:nvPr/>
-        </p:nvSpPr>
-        <p:spPr>
-          <a:xfrm>
-            <a:off x="4979491" y="2626122"/>
-            <a:ext cx="614958" cy="350441"/>
+          <p:cNvPr id="21" name="Text 15"/>
+          <p:cNvSpPr/>
+          <p:nvPr/>
+        </p:nvSpPr>
+        <p:spPr>
+          <a:xfrm>
+            <a:off x="4530626" y="1915120"/>
+            <a:ext cx="841772" cy="350441"/>
           </a:xfrm>
           <a:prstGeom prst="roundRect">
             <a:avLst>
@@ -13083,7 +13099,7 @@
                 <a:ea typeface="DM Sans" pitchFamily="34" charset="-122"/>
                 <a:cs typeface="DM Sans" pitchFamily="34" charset="-120"/>
               </a:rPr>
-              <a:t>KSP</a:t>
+              <a:t>MVVM</a:t>
             </a:r>
             <a:endParaRPr lang="en-US" sz="1400" dirty="0"/>
           </a:p>
@@ -13091,14 +13107,14 @@
       </p:sp>
       <p:sp>
         <p:nvSpPr>
-          <p:cNvPr id="15" name="Text 13"/>
-          <p:cNvSpPr/>
-          <p:nvPr/>
-        </p:nvSpPr>
-        <p:spPr>
-          <a:xfrm>
-            <a:off x="5696049" y="2626122"/>
-            <a:ext cx="2123877" cy="350441"/>
+          <p:cNvPr id="22" name="Text 16"/>
+          <p:cNvSpPr/>
+          <p:nvPr/>
+        </p:nvSpPr>
+        <p:spPr>
+          <a:xfrm>
+            <a:off x="5473998" y="1915120"/>
+            <a:ext cx="1206698" cy="350441"/>
           </a:xfrm>
           <a:prstGeom prst="roundRect">
             <a:avLst>
@@ -13131,7 +13147,7 @@
                 <a:ea typeface="DM Sans" pitchFamily="34" charset="-122"/>
                 <a:cs typeface="DM Sans" pitchFamily="34" charset="-120"/>
               </a:rPr>
-              <a:t>Migraciones explícitas</a:t>
+              <a:t>ViewModel</a:t>
             </a:r>
             <a:endParaRPr lang="en-US" sz="1400" dirty="0"/>
           </a:p>
@@ -13139,58 +13155,14 @@
       </p:sp>
       <p:sp>
         <p:nvSpPr>
-          <p:cNvPr id="16" name="Text 14"/>
-          <p:cNvSpPr/>
-          <p:nvPr/>
-        </p:nvSpPr>
-        <p:spPr>
-          <a:xfrm>
-            <a:off x="812800" y="3230563"/>
-            <a:ext cx="2485390" cy="274241"/>
-          </a:xfrm>
-          <a:prstGeom prst="rect">
-            <a:avLst/>
-          </a:prstGeom>
-          <a:noFill/>
-          <a:ln/>
-        </p:spPr>
-        <p:txBody>
-          <a:bodyPr wrap="square" lIns="0" tIns="0" rIns="0" bIns="0" rtlCol="0" anchor="t">
-            <a:normAutofit/>
-          </a:bodyPr>
-          <a:lstStyle/>
-          <a:p>
-            <a:pPr algn="l" indent="0" marL="0">
-              <a:lnSpc>
-                <a:spcPts val="1960"/>
-              </a:lnSpc>
-              <a:buNone/>
-            </a:pPr>
-            <a:r>
-              <a:rPr lang="en-US" sz="1400" b="1" dirty="0">
-                <a:solidFill>
-                  <a:srgbClr val="17203E"/>
-                </a:solidFill>
-                <a:latin typeface="DM Sans" pitchFamily="34" charset="0"/>
-                <a:ea typeface="DM Sans" pitchFamily="34" charset="-122"/>
-                <a:cs typeface="DM Sans" pitchFamily="34" charset="-120"/>
-              </a:rPr>
-              <a:t>Android</a:t>
-            </a:r>
-            <a:endParaRPr lang="en-US" sz="1400" dirty="0"/>
-          </a:p>
-        </p:txBody>
-      </p:sp>
-      <p:sp>
-        <p:nvSpPr>
-          <p:cNvPr id="17" name="Text 15"/>
-          <p:cNvSpPr/>
-          <p:nvPr/>
-        </p:nvSpPr>
-        <p:spPr>
-          <a:xfrm>
-            <a:off x="3378200" y="3179763"/>
-            <a:ext cx="1937445" cy="350441"/>
+          <p:cNvPr id="23" name="Text 17"/>
+          <p:cNvSpPr/>
+          <p:nvPr/>
+        </p:nvSpPr>
+        <p:spPr>
+          <a:xfrm>
+            <a:off x="6782296" y="1915120"/>
+            <a:ext cx="677366" cy="350441"/>
           </a:xfrm>
           <a:prstGeom prst="roundRect">
             <a:avLst>
@@ -13223,7 +13195,7 @@
                 <a:ea typeface="DM Sans" pitchFamily="34" charset="-122"/>
                 <a:cs typeface="DM Sans" pitchFamily="34" charset="-120"/>
               </a:rPr>
-              <a:t>UsageStatsManager</a:t>
+              <a:t>Flow</a:t>
             </a:r>
             <a:endParaRPr lang="en-US" sz="1400" dirty="0"/>
           </a:p>
@@ -13231,14 +13203,58 @@
       </p:sp>
       <p:sp>
         <p:nvSpPr>
-          <p:cNvPr id="18" name="Text 16"/>
-          <p:cNvSpPr/>
-          <p:nvPr/>
-        </p:nvSpPr>
-        <p:spPr>
-          <a:xfrm>
-            <a:off x="5417245" y="3179763"/>
-            <a:ext cx="1436191" cy="350441"/>
+          <p:cNvPr id="24" name="Text 18"/>
+          <p:cNvSpPr/>
+          <p:nvPr/>
+        </p:nvSpPr>
+        <p:spPr>
+          <a:xfrm>
+            <a:off x="812800" y="2499320"/>
+            <a:ext cx="2485390" cy="274241"/>
+          </a:xfrm>
+          <a:prstGeom prst="rect">
+            <a:avLst/>
+          </a:prstGeom>
+          <a:noFill/>
+          <a:ln/>
+        </p:spPr>
+        <p:txBody>
+          <a:bodyPr wrap="square" lIns="0" tIns="0" rIns="0" bIns="0" rtlCol="0" anchor="t">
+            <a:normAutofit/>
+          </a:bodyPr>
+          <a:lstStyle/>
+          <a:p>
+            <a:pPr algn="l" indent="0" marL="0">
+              <a:lnSpc>
+                <a:spcPts val="1960"/>
+              </a:lnSpc>
+              <a:buNone/>
+            </a:pPr>
+            <a:r>
+              <a:rPr lang="en-US" sz="1400" b="1" dirty="0">
+                <a:solidFill>
+                  <a:srgbClr val="17203E"/>
+                </a:solidFill>
+                <a:latin typeface="DM Sans" pitchFamily="34" charset="0"/>
+                <a:ea typeface="DM Sans" pitchFamily="34" charset="-122"/>
+                <a:cs typeface="DM Sans" pitchFamily="34" charset="-120"/>
+              </a:rPr>
+              <a:t>Datos locales</a:t>
+            </a:r>
+            <a:endParaRPr lang="en-US" sz="1400" dirty="0"/>
+          </a:p>
+        </p:txBody>
+      </p:sp>
+      <p:sp>
+        <p:nvSpPr>
+          <p:cNvPr id="25" name="Shape 19"/>
+          <p:cNvSpPr/>
+          <p:nvPr/>
+        </p:nvSpPr>
+        <p:spPr>
+          <a:xfrm>
+            <a:off x="3378200" y="2433241"/>
+            <a:ext cx="1791791" cy="381000"/>
           </a:xfrm>
           <a:prstGeom prst="roundRect">
             <a:avLst>
@@ -13250,43 +13266,17 @@
           </a:solidFill>
           <a:ln/>
         </p:spPr>
-        <p:txBody>
-          <a:bodyPr wrap="none" lIns="0" tIns="0" rIns="0" bIns="0" rtlCol="0" anchor="ctr">
-            <a:normAutofit/>
-          </a:bodyPr>
-          <a:lstStyle/>
-          <a:p>
-            <a:pPr algn="ctr" indent="0" marL="0">
-              <a:lnSpc>
-                <a:spcPts val="1960"/>
-              </a:lnSpc>
-              <a:buNone/>
-            </a:pPr>
-            <a:r>
-              <a:rPr lang="en-US" sz="1400" dirty="0">
-                <a:solidFill>
-                  <a:srgbClr val="EAF2F6"/>
-                </a:solidFill>
-                <a:latin typeface="DM Sans" pitchFamily="34" charset="0"/>
-                <a:ea typeface="DM Sans" pitchFamily="34" charset="-122"/>
-                <a:cs typeface="DM Sans" pitchFamily="34" charset="-120"/>
-              </a:rPr>
-              <a:t>WorkManager</a:t>
-            </a:r>
-            <a:endParaRPr lang="en-US" sz="1400" dirty="0"/>
-          </a:p>
-        </p:txBody>
-      </p:sp>
-      <p:sp>
-        <p:nvSpPr>
-          <p:cNvPr id="19" name="Text 17"/>
-          <p:cNvSpPr/>
-          <p:nvPr/>
-        </p:nvSpPr>
-        <p:spPr>
-          <a:xfrm>
-            <a:off x="6955036" y="3179763"/>
-            <a:ext cx="1447403" cy="350441"/>
+      </p:sp>
+      <p:sp>
+        <p:nvSpPr>
+          <p:cNvPr id="26" name="Shape 20"/>
+          <p:cNvSpPr/>
+          <p:nvPr/>
+        </p:nvSpPr>
+        <p:spPr>
+          <a:xfrm>
+            <a:off x="3416300" y="2471341"/>
+            <a:ext cx="304800" cy="304800"/>
           </a:xfrm>
           <a:prstGeom prst="roundRect">
             <a:avLst>
@@ -13294,17 +13284,58 @@
             </a:avLst>
           </a:prstGeom>
           <a:solidFill>
-            <a:srgbClr val="065A82"/>
+            <a:srgbClr val="FFFFFF"/>
           </a:solidFill>
           <a:ln/>
         </p:spPr>
-        <p:txBody>
-          <a:bodyPr wrap="none" lIns="0" tIns="0" rIns="0" bIns="0" rtlCol="0" anchor="ctr">
+      </p:sp>
+      <p:pic>
+        <p:nvPicPr>
+          <p:cNvPr id="27" name="Image 4" descr="Logo de SQLite">    </p:cNvPr>
+          <p:cNvPicPr>
+            <a:picLocks noChangeAspect="1"/>
+          </p:cNvPicPr>
+          <p:nvPr/>
+        </p:nvPicPr>
+        <p:blipFill>
+          <a:blip r:embed="rId5"/>
+          <a:srcRect l="0" r="0" t="0" b="0"/>
+          <a:stretch/>
+        </p:blipFill>
+        <p:spPr>
+          <a:xfrm>
+            <a:off x="3467100" y="2522141"/>
+            <a:ext cx="203200" cy="203200"/>
+          </a:xfrm>
+          <a:prstGeom prst="rect">
+            <a:avLst/>
+          </a:prstGeom>
+        </p:spPr>
+      </p:pic>
+      <p:sp>
+        <p:nvSpPr>
+          <p:cNvPr id="28" name="Text 21"/>
+          <p:cNvSpPr/>
+          <p:nvPr/>
+        </p:nvSpPr>
+        <p:spPr>
+          <a:xfrm>
+            <a:off x="3797300" y="2499320"/>
+            <a:ext cx="1372691" cy="274241"/>
+          </a:xfrm>
+          <a:prstGeom prst="rect">
+            <a:avLst/>
+          </a:prstGeom>
+          <a:noFill/>
+          <a:ln/>
+        </p:spPr>
+        <p:txBody>
+          <a:bodyPr wrap="square" lIns="0" tIns="0" rIns="0" bIns="0" rtlCol="0" anchor="t">
             <a:normAutofit/>
           </a:bodyPr>
           <a:lstStyle/>
           <a:p>
-            <a:pPr algn="ctr" indent="0" marL="0">
+            <a:pPr algn="l" indent="0" marL="0">
               <a:lnSpc>
                 <a:spcPts val="1960"/>
               </a:lnSpc>
@@ -13319,7 +13350,7 @@
                 <a:ea typeface="DM Sans" pitchFamily="34" charset="-122"/>
                 <a:cs typeface="DM Sans" pitchFamily="34" charset="-120"/>
               </a:rPr>
-              <a:t>Usage Access</a:t>
+              <a:t>Room (SQLite)</a:t>
             </a:r>
             <a:endParaRPr lang="en-US" sz="1400" dirty="0"/>
           </a:p>
@@ -13327,58 +13358,14 @@
       </p:sp>
       <p:sp>
         <p:nvSpPr>
-          <p:cNvPr id="20" name="Text 18"/>
-          <p:cNvSpPr/>
-          <p:nvPr/>
-        </p:nvSpPr>
-        <p:spPr>
-          <a:xfrm>
-            <a:off x="812800" y="3784203"/>
-            <a:ext cx="2485390" cy="274241"/>
-          </a:xfrm>
-          <a:prstGeom prst="rect">
-            <a:avLst/>
-          </a:prstGeom>
-          <a:noFill/>
-          <a:ln/>
-        </p:spPr>
-        <p:txBody>
-          <a:bodyPr wrap="square" lIns="0" tIns="0" rIns="0" bIns="0" rtlCol="0" anchor="t">
-            <a:normAutofit/>
-          </a:bodyPr>
-          <a:lstStyle/>
-          <a:p>
-            <a:pPr algn="l" indent="0" marL="0">
-              <a:lnSpc>
-                <a:spcPts val="1960"/>
-              </a:lnSpc>
-              <a:buNone/>
-            </a:pPr>
-            <a:r>
-              <a:rPr lang="en-US" sz="1400" b="1" dirty="0">
-                <a:solidFill>
-                  <a:srgbClr val="17203E"/>
-                </a:solidFill>
-                <a:latin typeface="DM Sans" pitchFamily="34" charset="0"/>
-                <a:ea typeface="DM Sans" pitchFamily="34" charset="-122"/>
-                <a:cs typeface="DM Sans" pitchFamily="34" charset="-120"/>
-              </a:rPr>
-              <a:t>Seguridad e informes</a:t>
-            </a:r>
-            <a:endParaRPr lang="en-US" sz="1400" dirty="0"/>
-          </a:p>
-        </p:txBody>
-      </p:sp>
-      <p:sp>
-        <p:nvSpPr>
-          <p:cNvPr id="21" name="Text 19"/>
-          <p:cNvSpPr/>
-          <p:nvPr/>
-        </p:nvSpPr>
-        <p:spPr>
-          <a:xfrm>
-            <a:off x="3378200" y="3733403"/>
-            <a:ext cx="1060450" cy="350441"/>
+          <p:cNvPr id="29" name="Text 22"/>
+          <p:cNvSpPr/>
+          <p:nvPr/>
+        </p:nvSpPr>
+        <p:spPr>
+          <a:xfrm>
+            <a:off x="5271591" y="2448520"/>
+            <a:ext cx="614958" cy="350441"/>
           </a:xfrm>
           <a:prstGeom prst="roundRect">
             <a:avLst>
@@ -13411,7 +13398,7 @@
                 <a:ea typeface="DM Sans" pitchFamily="34" charset="-122"/>
                 <a:cs typeface="DM Sans" pitchFamily="34" charset="-120"/>
               </a:rPr>
-              <a:t>SHA-256</a:t>
+              <a:t>KSP</a:t>
             </a:r>
             <a:endParaRPr lang="en-US" sz="1400" dirty="0"/>
           </a:p>
@@ -13419,14 +13406,14 @@
       </p:sp>
       <p:sp>
         <p:nvSpPr>
-          <p:cNvPr id="22" name="Text 20"/>
-          <p:cNvSpPr/>
-          <p:nvPr/>
-        </p:nvSpPr>
-        <p:spPr>
-          <a:xfrm>
-            <a:off x="4540250" y="3733403"/>
-            <a:ext cx="1437283" cy="350441"/>
+          <p:cNvPr id="30" name="Text 23"/>
+          <p:cNvSpPr/>
+          <p:nvPr/>
+        </p:nvSpPr>
+        <p:spPr>
+          <a:xfrm>
+            <a:off x="5988149" y="2448520"/>
+            <a:ext cx="2123877" cy="350441"/>
           </a:xfrm>
           <a:prstGeom prst="roundRect">
             <a:avLst>
@@ -13459,7 +13446,7 @@
                 <a:ea typeface="DM Sans" pitchFamily="34" charset="-122"/>
                 <a:cs typeface="DM Sans" pitchFamily="34" charset="-120"/>
               </a:rPr>
-              <a:t>PdfDocument</a:t>
+              <a:t>Migraciones explícitas</a:t>
             </a:r>
             <a:endParaRPr lang="en-US" sz="1400" dirty="0"/>
           </a:p>
@@ -13467,14 +13454,58 @@
       </p:sp>
       <p:sp>
         <p:nvSpPr>
-          <p:cNvPr id="23" name="Text 21"/>
-          <p:cNvSpPr/>
-          <p:nvPr/>
-        </p:nvSpPr>
-        <p:spPr>
-          <a:xfrm>
-            <a:off x="6079133" y="3733403"/>
-            <a:ext cx="1264444" cy="350441"/>
+          <p:cNvPr id="31" name="Text 24"/>
+          <p:cNvSpPr/>
+          <p:nvPr/>
+        </p:nvSpPr>
+        <p:spPr>
+          <a:xfrm>
+            <a:off x="812800" y="3032720"/>
+            <a:ext cx="2485390" cy="274241"/>
+          </a:xfrm>
+          <a:prstGeom prst="rect">
+            <a:avLst/>
+          </a:prstGeom>
+          <a:noFill/>
+          <a:ln/>
+        </p:spPr>
+        <p:txBody>
+          <a:bodyPr wrap="square" lIns="0" tIns="0" rIns="0" bIns="0" rtlCol="0" anchor="t">
+            <a:normAutofit/>
+          </a:bodyPr>
+          <a:lstStyle/>
+          <a:p>
+            <a:pPr algn="l" indent="0" marL="0">
+              <a:lnSpc>
+                <a:spcPts val="1960"/>
+              </a:lnSpc>
+              <a:buNone/>
+            </a:pPr>
+            <a:r>
+              <a:rPr lang="en-US" sz="1400" b="1" dirty="0">
+                <a:solidFill>
+                  <a:srgbClr val="17203E"/>
+                </a:solidFill>
+                <a:latin typeface="DM Sans" pitchFamily="34" charset="0"/>
+                <a:ea typeface="DM Sans" pitchFamily="34" charset="-122"/>
+                <a:cs typeface="DM Sans" pitchFamily="34" charset="-120"/>
+              </a:rPr>
+              <a:t>Android</a:t>
+            </a:r>
+            <a:endParaRPr lang="en-US" sz="1400" dirty="0"/>
+          </a:p>
+        </p:txBody>
+      </p:sp>
+      <p:sp>
+        <p:nvSpPr>
+          <p:cNvPr id="32" name="Shape 25"/>
+          <p:cNvSpPr/>
+          <p:nvPr/>
+        </p:nvSpPr>
+        <p:spPr>
+          <a:xfrm>
+            <a:off x="3378200" y="2966641"/>
+            <a:ext cx="2229545" cy="381000"/>
           </a:xfrm>
           <a:prstGeom prst="roundRect">
             <a:avLst>
@@ -13486,87 +13517,17 @@
           </a:solidFill>
           <a:ln/>
         </p:spPr>
-        <p:txBody>
-          <a:bodyPr wrap="none" lIns="0" tIns="0" rIns="0" bIns="0" rtlCol="0" anchor="ctr">
-            <a:normAutofit/>
-          </a:bodyPr>
-          <a:lstStyle/>
-          <a:p>
-            <a:pPr algn="ctr" indent="0" marL="0">
-              <a:lnSpc>
-                <a:spcPts val="1960"/>
-              </a:lnSpc>
-              <a:buNone/>
-            </a:pPr>
-            <a:r>
-              <a:rPr lang="en-US" sz="1400" dirty="0">
-                <a:solidFill>
-                  <a:srgbClr val="EAF2F6"/>
-                </a:solidFill>
-                <a:latin typeface="DM Sans" pitchFamily="34" charset="0"/>
-                <a:ea typeface="DM Sans" pitchFamily="34" charset="-122"/>
-                <a:cs typeface="DM Sans" pitchFamily="34" charset="-120"/>
-              </a:rPr>
-              <a:t>FileProvider</a:t>
-            </a:r>
-            <a:endParaRPr lang="en-US" sz="1400" dirty="0"/>
-          </a:p>
-        </p:txBody>
-      </p:sp>
-      <p:sp>
-        <p:nvSpPr>
-          <p:cNvPr id="24" name="Text 22"/>
-          <p:cNvSpPr/>
-          <p:nvPr/>
-        </p:nvSpPr>
-        <p:spPr>
-          <a:xfrm>
-            <a:off x="812800" y="4337844"/>
-            <a:ext cx="2485390" cy="274241"/>
-          </a:xfrm>
-          <a:prstGeom prst="rect">
-            <a:avLst/>
-          </a:prstGeom>
-          <a:noFill/>
-          <a:ln/>
-        </p:spPr>
-        <p:txBody>
-          <a:bodyPr wrap="square" lIns="0" tIns="0" rIns="0" bIns="0" rtlCol="0" anchor="t">
-            <a:normAutofit/>
-          </a:bodyPr>
-          <a:lstStyle/>
-          <a:p>
-            <a:pPr algn="l" indent="0" marL="0">
-              <a:lnSpc>
-                <a:spcPts val="1960"/>
-              </a:lnSpc>
-              <a:buNone/>
-            </a:pPr>
-            <a:r>
-              <a:rPr lang="en-US" sz="1400" b="1" dirty="0">
-                <a:solidFill>
-                  <a:srgbClr val="17203E"/>
-                </a:solidFill>
-                <a:latin typeface="DM Sans" pitchFamily="34" charset="0"/>
-                <a:ea typeface="DM Sans" pitchFamily="34" charset="-122"/>
-                <a:cs typeface="DM Sans" pitchFamily="34" charset="-120"/>
-              </a:rPr>
-              <a:t>Herramientas</a:t>
-            </a:r>
-            <a:endParaRPr lang="en-US" sz="1400" dirty="0"/>
-          </a:p>
-        </p:txBody>
-      </p:sp>
-      <p:sp>
-        <p:nvSpPr>
-          <p:cNvPr id="25" name="Text 23"/>
-          <p:cNvSpPr/>
-          <p:nvPr/>
-        </p:nvSpPr>
-        <p:spPr>
-          <a:xfrm>
-            <a:off x="3378200" y="4287044"/>
-            <a:ext cx="1540073" cy="350441"/>
+      </p:sp>
+      <p:sp>
+        <p:nvSpPr>
+          <p:cNvPr id="33" name="Shape 26"/>
+          <p:cNvSpPr/>
+          <p:nvPr/>
+        </p:nvSpPr>
+        <p:spPr>
+          <a:xfrm>
+            <a:off x="3416300" y="3004741"/>
+            <a:ext cx="304800" cy="304800"/>
           </a:xfrm>
           <a:prstGeom prst="roundRect">
             <a:avLst>
@@ -13574,17 +13535,58 @@
             </a:avLst>
           </a:prstGeom>
           <a:solidFill>
-            <a:srgbClr val="065A82"/>
+            <a:srgbClr val="FFFFFF"/>
           </a:solidFill>
           <a:ln/>
         </p:spPr>
-        <p:txBody>
-          <a:bodyPr wrap="none" lIns="0" tIns="0" rIns="0" bIns="0" rtlCol="0" anchor="ctr">
+      </p:sp>
+      <p:pic>
+        <p:nvPicPr>
+          <p:cNvPr id="34" name="Image 5" descr="Logo de Android">    </p:cNvPr>
+          <p:cNvPicPr>
+            <a:picLocks noChangeAspect="1"/>
+          </p:cNvPicPr>
+          <p:nvPr/>
+        </p:nvPicPr>
+        <p:blipFill>
+          <a:blip r:embed="rId6"/>
+          <a:srcRect l="0" r="0" t="0" b="0"/>
+          <a:stretch/>
+        </p:blipFill>
+        <p:spPr>
+          <a:xfrm>
+            <a:off x="3467100" y="3055541"/>
+            <a:ext cx="203200" cy="203200"/>
+          </a:xfrm>
+          <a:prstGeom prst="rect">
+            <a:avLst/>
+          </a:prstGeom>
+        </p:spPr>
+      </p:pic>
+      <p:sp>
+        <p:nvSpPr>
+          <p:cNvPr id="35" name="Text 27"/>
+          <p:cNvSpPr/>
+          <p:nvPr/>
+        </p:nvSpPr>
+        <p:spPr>
+          <a:xfrm>
+            <a:off x="3797300" y="3032720"/>
+            <a:ext cx="1810445" cy="274241"/>
+          </a:xfrm>
+          <a:prstGeom prst="rect">
+            <a:avLst/>
+          </a:prstGeom>
+          <a:noFill/>
+          <a:ln/>
+        </p:spPr>
+        <p:txBody>
+          <a:bodyPr wrap="square" lIns="0" tIns="0" rIns="0" bIns="0" rtlCol="0" anchor="t">
             <a:normAutofit/>
           </a:bodyPr>
           <a:lstStyle/>
           <a:p>
-            <a:pPr algn="ctr" indent="0" marL="0">
+            <a:pPr algn="l" indent="0" marL="0">
               <a:lnSpc>
                 <a:spcPts val="1960"/>
               </a:lnSpc>
@@ -13599,7 +13601,7 @@
                 <a:ea typeface="DM Sans" pitchFamily="34" charset="-122"/>
                 <a:cs typeface="DM Sans" pitchFamily="34" charset="-120"/>
               </a:rPr>
-              <a:t>Android Studio</a:t>
+              <a:t>UsageStatsManager</a:t>
             </a:r>
             <a:endParaRPr lang="en-US" sz="1400" dirty="0"/>
           </a:p>
@@ -13607,14 +13609,14 @@
       </p:sp>
       <p:sp>
         <p:nvSpPr>
-          <p:cNvPr id="26" name="Text 24"/>
-          <p:cNvSpPr/>
-          <p:nvPr/>
-        </p:nvSpPr>
-        <p:spPr>
-          <a:xfrm>
-            <a:off x="5019873" y="4287044"/>
-            <a:ext cx="1326852" cy="350441"/>
+          <p:cNvPr id="36" name="Shape 28"/>
+          <p:cNvSpPr/>
+          <p:nvPr/>
+        </p:nvSpPr>
+        <p:spPr>
+          <a:xfrm>
+            <a:off x="5709345" y="2966641"/>
+            <a:ext cx="1728291" cy="381000"/>
           </a:xfrm>
           <a:prstGeom prst="roundRect">
             <a:avLst>
@@ -13626,43 +13628,17 @@
           </a:solidFill>
           <a:ln/>
         </p:spPr>
-        <p:txBody>
-          <a:bodyPr wrap="none" lIns="0" tIns="0" rIns="0" bIns="0" rtlCol="0" anchor="ctr">
-            <a:normAutofit/>
-          </a:bodyPr>
-          <a:lstStyle/>
-          <a:p>
-            <a:pPr algn="ctr" indent="0" marL="0">
-              <a:lnSpc>
-                <a:spcPts val="1960"/>
-              </a:lnSpc>
-              <a:buNone/>
-            </a:pPr>
-            <a:r>
-              <a:rPr lang="en-US" sz="1400" dirty="0">
-                <a:solidFill>
-                  <a:srgbClr val="EAF2F6"/>
-                </a:solidFill>
-                <a:latin typeface="DM Sans" pitchFamily="34" charset="0"/>
-                <a:ea typeface="DM Sans" pitchFamily="34" charset="-122"/>
-                <a:cs typeface="DM Sans" pitchFamily="34" charset="-120"/>
-              </a:rPr>
-              <a:t>Git y GitHub</a:t>
-            </a:r>
-            <a:endParaRPr lang="en-US" sz="1400" dirty="0"/>
-          </a:p>
-        </p:txBody>
-      </p:sp>
-      <p:sp>
-        <p:nvSpPr>
-          <p:cNvPr id="27" name="Text 25"/>
-          <p:cNvSpPr/>
-          <p:nvPr/>
-        </p:nvSpPr>
-        <p:spPr>
-          <a:xfrm>
-            <a:off x="6448326" y="4287044"/>
-            <a:ext cx="724793" cy="350441"/>
+      </p:sp>
+      <p:sp>
+        <p:nvSpPr>
+          <p:cNvPr id="37" name="Shape 29"/>
+          <p:cNvSpPr/>
+          <p:nvPr/>
+        </p:nvSpPr>
+        <p:spPr>
+          <a:xfrm>
+            <a:off x="5747445" y="3004741"/>
+            <a:ext cx="304800" cy="304800"/>
           </a:xfrm>
           <a:prstGeom prst="roundRect">
             <a:avLst>
@@ -13670,6 +13646,250 @@
             </a:avLst>
           </a:prstGeom>
           <a:solidFill>
+            <a:srgbClr val="FFFFFF"/>
+          </a:solidFill>
+          <a:ln/>
+        </p:spPr>
+      </p:sp>
+      <p:pic>
+        <p:nvPicPr>
+          <p:cNvPr id="38" name="Image 6" descr="Logo de Android">    </p:cNvPr>
+          <p:cNvPicPr>
+            <a:picLocks noChangeAspect="1"/>
+          </p:cNvPicPr>
+          <p:nvPr/>
+        </p:nvPicPr>
+        <p:blipFill>
+          <a:blip r:embed="rId7"/>
+          <a:srcRect l="0" r="0" t="0" b="0"/>
+          <a:stretch/>
+        </p:blipFill>
+        <p:spPr>
+          <a:xfrm>
+            <a:off x="5798245" y="3055541"/>
+            <a:ext cx="203200" cy="203200"/>
+          </a:xfrm>
+          <a:prstGeom prst="rect">
+            <a:avLst/>
+          </a:prstGeom>
+        </p:spPr>
+      </p:pic>
+      <p:sp>
+        <p:nvSpPr>
+          <p:cNvPr id="39" name="Text 30"/>
+          <p:cNvSpPr/>
+          <p:nvPr/>
+        </p:nvSpPr>
+        <p:spPr>
+          <a:xfrm>
+            <a:off x="6128445" y="3032720"/>
+            <a:ext cx="1309191" cy="274241"/>
+          </a:xfrm>
+          <a:prstGeom prst="rect">
+            <a:avLst/>
+          </a:prstGeom>
+          <a:noFill/>
+          <a:ln/>
+        </p:spPr>
+        <p:txBody>
+          <a:bodyPr wrap="square" lIns="0" tIns="0" rIns="0" bIns="0" rtlCol="0" anchor="t">
+            <a:normAutofit/>
+          </a:bodyPr>
+          <a:lstStyle/>
+          <a:p>
+            <a:pPr algn="l" indent="0" marL="0">
+              <a:lnSpc>
+                <a:spcPts val="1960"/>
+              </a:lnSpc>
+              <a:buNone/>
+            </a:pPr>
+            <a:r>
+              <a:rPr lang="en-US" sz="1400" dirty="0">
+                <a:solidFill>
+                  <a:srgbClr val="EAF2F6"/>
+                </a:solidFill>
+                <a:latin typeface="DM Sans" pitchFamily="34" charset="0"/>
+                <a:ea typeface="DM Sans" pitchFamily="34" charset="-122"/>
+                <a:cs typeface="DM Sans" pitchFamily="34" charset="-120"/>
+              </a:rPr>
+              <a:t>WorkManager</a:t>
+            </a:r>
+            <a:endParaRPr lang="en-US" sz="1400" dirty="0"/>
+          </a:p>
+        </p:txBody>
+      </p:sp>
+      <p:sp>
+        <p:nvSpPr>
+          <p:cNvPr id="40" name="Shape 31"/>
+          <p:cNvSpPr/>
+          <p:nvPr/>
+        </p:nvSpPr>
+        <p:spPr>
+          <a:xfrm>
+            <a:off x="7539236" y="2966641"/>
+            <a:ext cx="1739503" cy="381000"/>
+          </a:xfrm>
+          <a:prstGeom prst="roundRect">
+            <a:avLst>
+              <a:gd name="adj" fmla="val 50000"/>
+            </a:avLst>
+          </a:prstGeom>
+          <a:solidFill>
+            <a:srgbClr val="065A82"/>
+          </a:solidFill>
+          <a:ln/>
+        </p:spPr>
+      </p:sp>
+      <p:sp>
+        <p:nvSpPr>
+          <p:cNvPr id="41" name="Shape 32"/>
+          <p:cNvSpPr/>
+          <p:nvPr/>
+        </p:nvSpPr>
+        <p:spPr>
+          <a:xfrm>
+            <a:off x="7577336" y="3004741"/>
+            <a:ext cx="304800" cy="304800"/>
+          </a:xfrm>
+          <a:prstGeom prst="roundRect">
+            <a:avLst>
+              <a:gd name="adj" fmla="val 50000"/>
+            </a:avLst>
+          </a:prstGeom>
+          <a:solidFill>
+            <a:srgbClr val="FFFFFF"/>
+          </a:solidFill>
+          <a:ln/>
+        </p:spPr>
+      </p:sp>
+      <p:pic>
+        <p:nvPicPr>
+          <p:cNvPr id="42" name="Image 7" descr="Logo de Android">    </p:cNvPr>
+          <p:cNvPicPr>
+            <a:picLocks noChangeAspect="1"/>
+          </p:cNvPicPr>
+          <p:nvPr/>
+        </p:nvPicPr>
+        <p:blipFill>
+          <a:blip r:embed="rId8"/>
+          <a:srcRect l="0" r="0" t="0" b="0"/>
+          <a:stretch/>
+        </p:blipFill>
+        <p:spPr>
+          <a:xfrm>
+            <a:off x="7628136" y="3055541"/>
+            <a:ext cx="203200" cy="203200"/>
+          </a:xfrm>
+          <a:prstGeom prst="rect">
+            <a:avLst/>
+          </a:prstGeom>
+        </p:spPr>
+      </p:pic>
+      <p:sp>
+        <p:nvSpPr>
+          <p:cNvPr id="43" name="Text 33"/>
+          <p:cNvSpPr/>
+          <p:nvPr/>
+        </p:nvSpPr>
+        <p:spPr>
+          <a:xfrm>
+            <a:off x="7958336" y="3032720"/>
+            <a:ext cx="1320403" cy="274241"/>
+          </a:xfrm>
+          <a:prstGeom prst="rect">
+            <a:avLst/>
+          </a:prstGeom>
+          <a:noFill/>
+          <a:ln/>
+        </p:spPr>
+        <p:txBody>
+          <a:bodyPr wrap="square" lIns="0" tIns="0" rIns="0" bIns="0" rtlCol="0" anchor="t">
+            <a:normAutofit/>
+          </a:bodyPr>
+          <a:lstStyle/>
+          <a:p>
+            <a:pPr algn="l" indent="0" marL="0">
+              <a:lnSpc>
+                <a:spcPts val="1960"/>
+              </a:lnSpc>
+              <a:buNone/>
+            </a:pPr>
+            <a:r>
+              <a:rPr lang="en-US" sz="1400" dirty="0">
+                <a:solidFill>
+                  <a:srgbClr val="EAF2F6"/>
+                </a:solidFill>
+                <a:latin typeface="DM Sans" pitchFamily="34" charset="0"/>
+                <a:ea typeface="DM Sans" pitchFamily="34" charset="-122"/>
+                <a:cs typeface="DM Sans" pitchFamily="34" charset="-120"/>
+              </a:rPr>
+              <a:t>Usage Access</a:t>
+            </a:r>
+            <a:endParaRPr lang="en-US" sz="1400" dirty="0"/>
+          </a:p>
+        </p:txBody>
+      </p:sp>
+      <p:sp>
+        <p:nvSpPr>
+          <p:cNvPr id="44" name="Text 34"/>
+          <p:cNvSpPr/>
+          <p:nvPr/>
+        </p:nvSpPr>
+        <p:spPr>
+          <a:xfrm>
+            <a:off x="812800" y="3550841"/>
+            <a:ext cx="2485390" cy="274241"/>
+          </a:xfrm>
+          <a:prstGeom prst="rect">
+            <a:avLst/>
+          </a:prstGeom>
+          <a:noFill/>
+          <a:ln/>
+        </p:spPr>
+        <p:txBody>
+          <a:bodyPr wrap="square" lIns="0" tIns="0" rIns="0" bIns="0" rtlCol="0" anchor="t">
+            <a:normAutofit/>
+          </a:bodyPr>
+          <a:lstStyle/>
+          <a:p>
+            <a:pPr algn="l" indent="0" marL="0">
+              <a:lnSpc>
+                <a:spcPts val="1960"/>
+              </a:lnSpc>
+              <a:buNone/>
+            </a:pPr>
+            <a:r>
+              <a:rPr lang="en-US" sz="1400" b="1" dirty="0">
+                <a:solidFill>
+                  <a:srgbClr val="17203E"/>
+                </a:solidFill>
+                <a:latin typeface="DM Sans" pitchFamily="34" charset="0"/>
+                <a:ea typeface="DM Sans" pitchFamily="34" charset="-122"/>
+                <a:cs typeface="DM Sans" pitchFamily="34" charset="-120"/>
+              </a:rPr>
+              <a:t>Seguridad e informes</a:t>
+            </a:r>
+            <a:endParaRPr lang="en-US" sz="1400" dirty="0"/>
+          </a:p>
+        </p:txBody>
+      </p:sp>
+      <p:sp>
+        <p:nvSpPr>
+          <p:cNvPr id="45" name="Text 35"/>
+          <p:cNvSpPr/>
+          <p:nvPr/>
+        </p:nvSpPr>
+        <p:spPr>
+          <a:xfrm>
+            <a:off x="3378200" y="3500041"/>
+            <a:ext cx="1060450" cy="350441"/>
+          </a:xfrm>
+          <a:prstGeom prst="roundRect">
+            <a:avLst>
+              <a:gd name="adj" fmla="val 50000"/>
+            </a:avLst>
+          </a:prstGeom>
+          <a:solidFill>
             <a:srgbClr val="065A82"/>
           </a:solidFill>
           <a:ln/>
@@ -13695,7 +13915,7 @@
                 <a:ea typeface="DM Sans" pitchFamily="34" charset="-122"/>
                 <a:cs typeface="DM Sans" pitchFamily="34" charset="-120"/>
               </a:rPr>
-              <a:t>JUnit</a:t>
+              <a:t>SHA-256</a:t>
             </a:r>
             <a:endParaRPr lang="en-US" sz="1400" dirty="0"/>
           </a:p>
@@ -13703,13 +13923,109 @@
       </p:sp>
       <p:sp>
         <p:nvSpPr>
-          <p:cNvPr id="28" name="Text 26"/>
-          <p:cNvSpPr/>
-          <p:nvPr/>
-        </p:nvSpPr>
-        <p:spPr>
-          <a:xfrm>
-            <a:off x="812800" y="4891484"/>
+          <p:cNvPr id="46" name="Text 36"/>
+          <p:cNvSpPr/>
+          <p:nvPr/>
+        </p:nvSpPr>
+        <p:spPr>
+          <a:xfrm>
+            <a:off x="4540250" y="3500041"/>
+            <a:ext cx="1437283" cy="350441"/>
+          </a:xfrm>
+          <a:prstGeom prst="roundRect">
+            <a:avLst>
+              <a:gd name="adj" fmla="val 50000"/>
+            </a:avLst>
+          </a:prstGeom>
+          <a:solidFill>
+            <a:srgbClr val="065A82"/>
+          </a:solidFill>
+          <a:ln/>
+        </p:spPr>
+        <p:txBody>
+          <a:bodyPr wrap="none" lIns="0" tIns="0" rIns="0" bIns="0" rtlCol="0" anchor="ctr">
+            <a:normAutofit/>
+          </a:bodyPr>
+          <a:lstStyle/>
+          <a:p>
+            <a:pPr algn="ctr" indent="0" marL="0">
+              <a:lnSpc>
+                <a:spcPts val="1960"/>
+              </a:lnSpc>
+              <a:buNone/>
+            </a:pPr>
+            <a:r>
+              <a:rPr lang="en-US" sz="1400" dirty="0">
+                <a:solidFill>
+                  <a:srgbClr val="EAF2F6"/>
+                </a:solidFill>
+                <a:latin typeface="DM Sans" pitchFamily="34" charset="0"/>
+                <a:ea typeface="DM Sans" pitchFamily="34" charset="-122"/>
+                <a:cs typeface="DM Sans" pitchFamily="34" charset="-120"/>
+              </a:rPr>
+              <a:t>PdfDocument</a:t>
+            </a:r>
+            <a:endParaRPr lang="en-US" sz="1400" dirty="0"/>
+          </a:p>
+        </p:txBody>
+      </p:sp>
+      <p:sp>
+        <p:nvSpPr>
+          <p:cNvPr id="47" name="Text 37"/>
+          <p:cNvSpPr/>
+          <p:nvPr/>
+        </p:nvSpPr>
+        <p:spPr>
+          <a:xfrm>
+            <a:off x="6079133" y="3500041"/>
+            <a:ext cx="1264444" cy="350441"/>
+          </a:xfrm>
+          <a:prstGeom prst="roundRect">
+            <a:avLst>
+              <a:gd name="adj" fmla="val 50000"/>
+            </a:avLst>
+          </a:prstGeom>
+          <a:solidFill>
+            <a:srgbClr val="065A82"/>
+          </a:solidFill>
+          <a:ln/>
+        </p:spPr>
+        <p:txBody>
+          <a:bodyPr wrap="none" lIns="0" tIns="0" rIns="0" bIns="0" rtlCol="0" anchor="ctr">
+            <a:normAutofit/>
+          </a:bodyPr>
+          <a:lstStyle/>
+          <a:p>
+            <a:pPr algn="ctr" indent="0" marL="0">
+              <a:lnSpc>
+                <a:spcPts val="1960"/>
+              </a:lnSpc>
+              <a:buNone/>
+            </a:pPr>
+            <a:r>
+              <a:rPr lang="en-US" sz="1400" dirty="0">
+                <a:solidFill>
+                  <a:srgbClr val="EAF2F6"/>
+                </a:solidFill>
+                <a:latin typeface="DM Sans" pitchFamily="34" charset="0"/>
+                <a:ea typeface="DM Sans" pitchFamily="34" charset="-122"/>
+                <a:cs typeface="DM Sans" pitchFamily="34" charset="-120"/>
+              </a:rPr>
+              <a:t>FileProvider</a:t>
+            </a:r>
+            <a:endParaRPr lang="en-US" sz="1400" dirty="0"/>
+          </a:p>
+        </p:txBody>
+      </p:sp>
+      <p:sp>
+        <p:nvSpPr>
+          <p:cNvPr id="48" name="Text 38"/>
+          <p:cNvSpPr/>
+          <p:nvPr/>
+        </p:nvSpPr>
+        <p:spPr>
+          <a:xfrm>
+            <a:off x="812800" y="4068961"/>
             <a:ext cx="2485390" cy="274241"/>
           </a:xfrm>
           <a:prstGeom prst="rect">
@@ -13739,6 +14055,383 @@
                 <a:ea typeface="DM Sans" pitchFamily="34" charset="-122"/>
                 <a:cs typeface="DM Sans" pitchFamily="34" charset="-120"/>
               </a:rPr>
+              <a:t>Herramientas</a:t>
+            </a:r>
+            <a:endParaRPr lang="en-US" sz="1400" dirty="0"/>
+          </a:p>
+        </p:txBody>
+      </p:sp>
+      <p:sp>
+        <p:nvSpPr>
+          <p:cNvPr id="49" name="Shape 39"/>
+          <p:cNvSpPr/>
+          <p:nvPr/>
+        </p:nvSpPr>
+        <p:spPr>
+          <a:xfrm>
+            <a:off x="3378200" y="4002881"/>
+            <a:ext cx="1832173" cy="381000"/>
+          </a:xfrm>
+          <a:prstGeom prst="roundRect">
+            <a:avLst>
+              <a:gd name="adj" fmla="val 50000"/>
+            </a:avLst>
+          </a:prstGeom>
+          <a:solidFill>
+            <a:srgbClr val="065A82"/>
+          </a:solidFill>
+          <a:ln/>
+        </p:spPr>
+      </p:sp>
+      <p:sp>
+        <p:nvSpPr>
+          <p:cNvPr id="50" name="Shape 40"/>
+          <p:cNvSpPr/>
+          <p:nvPr/>
+        </p:nvSpPr>
+        <p:spPr>
+          <a:xfrm>
+            <a:off x="3416300" y="4040981"/>
+            <a:ext cx="304800" cy="304800"/>
+          </a:xfrm>
+          <a:prstGeom prst="roundRect">
+            <a:avLst>
+              <a:gd name="adj" fmla="val 50000"/>
+            </a:avLst>
+          </a:prstGeom>
+          <a:solidFill>
+            <a:srgbClr val="FFFFFF"/>
+          </a:solidFill>
+          <a:ln/>
+        </p:spPr>
+      </p:sp>
+      <p:pic>
+        <p:nvPicPr>
+          <p:cNvPr id="51" name="Image 8" descr="Logo de Android Studio">    </p:cNvPr>
+          <p:cNvPicPr>
+            <a:picLocks noChangeAspect="1"/>
+          </p:cNvPicPr>
+          <p:nvPr/>
+        </p:nvPicPr>
+        <p:blipFill>
+          <a:blip r:embed="rId9"/>
+          <a:srcRect l="0" r="0" t="0" b="0"/>
+          <a:stretch/>
+        </p:blipFill>
+        <p:spPr>
+          <a:xfrm>
+            <a:off x="3467100" y="4091781"/>
+            <a:ext cx="203200" cy="203200"/>
+          </a:xfrm>
+          <a:prstGeom prst="rect">
+            <a:avLst/>
+          </a:prstGeom>
+        </p:spPr>
+      </p:pic>
+      <p:sp>
+        <p:nvSpPr>
+          <p:cNvPr id="52" name="Text 41"/>
+          <p:cNvSpPr/>
+          <p:nvPr/>
+        </p:nvSpPr>
+        <p:spPr>
+          <a:xfrm>
+            <a:off x="3797300" y="4068961"/>
+            <a:ext cx="1413073" cy="274241"/>
+          </a:xfrm>
+          <a:prstGeom prst="rect">
+            <a:avLst/>
+          </a:prstGeom>
+          <a:noFill/>
+          <a:ln/>
+        </p:spPr>
+        <p:txBody>
+          <a:bodyPr wrap="square" lIns="0" tIns="0" rIns="0" bIns="0" rtlCol="0" anchor="t">
+            <a:normAutofit/>
+          </a:bodyPr>
+          <a:lstStyle/>
+          <a:p>
+            <a:pPr algn="l" indent="0" marL="0">
+              <a:lnSpc>
+                <a:spcPts val="1960"/>
+              </a:lnSpc>
+              <a:buNone/>
+            </a:pPr>
+            <a:r>
+              <a:rPr lang="en-US" sz="1400" dirty="0">
+                <a:solidFill>
+                  <a:srgbClr val="EAF2F6"/>
+                </a:solidFill>
+                <a:latin typeface="DM Sans" pitchFamily="34" charset="0"/>
+                <a:ea typeface="DM Sans" pitchFamily="34" charset="-122"/>
+                <a:cs typeface="DM Sans" pitchFamily="34" charset="-120"/>
+              </a:rPr>
+              <a:t>Android Studio</a:t>
+            </a:r>
+            <a:endParaRPr lang="en-US" sz="1400" dirty="0"/>
+          </a:p>
+        </p:txBody>
+      </p:sp>
+      <p:sp>
+        <p:nvSpPr>
+          <p:cNvPr id="53" name="Shape 42"/>
+          <p:cNvSpPr/>
+          <p:nvPr/>
+        </p:nvSpPr>
+        <p:spPr>
+          <a:xfrm>
+            <a:off x="5311973" y="4002881"/>
+            <a:ext cx="1618952" cy="381000"/>
+          </a:xfrm>
+          <a:prstGeom prst="roundRect">
+            <a:avLst>
+              <a:gd name="adj" fmla="val 50000"/>
+            </a:avLst>
+          </a:prstGeom>
+          <a:solidFill>
+            <a:srgbClr val="065A82"/>
+          </a:solidFill>
+          <a:ln/>
+        </p:spPr>
+      </p:sp>
+      <p:sp>
+        <p:nvSpPr>
+          <p:cNvPr id="54" name="Shape 43"/>
+          <p:cNvSpPr/>
+          <p:nvPr/>
+        </p:nvSpPr>
+        <p:spPr>
+          <a:xfrm>
+            <a:off x="5350073" y="4040981"/>
+            <a:ext cx="304800" cy="304800"/>
+          </a:xfrm>
+          <a:prstGeom prst="roundRect">
+            <a:avLst>
+              <a:gd name="adj" fmla="val 50000"/>
+            </a:avLst>
+          </a:prstGeom>
+          <a:solidFill>
+            <a:srgbClr val="FFFFFF"/>
+          </a:solidFill>
+          <a:ln/>
+        </p:spPr>
+      </p:sp>
+      <p:pic>
+        <p:nvPicPr>
+          <p:cNvPr id="55" name="Image 9" descr="Logo de GitHub">    </p:cNvPr>
+          <p:cNvPicPr>
+            <a:picLocks noChangeAspect="1"/>
+          </p:cNvPicPr>
+          <p:nvPr/>
+        </p:nvPicPr>
+        <p:blipFill>
+          <a:blip r:embed="rId10"/>
+          <a:srcRect l="0" r="0" t="0" b="0"/>
+          <a:stretch/>
+        </p:blipFill>
+        <p:spPr>
+          <a:xfrm>
+            <a:off x="5400873" y="4091781"/>
+            <a:ext cx="203200" cy="203200"/>
+          </a:xfrm>
+          <a:prstGeom prst="rect">
+            <a:avLst/>
+          </a:prstGeom>
+        </p:spPr>
+      </p:pic>
+      <p:sp>
+        <p:nvSpPr>
+          <p:cNvPr id="56" name="Text 44"/>
+          <p:cNvSpPr/>
+          <p:nvPr/>
+        </p:nvSpPr>
+        <p:spPr>
+          <a:xfrm>
+            <a:off x="5731073" y="4068961"/>
+            <a:ext cx="1199852" cy="274241"/>
+          </a:xfrm>
+          <a:prstGeom prst="rect">
+            <a:avLst/>
+          </a:prstGeom>
+          <a:noFill/>
+          <a:ln/>
+        </p:spPr>
+        <p:txBody>
+          <a:bodyPr wrap="square" lIns="0" tIns="0" rIns="0" bIns="0" rtlCol="0" anchor="t">
+            <a:normAutofit/>
+          </a:bodyPr>
+          <a:lstStyle/>
+          <a:p>
+            <a:pPr algn="l" indent="0" marL="0">
+              <a:lnSpc>
+                <a:spcPts val="1960"/>
+              </a:lnSpc>
+              <a:buNone/>
+            </a:pPr>
+            <a:r>
+              <a:rPr lang="en-US" sz="1400" dirty="0">
+                <a:solidFill>
+                  <a:srgbClr val="EAF2F6"/>
+                </a:solidFill>
+                <a:latin typeface="DM Sans" pitchFamily="34" charset="0"/>
+                <a:ea typeface="DM Sans" pitchFamily="34" charset="-122"/>
+                <a:cs typeface="DM Sans" pitchFamily="34" charset="-120"/>
+              </a:rPr>
+              <a:t>Git y GitHub</a:t>
+            </a:r>
+            <a:endParaRPr lang="en-US" sz="1400" dirty="0"/>
+          </a:p>
+        </p:txBody>
+      </p:sp>
+      <p:sp>
+        <p:nvSpPr>
+          <p:cNvPr id="57" name="Shape 45"/>
+          <p:cNvSpPr/>
+          <p:nvPr/>
+        </p:nvSpPr>
+        <p:spPr>
+          <a:xfrm>
+            <a:off x="7032526" y="4002881"/>
+            <a:ext cx="1016893" cy="381000"/>
+          </a:xfrm>
+          <a:prstGeom prst="roundRect">
+            <a:avLst>
+              <a:gd name="adj" fmla="val 50000"/>
+            </a:avLst>
+          </a:prstGeom>
+          <a:solidFill>
+            <a:srgbClr val="065A82"/>
+          </a:solidFill>
+          <a:ln/>
+        </p:spPr>
+      </p:sp>
+      <p:sp>
+        <p:nvSpPr>
+          <p:cNvPr id="58" name="Shape 46"/>
+          <p:cNvSpPr/>
+          <p:nvPr/>
+        </p:nvSpPr>
+        <p:spPr>
+          <a:xfrm>
+            <a:off x="7070626" y="4040981"/>
+            <a:ext cx="304800" cy="304800"/>
+          </a:xfrm>
+          <a:prstGeom prst="roundRect">
+            <a:avLst>
+              <a:gd name="adj" fmla="val 50000"/>
+            </a:avLst>
+          </a:prstGeom>
+          <a:solidFill>
+            <a:srgbClr val="FFFFFF"/>
+          </a:solidFill>
+          <a:ln/>
+        </p:spPr>
+      </p:sp>
+      <p:pic>
+        <p:nvPicPr>
+          <p:cNvPr id="59" name="Image 10" descr="Logo de JUnit">    </p:cNvPr>
+          <p:cNvPicPr>
+            <a:picLocks noChangeAspect="1"/>
+          </p:cNvPicPr>
+          <p:nvPr/>
+        </p:nvPicPr>
+        <p:blipFill>
+          <a:blip r:embed="rId11"/>
+          <a:srcRect l="0" r="0" t="0" b="0"/>
+          <a:stretch/>
+        </p:blipFill>
+        <p:spPr>
+          <a:xfrm>
+            <a:off x="7121426" y="4091781"/>
+            <a:ext cx="203200" cy="203200"/>
+          </a:xfrm>
+          <a:prstGeom prst="rect">
+            <a:avLst/>
+          </a:prstGeom>
+        </p:spPr>
+      </p:pic>
+      <p:sp>
+        <p:nvSpPr>
+          <p:cNvPr id="60" name="Text 47"/>
+          <p:cNvSpPr/>
+          <p:nvPr/>
+        </p:nvSpPr>
+        <p:spPr>
+          <a:xfrm>
+            <a:off x="7451626" y="4068961"/>
+            <a:ext cx="503992" cy="274241"/>
+          </a:xfrm>
+          <a:prstGeom prst="rect">
+            <a:avLst/>
+          </a:prstGeom>
+          <a:noFill/>
+          <a:ln/>
+        </p:spPr>
+        <p:txBody>
+          <a:bodyPr wrap="square" lIns="0" tIns="0" rIns="0" bIns="0" rtlCol="0" anchor="t">
+            <a:normAutofit/>
+          </a:bodyPr>
+          <a:lstStyle/>
+          <a:p>
+            <a:pPr algn="l" indent="0" marL="0">
+              <a:lnSpc>
+                <a:spcPts val="1960"/>
+              </a:lnSpc>
+              <a:buNone/>
+            </a:pPr>
+            <a:r>
+              <a:rPr lang="en-US" sz="1400" dirty="0">
+                <a:solidFill>
+                  <a:srgbClr val="EAF2F6"/>
+                </a:solidFill>
+                <a:latin typeface="DM Sans" pitchFamily="34" charset="0"/>
+                <a:ea typeface="DM Sans" pitchFamily="34" charset="-122"/>
+                <a:cs typeface="DM Sans" pitchFamily="34" charset="-120"/>
+              </a:rPr>
+              <a:t>JUnit</a:t>
+            </a:r>
+            <a:endParaRPr lang="en-US" sz="1400" dirty="0"/>
+          </a:p>
+        </p:txBody>
+      </p:sp>
+      <p:sp>
+        <p:nvSpPr>
+          <p:cNvPr id="61" name="Text 48"/>
+          <p:cNvSpPr/>
+          <p:nvPr/>
+        </p:nvSpPr>
+        <p:spPr>
+          <a:xfrm>
+            <a:off x="812800" y="4602361"/>
+            <a:ext cx="2485390" cy="274241"/>
+          </a:xfrm>
+          <a:prstGeom prst="rect">
+            <a:avLst/>
+          </a:prstGeom>
+          <a:noFill/>
+          <a:ln/>
+        </p:spPr>
+        <p:txBody>
+          <a:bodyPr wrap="square" lIns="0" tIns="0" rIns="0" bIns="0" rtlCol="0" anchor="t">
+            <a:normAutofit/>
+          </a:bodyPr>
+          <a:lstStyle/>
+          <a:p>
+            <a:pPr algn="l" indent="0" marL="0">
+              <a:lnSpc>
+                <a:spcPts val="1960"/>
+              </a:lnSpc>
+              <a:buNone/>
+            </a:pPr>
+            <a:r>
+              <a:rPr lang="en-US" sz="1400" b="1" dirty="0">
+                <a:solidFill>
+                  <a:srgbClr val="17203E"/>
+                </a:solidFill>
+                <a:latin typeface="DM Sans" pitchFamily="34" charset="0"/>
+                <a:ea typeface="DM Sans" pitchFamily="34" charset="-122"/>
+                <a:cs typeface="DM Sans" pitchFamily="34" charset="-120"/>
+              </a:rPr>
               <a:t>Siguiente fase</a:t>
             </a:r>
             <a:endParaRPr lang="en-US" sz="1400" dirty="0"/>
@@ -13747,46 +14440,20 @@
       </p:sp>
       <p:sp>
         <p:nvSpPr>
-          <p:cNvPr id="29" name="Text 27"/>
-          <p:cNvSpPr/>
-          <p:nvPr/>
-        </p:nvSpPr>
-        <p:spPr>
-          <a:xfrm>
-            <a:off x="3384550" y="4847034"/>
-            <a:ext cx="1310779" cy="337741"/>
-          </a:xfrm>
-          <a:custGeom>
-            <a:avLst/>
-            <a:gdLst/>
-            <a:ahLst/>
-            <a:cxnLst/>
-            <a:rect l="l" t="t" r="r" b="b"/>
-            <a:pathLst>
-              <a:path w="1310779" h="337741">
-                <a:moveTo>
-                  <a:pt x="168870" y="0"/>
-                </a:moveTo>
-                <a:lnTo>
-                  <a:pt x="1141909" y="0"/>
-                </a:lnTo>
-                <a:arcTo hR="168870" wR="168870" stAng="16200000" swAng="5400000"/>
-                <a:lnTo>
-                  <a:pt x="1310779" y="168870"/>
-                </a:lnTo>
-                <a:arcTo hR="168870" wR="168870" stAng="0" swAng="5400000"/>
-                <a:lnTo>
-                  <a:pt x="168870" y="337741"/>
-                </a:lnTo>
-                <a:arcTo hR="168870" wR="168870" stAng="5400000" swAng="5400000"/>
-                <a:lnTo>
-                  <a:pt x="0" y="168870"/>
-                </a:lnTo>
-                <a:arcTo hR="168870" wR="168870" stAng="10800000" swAng="5400000"/>
-                <a:close/>
-              </a:path>
-            </a:pathLst>
-          </a:custGeom>
+          <p:cNvPr id="62" name="Shape 49"/>
+          <p:cNvSpPr/>
+          <p:nvPr/>
+        </p:nvSpPr>
+        <p:spPr>
+          <a:xfrm>
+            <a:off x="3384550" y="4542631"/>
+            <a:ext cx="1602879" cy="368300"/>
+          </a:xfrm>
+          <a:prstGeom prst="roundRect">
+            <a:avLst>
+              <a:gd name="adj" fmla="val 50000"/>
+            </a:avLst>
+          </a:prstGeom>
           <a:noFill/>
           <a:ln w="12700">
             <a:solidFill>
@@ -13795,13 +14462,81 @@
             <a:prstDash val="dash"/>
           </a:ln>
         </p:spPr>
-        <p:txBody>
-          <a:bodyPr wrap="none" lIns="0" tIns="0" rIns="0" bIns="0" rtlCol="0" anchor="ctr">
+      </p:sp>
+      <p:sp>
+        <p:nvSpPr>
+          <p:cNvPr id="63" name="Shape 50"/>
+          <p:cNvSpPr/>
+          <p:nvPr/>
+        </p:nvSpPr>
+        <p:spPr>
+          <a:xfrm>
+            <a:off x="3419475" y="4577556"/>
+            <a:ext cx="298450" cy="298450"/>
+          </a:xfrm>
+          <a:prstGeom prst="roundRect">
+            <a:avLst>
+              <a:gd name="adj" fmla="val 50000"/>
+            </a:avLst>
+          </a:prstGeom>
+          <a:solidFill>
+            <a:srgbClr val="FFFFFF"/>
+          </a:solidFill>
+          <a:ln w="6350">
+            <a:solidFill>
+              <a:srgbClr val="CFDCE4"/>
+            </a:solidFill>
+            <a:prstDash val="solid"/>
+          </a:ln>
+        </p:spPr>
+      </p:sp>
+      <p:pic>
+        <p:nvPicPr>
+          <p:cNvPr id="64" name="Image 11" descr="Logo de Django">    </p:cNvPr>
+          <p:cNvPicPr>
+            <a:picLocks noChangeAspect="1"/>
+          </p:cNvPicPr>
+          <p:nvPr/>
+        </p:nvPicPr>
+        <p:blipFill>
+          <a:blip r:embed="rId12"/>
+          <a:srcRect l="0" r="0" t="0" b="0"/>
+          <a:stretch/>
+        </p:blipFill>
+        <p:spPr>
+          <a:xfrm>
+            <a:off x="3467100" y="4625181"/>
+            <a:ext cx="203200" cy="203200"/>
+          </a:xfrm>
+          <a:prstGeom prst="rect">
+            <a:avLst/>
+          </a:prstGeom>
+        </p:spPr>
+      </p:pic>
+      <p:sp>
+        <p:nvSpPr>
+          <p:cNvPr id="65" name="Text 51"/>
+          <p:cNvSpPr/>
+          <p:nvPr/>
+        </p:nvSpPr>
+        <p:spPr>
+          <a:xfrm>
+            <a:off x="3797300" y="4602361"/>
+            <a:ext cx="1183779" cy="274241"/>
+          </a:xfrm>
+          <a:prstGeom prst="rect">
+            <a:avLst/>
+          </a:prstGeom>
+          <a:noFill/>
+          <a:ln/>
+        </p:spPr>
+        <p:txBody>
+          <a:bodyPr wrap="square" lIns="0" tIns="0" rIns="0" bIns="0" rtlCol="0" anchor="t">
             <a:normAutofit/>
           </a:bodyPr>
           <a:lstStyle/>
           <a:p>
-            <a:pPr algn="ctr" indent="0" marL="0">
+            <a:pPr algn="l" indent="0" marL="0">
               <a:lnSpc>
                 <a:spcPts val="1960"/>
               </a:lnSpc>
@@ -13824,46 +14559,20 @@
       </p:sp>
       <p:sp>
         <p:nvSpPr>
-          <p:cNvPr id="30" name="Text 28"/>
-          <p:cNvSpPr/>
-          <p:nvPr/>
-        </p:nvSpPr>
-        <p:spPr>
-          <a:xfrm>
-            <a:off x="4809629" y="4847034"/>
-            <a:ext cx="1247676" cy="337741"/>
-          </a:xfrm>
-          <a:custGeom>
-            <a:avLst/>
-            <a:gdLst/>
-            <a:ahLst/>
-            <a:cxnLst/>
-            <a:rect l="l" t="t" r="r" b="b"/>
-            <a:pathLst>
-              <a:path w="1247676" h="337741">
-                <a:moveTo>
-                  <a:pt x="168870" y="0"/>
-                </a:moveTo>
-                <a:lnTo>
-                  <a:pt x="1078805" y="0"/>
-                </a:lnTo>
-                <a:arcTo hR="168870" wR="168870" stAng="16200000" swAng="5400000"/>
-                <a:lnTo>
-                  <a:pt x="1247676" y="168870"/>
-                </a:lnTo>
-                <a:arcTo hR="168870" wR="168870" stAng="0" swAng="5400000"/>
-                <a:lnTo>
-                  <a:pt x="168870" y="337741"/>
-                </a:lnTo>
-                <a:arcTo hR="168870" wR="168870" stAng="5400000" swAng="5400000"/>
-                <a:lnTo>
-                  <a:pt x="0" y="168870"/>
-                </a:lnTo>
-                <a:arcTo hR="168870" wR="168870" stAng="10800000" swAng="5400000"/>
-                <a:close/>
-              </a:path>
-            </a:pathLst>
-          </a:custGeom>
+          <p:cNvPr id="66" name="Shape 52"/>
+          <p:cNvSpPr/>
+          <p:nvPr/>
+        </p:nvSpPr>
+        <p:spPr>
+          <a:xfrm>
+            <a:off x="5101729" y="4542631"/>
+            <a:ext cx="1539776" cy="368300"/>
+          </a:xfrm>
+          <a:prstGeom prst="roundRect">
+            <a:avLst>
+              <a:gd name="adj" fmla="val 50000"/>
+            </a:avLst>
+          </a:prstGeom>
           <a:noFill/>
           <a:ln w="12700">
             <a:solidFill>
@@ -13872,13 +14581,81 @@
             <a:prstDash val="dash"/>
           </a:ln>
         </p:spPr>
-        <p:txBody>
-          <a:bodyPr wrap="none" lIns="0" tIns="0" rIns="0" bIns="0" rtlCol="0" anchor="ctr">
+      </p:sp>
+      <p:sp>
+        <p:nvSpPr>
+          <p:cNvPr id="67" name="Shape 53"/>
+          <p:cNvSpPr/>
+          <p:nvPr/>
+        </p:nvSpPr>
+        <p:spPr>
+          <a:xfrm>
+            <a:off x="5136654" y="4577556"/>
+            <a:ext cx="298450" cy="298450"/>
+          </a:xfrm>
+          <a:prstGeom prst="roundRect">
+            <a:avLst>
+              <a:gd name="adj" fmla="val 50000"/>
+            </a:avLst>
+          </a:prstGeom>
+          <a:solidFill>
+            <a:srgbClr val="FFFFFF"/>
+          </a:solidFill>
+          <a:ln w="6350">
+            <a:solidFill>
+              <a:srgbClr val="CFDCE4"/>
+            </a:solidFill>
+            <a:prstDash val="solid"/>
+          </a:ln>
+        </p:spPr>
+      </p:sp>
+      <p:pic>
+        <p:nvPicPr>
+          <p:cNvPr id="68" name="Image 12" descr="Logo de PostgreSQL">    </p:cNvPr>
+          <p:cNvPicPr>
+            <a:picLocks noChangeAspect="1"/>
+          </p:cNvPicPr>
+          <p:nvPr/>
+        </p:nvPicPr>
+        <p:blipFill>
+          <a:blip r:embed="rId13"/>
+          <a:srcRect l="0" r="0" t="0" b="0"/>
+          <a:stretch/>
+        </p:blipFill>
+        <p:spPr>
+          <a:xfrm>
+            <a:off x="5184279" y="4625181"/>
+            <a:ext cx="203200" cy="203200"/>
+          </a:xfrm>
+          <a:prstGeom prst="rect">
+            <a:avLst/>
+          </a:prstGeom>
+        </p:spPr>
+      </p:pic>
+      <p:sp>
+        <p:nvSpPr>
+          <p:cNvPr id="69" name="Text 54"/>
+          <p:cNvSpPr/>
+          <p:nvPr/>
+        </p:nvSpPr>
+        <p:spPr>
+          <a:xfrm>
+            <a:off x="5514479" y="4602361"/>
+            <a:ext cx="1120676" cy="274241"/>
+          </a:xfrm>
+          <a:prstGeom prst="rect">
+            <a:avLst/>
+          </a:prstGeom>
+          <a:noFill/>
+          <a:ln/>
+        </p:spPr>
+        <p:txBody>
+          <a:bodyPr wrap="square" lIns="0" tIns="0" rIns="0" bIns="0" rtlCol="0" anchor="t">
             <a:normAutofit/>
           </a:bodyPr>
           <a:lstStyle/>
           <a:p>
-            <a:pPr algn="ctr" indent="0" marL="0">
+            <a:pPr algn="l" indent="0" marL="0">
               <a:lnSpc>
                 <a:spcPts val="1960"/>
               </a:lnSpc>
@@ -13901,13 +14678,13 @@
       </p:sp>
       <p:sp>
         <p:nvSpPr>
-          <p:cNvPr id="31" name="Text 29"/>
-          <p:cNvSpPr/>
-          <p:nvPr/>
-        </p:nvSpPr>
-        <p:spPr>
-          <a:xfrm>
-            <a:off x="812800" y="5394325"/>
+          <p:cNvPr id="70" name="Text 55"/>
+          <p:cNvSpPr/>
+          <p:nvPr/>
+        </p:nvSpPr>
+        <p:spPr>
+          <a:xfrm>
+            <a:off x="812800" y="5069681"/>
             <a:ext cx="10883392" cy="309860"/>
           </a:xfrm>
           <a:prstGeom prst="rect">
@@ -13945,7 +14722,7 @@
       </p:sp>
       <p:sp>
         <p:nvSpPr>
-          <p:cNvPr id="32" name="Text 30"/>
+          <p:cNvPr id="71" name="Text 56"/>
           <p:cNvSpPr/>
           <p:nvPr/>
         </p:nvSpPr>
@@ -13989,7 +14766,7 @@
       </p:sp>
       <p:sp>
         <p:nvSpPr>
-          <p:cNvPr id="33" name="Text 31"/>
+          <p:cNvPr id="72" name="Text 57"/>
           <p:cNvSpPr/>
           <p:nvPr/>
         </p:nvSpPr>

--- a/Fase 2/Evidencias Proyecto/Presentacion Proyecto.pptx
+++ b/Fase 2/Evidencias Proyecto/Presentacion Proyecto.pptx
@@ -4,6 +4,9 @@
   <p:sldMasterIdLst>
     <p:sldMasterId id="2147483648" r:id="rId1"/>
   </p:sldMasterIdLst>
+  <p:notesMasterIdLst>
+    <p:notesMasterId r:id="rId17"/>
+  </p:notesMasterIdLst>
   <p:sldIdLst>
     <p:sldId id="256" r:id="rId2"/>
     <p:sldId id="257" r:id="rId3"/>
@@ -21,9 +24,6 @@
     <p:sldId id="269" r:id="rId15"/>
     <p:sldId id="270" r:id="rId16"/>
   </p:sldIdLst>
-  <p:notesMasterIdLst>
-    <p:notesMasterId r:id="rId17"/>
-  </p:notesMasterIdLst>
   <p:sldSz cx="12192000" cy="6858000"/>
   <p:notesSz cx="6858000" cy="12192000"/>
   <p:defaultTextStyle>
@@ -118,6 +118,11 @@
       </a:defRPr>
     </a:lvl9pPr>
   </p:defaultTextStyle>
+  <p:extLst>
+    <p:ext uri="{EFAFB233-063F-42B5-8137-9DF3F51BA10A}">
+      <p15:sldGuideLst xmlns:p15="http://schemas.microsoft.com/office/powerpoint/2012/main"/>
+    </p:ext>
+  </p:extLst>
 </p:presentation>
 </file>
 
@@ -143,234 +148,10 @@
           <a:chExt cx="0" cy="0"/>
         </a:xfrm>
       </p:grpSpPr>
-      <p:sp>
-        <p:nvSpPr>
-          <p:cNvPr id="2" name="Header Placeholder 1"/>
-          <p:cNvSpPr>
-            <a:spLocks noGrp="1"/>
-          </p:cNvSpPr>
-          <p:nvPr>
-            <p:ph type="hdr" sz="quarter"/>
-          </p:nvPr>
-        </p:nvSpPr>
-        <p:spPr>
-          <a:xfrm>
-            <a:off x="0" y="0"/>
-            <a:ext cx="2971800" cy="458788"/>
-          </a:xfrm>
-          <a:prstGeom prst="rect">
-            <a:avLst/>
-          </a:prstGeom>
-        </p:spPr>
-        <p:txBody>
-          <a:bodyPr vert="horz" lIns="91440" tIns="45720" rIns="91440" bIns="45720" rtlCol="0"/>
-          <a:lstStyle>
-            <a:lvl1pPr algn="l">
-              <a:defRPr sz="1200"/>
-            </a:lvl1pPr>
-          </a:lstStyle>
-          <a:p>
-            <a:endParaRPr lang="en-US"/>
-          </a:p>
-        </p:txBody>
-      </p:sp>
-      <p:sp>
-        <p:nvSpPr>
-          <p:cNvPr id="3" name="Date Placeholder 2"/>
-          <p:cNvSpPr>
-            <a:spLocks noGrp="1"/>
-          </p:cNvSpPr>
-          <p:nvPr>
-            <p:ph type="dt" idx="1"/>
-          </p:nvPr>
-        </p:nvSpPr>
-        <p:spPr>
-          <a:xfrm>
-            <a:off x="3884613" y="0"/>
-            <a:ext cx="2971800" cy="458788"/>
-          </a:xfrm>
-          <a:prstGeom prst="rect">
-            <a:avLst/>
-          </a:prstGeom>
-        </p:spPr>
-        <p:txBody>
-          <a:bodyPr vert="horz" lIns="91440" tIns="45720" rIns="91440" bIns="45720" rtlCol="0"/>
-          <a:lstStyle>
-            <a:lvl1pPr algn="r">
-              <a:defRPr sz="1200"/>
-            </a:lvl1pPr>
-          </a:lstStyle>
-          <a:p>
-            <a:fld id="{5282F153-3F37-0F45-9E97-73ACFA13230C}" type="datetimeFigureOut">
-              <a:rPr lang="en-US"/>
-              <a:t>7/23/19</a:t>
-            </a:fld>
-            <a:endParaRPr lang="en-US"/>
-          </a:p>
-        </p:txBody>
-      </p:sp>
-      <p:sp>
-        <p:nvSpPr>
-          <p:cNvPr id="4" name="Slide Image Placeholder 3"/>
-          <p:cNvSpPr>
-            <a:spLocks noGrp="1" noRot="1" noChangeAspect="1"/>
-          </p:cNvSpPr>
-          <p:nvPr>
-            <p:ph type="sldImg" idx="2"/>
-          </p:nvPr>
-        </p:nvSpPr>
-        <p:spPr>
-          <a:xfrm>
-            <a:off x="685800" y="1143000"/>
-            <a:ext cx="5486400" cy="3086100"/>
-          </a:xfrm>
-          <a:prstGeom prst="rect">
-            <a:avLst/>
-          </a:prstGeom>
-          <a:noFill/>
-          <a:ln w="12700">
-            <a:solidFill>
-              <a:prstClr val="black"/>
-            </a:solidFill>
-          </a:ln>
-        </p:spPr>
-        <p:txBody>
-          <a:bodyPr vert="horz" lIns="91440" tIns="45720" rIns="91440" bIns="45720" rtlCol="0" anchor="ctr"/>
-          <a:lstStyle/>
-          <a:p>
-            <a:endParaRPr lang="en-US"/>
-          </a:p>
-        </p:txBody>
-      </p:sp>
-      <p:sp>
-        <p:nvSpPr>
-          <p:cNvPr id="5" name="Notes Placeholder 4"/>
-          <p:cNvSpPr>
-            <a:spLocks noGrp="1"/>
-          </p:cNvSpPr>
-          <p:nvPr>
-            <p:ph type="body" sz="quarter" idx="3"/>
-          </p:nvPr>
-        </p:nvSpPr>
-        <p:spPr>
-          <a:xfrm>
-            <a:off x="685800" y="4400550"/>
-            <a:ext cx="5486400" cy="3600450"/>
-          </a:xfrm>
-          <a:prstGeom prst="rect">
-            <a:avLst/>
-          </a:prstGeom>
-        </p:spPr>
-        <p:txBody>
-          <a:bodyPr vert="horz" lIns="91440" tIns="45720" rIns="91440" bIns="45720" rtlCol="0"/>
-          <a:lstStyle/>
-          <a:p>
-            <a:pPr lvl="0"/>
-            <a:r>
-              <a:rPr lang="en-US"/>
-              <a:t>Click to edit Master text styles</a:t>
-            </a:r>
-          </a:p>
-          <a:p>
-            <a:pPr lvl="1"/>
-            <a:r>
-              <a:rPr lang="en-US"/>
-              <a:t>Second level</a:t>
-            </a:r>
-          </a:p>
-          <a:p>
-            <a:pPr lvl="2"/>
-            <a:r>
-              <a:rPr lang="en-US"/>
-              <a:t>Third level</a:t>
-            </a:r>
-          </a:p>
-          <a:p>
-            <a:pPr lvl="3"/>
-            <a:r>
-              <a:rPr lang="en-US"/>
-              <a:t>Fourth level</a:t>
-            </a:r>
-          </a:p>
-          <a:p>
-            <a:pPr lvl="4"/>
-            <a:r>
-              <a:rPr lang="en-US"/>
-              <a:t>Fifth level</a:t>
-            </a:r>
-          </a:p>
-        </p:txBody>
-      </p:sp>
-      <p:sp>
-        <p:nvSpPr>
-          <p:cNvPr id="6" name="Footer Placeholder 5"/>
-          <p:cNvSpPr>
-            <a:spLocks noGrp="1"/>
-          </p:cNvSpPr>
-          <p:nvPr>
-            <p:ph type="ftr" sz="quarter" idx="4"/>
-          </p:nvPr>
-        </p:nvSpPr>
-        <p:spPr>
-          <a:xfrm>
-            <a:off x="0" y="8685213"/>
-            <a:ext cx="2971800" cy="458787"/>
-          </a:xfrm>
-          <a:prstGeom prst="rect">
-            <a:avLst/>
-          </a:prstGeom>
-        </p:spPr>
-        <p:txBody>
-          <a:bodyPr vert="horz" lIns="91440" tIns="45720" rIns="91440" bIns="45720" rtlCol="0" anchor="b"/>
-          <a:lstStyle>
-            <a:lvl1pPr algn="l">
-              <a:defRPr sz="1200"/>
-            </a:lvl1pPr>
-          </a:lstStyle>
-          <a:p>
-            <a:endParaRPr lang="en-US"/>
-          </a:p>
-        </p:txBody>
-      </p:sp>
-      <p:sp>
-        <p:nvSpPr>
-          <p:cNvPr id="7" name="Slide Number Placeholder 6"/>
-          <p:cNvSpPr>
-            <a:spLocks noGrp="1"/>
-          </p:cNvSpPr>
-          <p:nvPr>
-            <p:ph type="sldNum" sz="quarter" idx="5"/>
-          </p:nvPr>
-        </p:nvSpPr>
-        <p:spPr>
-          <a:xfrm>
-            <a:off x="3884613" y="8685213"/>
-            <a:ext cx="2971800" cy="458787"/>
-          </a:xfrm>
-          <a:prstGeom prst="rect">
-            <a:avLst/>
-          </a:prstGeom>
-        </p:spPr>
-        <p:txBody>
-          <a:bodyPr vert="horz" lIns="91440" tIns="45720" rIns="91440" bIns="45720" rtlCol="0" anchor="b"/>
-          <a:lstStyle>
-            <a:lvl1pPr algn="r">
-              <a:defRPr sz="1200"/>
-            </a:lvl1pPr>
-          </a:lstStyle>
-          <a:p>
-            <a:fld id="{CE5E9CC1-C706-0F49-92D6-E571CC5EEA8F}" type="slidenum">
-              <a:rPr lang="en-US"/>
-              <a:t>‹#›</a:t>
-            </a:fld>
-            <a:endParaRPr lang="en-US"/>
-          </a:p>
-        </p:txBody>
-      </p:sp>
     </p:spTree>
     <p:extLst>
       <p:ext uri="{BB962C8B-B14F-4D97-AF65-F5344CB8AC3E}">
-        <p14:creationId xmlns:p14="http://schemas.microsoft.com/office/powerpoint/2010/main" val="1024086991"/>
+        <p14:creationId xmlns:p14="http://schemas.microsoft.com/office/powerpoint/2010/main" val="3665651076"/>
       </p:ext>
     </p:extLst>
   </p:cSld>
@@ -518,7 +299,6 @@
               <a:rPr lang="en-US" dirty="0"/>
               <a:t>Presentación de avance de la semana 10. Se presenta el producto funcionando en el teléfono, el estado frente al plan de trabajo, un defecto real que encontramos y corregimos, el modelo de negocio y los siguientes pasos. El mensaje central: el MVP local está completo y es sólido; el backend es la siguiente fase.</a:t>
             </a:r>
-            <a:endParaRPr lang="en-US" dirty="0"/>
           </a:p>
         </p:txBody>
       </p:sp>
@@ -606,7 +386,6 @@
               <a:rPr lang="en-US" dirty="0"/>
               <a:t>Durante las pruebas notamos que los informes automáticos salían en 0 minutos, aunque Inicio y Estadísticas mostraban el uso real. Con un diagnóstico de solo lectura y logs identificamos la causa: el informe usaba la fecha del momento en que corría el proceso y no la fecha de la jornada. Si Android retrasaba el proceso, el rango quedaba invertido. Lo corregimos con fecha explícita y verificamos que los informes nuevos salen con datos. Los informes en 0 anteriores se conservan como evidencia del antes.</a:t>
             </a:r>
-            <a:endParaRPr lang="en-US" dirty="0"/>
           </a:p>
         </p:txBody>
       </p:sp>
@@ -694,7 +473,6 @@
               <a:rPr lang="en-US" dirty="0"/>
               <a:t>Los 23 tests son 14 de lógica de jornadas, 6 del clasificador de categorías y 3 del hash del PIN. Se hizo una auditoría del proyecto con hallazgos críticos, importantes y menores; los urgentes se corrigieron. Hay mejoras identificadas que quedan pendientes y se declaran como trabajo futuro, por ejemplo pedir el PIN siempre al reabrir si Android cierra la app. Todo se probó en un teléfono Samsung físico con datos reales.</a:t>
             </a:r>
-            <a:endParaRPr lang="en-US" dirty="0"/>
           </a:p>
         </p:txBody>
       </p:sp>
@@ -782,7 +560,6 @@
               <a:rPr lang="en-US" dirty="0"/>
               <a:t>Un día sin informe no es un error: es el comportamiento diseñado. La app no genera informe en días que no son de la jornada, en feriados ni en días sin clases. El teléfono sí registra el uso todos los días; lo que decide la app es cuándo corresponde un informe. Mostrar la pantalla de Informes del teléfono como evidencia.</a:t>
             </a:r>
-            <a:endParaRPr lang="en-US" dirty="0"/>
           </a:p>
         </p:txBody>
       </p:sp>
@@ -870,7 +647,6 @@
               <a:rPr lang="en-US" dirty="0"/>
               <a:t>Modelo de negocio, presentado como diseño y no como algo implementado todavía. La seguridad básica, incluida la verificación en dos pasos, es gratuita para que sea segura para todos. Premium aporta conveniencia, historial y análisis, y todo eso depende del backend, que es la siguiente fase. No hay cobro implementado en el MVP.</a:t>
             </a:r>
-            <a:endParaRPr lang="en-US" dirty="0"/>
           </a:p>
         </p:txBody>
       </p:sp>
@@ -958,7 +734,6 @@
               <a:rPr lang="en-US" dirty="0"/>
               <a:t>El orden es deliberado: primero cerrar y probar el MVP local, después el backend. Lo que depende del backend es la verificación en dos pasos, el correo, el historial en la nube y la analítica avanzada. La mejora del PIN al reabrir ya está identificada por la auditoría de código y es la primera corrección a hacer. La pausa temporal de la supervisión está en análisis con el equipo.</a:t>
             </a:r>
-            <a:endParaRPr lang="en-US" dirty="0"/>
           </a:p>
         </p:txBody>
       </p:sp>
@@ -1046,7 +821,6 @@
               <a:rPr lang="en-US" dirty="0"/>
               <a:t>Cierre. El MVP local está completo y probado en un teléfono físico; el backend y Premium son la siguiente fase. Quedar disponibles para preguntas y para mostrar la app en vivo.</a:t>
             </a:r>
-            <a:endParaRPr lang="en-US" dirty="0"/>
           </a:p>
         </p:txBody>
       </p:sp>
@@ -1134,7 +908,6 @@
               <a:rPr lang="en-US" dirty="0"/>
               <a:t>El diferenciador de NEXO frente a apps de control total es el contexto: el apoderado define períodos, como la jornada escolar, y recibe un informe de lo que el menor usó en ese período. Caso de uso único de la primera versión: la jornada escolar.</a:t>
             </a:r>
-            <a:endParaRPr lang="en-US" dirty="0"/>
           </a:p>
         </p:txBody>
       </p:sp>
@@ -1222,7 +995,6 @@
               <a:rPr lang="en-US" dirty="0"/>
               <a:t>Decisiones éticas y técnicas deliberadas del equipo: usar únicamente mecanismos oficiales, no leer contenido privado, y proteger el PIN con hash. Android no permite pedir el permiso de uso con un diálogo estándar, por eso el apoderado lo activa a mano en Ajustes y la app lo detecta.</a:t>
             </a:r>
-            <a:endParaRPr lang="en-US" dirty="0"/>
           </a:p>
         </p:txBody>
       </p:sp>
@@ -1310,7 +1082,6 @@
               <a:rPr lang="en-US" dirty="0"/>
               <a:t>Cambios respecto al proyecto original. Lo que cambió son ajustes y mejoras surgidas al probar: seis categorías en vez de cuatro, la pantalla Actividad (que era la prueba de factibilidad) se integró en Estadísticas, informes con PDF, PIN también al abrir, feriados y días sin clases, y tema claro y oscuro. El cambio de prioridad más importante: el backend y el correo, que figuraban como etapa 11 del informe técnico, pasan a la siguiente fase para consolidar primero un MVP local sólido. Lo que no cambió: el alcance ético, sin GPS, sin bloqueo de apps y sin leer mensajes.</a:t>
             </a:r>
-            <a:endParaRPr lang="en-US" dirty="0"/>
           </a:p>
         </p:txBody>
       </p:sp>
@@ -1398,7 +1169,6 @@
               <a:rPr lang="en-US" dirty="0"/>
               <a:t>El 88 % es la cantidad de semanas de actividades completadas sobre el total planificado (14 de 16 semanas); Pruebas y cierre, de 2 semanas, está en curso. Todas las actividades del plan de trabajo de la Fase 1 están completas, salvo Pruebas y cierre, que está en curso y es lo que corresponde a esta etapa. Además del plan se agregaron mejoras: tema claro y oscuro, días sin clases y feriados, informes en PDF, pruebas unitarias y una auditoría de código. El backend no figura en la tabla del plan de trabajo; es la siguiente fase.</a:t>
             </a:r>
-            <a:endParaRPr lang="en-US" dirty="0"/>
           </a:p>
         </p:txBody>
       </p:sp>
@@ -1486,7 +1256,6 @@
               <a:rPr lang="en-US" dirty="0"/>
               <a:t>Arquitectura MVVM con las carpetas ui, viewmodel, data, domain, monitoring y utils. Android restringe el trabajo en segundo plano, por eso no hay un proceso corriendo todo el día: UsageStatsManager registra el uso en el sistema y WorkManager consulta y guarda el informe al terminar cada jornada. Room usa migraciones explícitas, nunca se borra la base de datos.</a:t>
             </a:r>
-            <a:endParaRPr lang="en-US" dirty="0"/>
           </a:p>
         </p:txBody>
       </p:sp>
@@ -1574,7 +1343,6 @@
               <a:rPr lang="en-US" dirty="0"/>
               <a:t>Mapa tecnológico por capas, con el logo de cada tecnología que tiene uno. Todo lo sólido ya está en uso en la app; lo punteado, Django REST y PostgreSQL, es la siguiente fase. Recorrer de arriba hacia abajo: interfaz en Compose, lógica con Kotlin y MVVM, datos locales con Room sobre SQLite, las piezas de Android que hacen el monitoreo (UsageStatsManager y WorkManager son parte de Android), seguridad e informes, y las herramientas de trabajo del equipo. MVVM, Flow, KSP, SHA-256 y similares son patrones o utilidades sin logo propio.</a:t>
             </a:r>
-            <a:endParaRPr lang="en-US" dirty="0"/>
           </a:p>
         </p:txBody>
       </p:sp>
@@ -1662,7 +1430,6 @@
               <a:rPr lang="en-US" dirty="0"/>
               <a:t>El recorrido completo con los componentes ya mencionados. Se configura una jornada y se guarda en Room. WorkManager agenda el informe. Android registra el uso por su cuenta, así que NEXO no necesita estar corriendo todo el día. Al terminar la jornada, el Worker consulta UsageStatsManager con la fecha de la jornada, clasifica cada app por categoría y guarda el informe en Room. La interfaz lee esos datos para mostrar Inicio, Estadísticas e Informes, y genera el PDF. Después de esta diapositiva viene la demo en vivo.</a:t>
             </a:r>
-            <a:endParaRPr lang="en-US" dirty="0"/>
           </a:p>
         </p:txBody>
       </p:sp>
@@ -1750,7 +1517,6 @@
               <a:rPr lang="en-US" dirty="0"/>
               <a:t>Aquí va la demostración en vivo en el teléfono: el profesor prefiere que NO sea en video, así que el video queda solo como respaldo de emergencia. Seis categorías: Educación, Comunicación, Redes Sociales, Entretenimiento, Juegos y Otros. Mostrar: crear una jornada, ver Inicio y Estadísticas con datos reales, abrir un informe y su PDF, y el cambio de tema claro y oscuro. Si se puede, agregar capturas de pantalla actuales en esta diapositiva.</a:t>
             </a:r>
-            <a:endParaRPr lang="en-US" dirty="0"/>
           </a:p>
         </p:txBody>
       </p:sp>
@@ -1828,6 +1594,7 @@
         <a:solidFill>
           <a:srgbClr val="EAF2F6"/>
         </a:solidFill>
+        <a:effectLst/>
       </p:bgPr>
     </p:bg>
     <p:spTree>
@@ -1847,7 +1614,9 @@
       <p:sp>
         <p:nvSpPr>
           <p:cNvPr id="2" name="Title Placeholder 1"/>
-          <p:cNvSpPr/>
+          <p:cNvSpPr>
+            <a:spLocks noGrp="1"/>
+          </p:cNvSpPr>
           <p:nvPr>
             <p:ph type="title"/>
           </p:nvPr>
@@ -1866,7 +1635,7 @@
         <p:txBody>
           <a:bodyPr wrap="square" lIns="0" tIns="0" rIns="0" bIns="0" rtlCol="0" anchor="t"/>
           <a:lstStyle>
-            <a:lvl1pPr algn="l" indent="0" marL="0">
+            <a:lvl1pPr marL="0" indent="0" algn="l">
               <a:lnSpc>
                 <a:spcPct val="115000"/>
               </a:lnSpc>
@@ -1882,7 +1651,7 @@
             </a:lvl1pPr>
           </a:lstStyle>
           <a:p>
-            <a:pPr algn="l" indent="0" marL="0">
+            <a:pPr marL="0" indent="0" algn="l">
               <a:lnSpc>
                 <a:spcPct val="115000"/>
               </a:lnSpc>
@@ -1895,9 +1664,11 @@
       <p:sp>
         <p:nvSpPr>
           <p:cNvPr id="3" name="Text Placeholder 2"/>
-          <p:cNvSpPr/>
+          <p:cNvSpPr>
+            <a:spLocks noGrp="1"/>
+          </p:cNvSpPr>
           <p:nvPr>
-            <p:ph idx="101" type="body"/>
+            <p:ph type="body" idx="101"/>
           </p:nvPr>
         </p:nvSpPr>
         <p:spPr>
@@ -1914,7 +1685,7 @@
         <p:txBody>
           <a:bodyPr wrap="square" lIns="0" tIns="0" rIns="0" bIns="0" rtlCol="0" anchor="t"/>
           <a:lstStyle>
-            <a:lvl1pPr algn="l" indent="0" marL="0">
+            <a:lvl1pPr marL="0" indent="0" algn="l">
               <a:lnSpc>
                 <a:spcPct val="140000"/>
               </a:lnSpc>
@@ -1930,7 +1701,7 @@
             </a:lvl1pPr>
           </a:lstStyle>
           <a:p>
-            <a:pPr algn="l" indent="0" marL="0">
+            <a:pPr marL="0" indent="0" algn="l">
               <a:lnSpc>
                 <a:spcPct val="140000"/>
               </a:lnSpc>
@@ -1956,6 +1727,7 @@
         <a:solidFill>
           <a:srgbClr val="EAF2F6"/>
         </a:solidFill>
+        <a:effectLst/>
       </p:bgPr>
     </p:bg>
     <p:spTree>
@@ -1975,7 +1747,9 @@
       <p:sp>
         <p:nvSpPr>
           <p:cNvPr id="2" name="Title Placeholder 1"/>
-          <p:cNvSpPr/>
+          <p:cNvSpPr>
+            <a:spLocks noGrp="1"/>
+          </p:cNvSpPr>
           <p:nvPr>
             <p:ph type="title"/>
           </p:nvPr>
@@ -1994,7 +1768,7 @@
         <p:txBody>
           <a:bodyPr wrap="square" lIns="0" tIns="0" rIns="0" bIns="0" rtlCol="0" anchor="t"/>
           <a:lstStyle>
-            <a:lvl1pPr algn="l" indent="0" marL="0">
+            <a:lvl1pPr marL="0" indent="0" algn="l">
               <a:lnSpc>
                 <a:spcPct val="115000"/>
               </a:lnSpc>
@@ -2010,7 +1784,7 @@
             </a:lvl1pPr>
           </a:lstStyle>
           <a:p>
-            <a:pPr algn="l" indent="0" marL="0">
+            <a:pPr marL="0" indent="0" algn="l">
               <a:lnSpc>
                 <a:spcPct val="115000"/>
               </a:lnSpc>
@@ -2023,9 +1797,11 @@
       <p:sp>
         <p:nvSpPr>
           <p:cNvPr id="3" name="Text Placeholder 2"/>
-          <p:cNvSpPr/>
+          <p:cNvSpPr>
+            <a:spLocks noGrp="1"/>
+          </p:cNvSpPr>
           <p:nvPr>
-            <p:ph idx="101" type="body"/>
+            <p:ph type="body" idx="101"/>
           </p:nvPr>
         </p:nvSpPr>
         <p:spPr>
@@ -2042,7 +1818,7 @@
         <p:txBody>
           <a:bodyPr wrap="square" lIns="0" tIns="0" rIns="0" bIns="0" rtlCol="0" anchor="t"/>
           <a:lstStyle>
-            <a:lvl1pPr algn="l" indent="0" marL="0">
+            <a:lvl1pPr marL="0" indent="0" algn="l">
               <a:lnSpc>
                 <a:spcPct val="140000"/>
               </a:lnSpc>
@@ -2058,7 +1834,7 @@
             </a:lvl1pPr>
           </a:lstStyle>
           <a:p>
-            <a:pPr algn="l" indent="0" marL="0">
+            <a:pPr marL="0" indent="0" algn="l">
               <a:lnSpc>
                 <a:spcPct val="140000"/>
               </a:lnSpc>
@@ -2337,6 +2113,7 @@
         <a:solidFill>
           <a:srgbClr val="17203E"/>
         </a:solidFill>
+        <a:effectLst/>
       </p:bgPr>
     </p:bg>
     <p:spTree>
@@ -2383,15 +2160,15 @@
       </p:sp>
       <p:pic>
         <p:nvPicPr>
-          <p:cNvPr id="3" name="Image 0" descr="Verified">    </p:cNvPr>
+          <p:cNvPr id="3" name="Image 0" descr="Verified"/>
           <p:cNvPicPr>
             <a:picLocks noChangeAspect="1"/>
           </p:cNvPicPr>
           <p:nvPr/>
         </p:nvPicPr>
         <p:blipFill>
-          <a:blip r:embed="rId1"/>
-          <a:srcRect l="0" r="0" t="0" b="0"/>
+          <a:blip r:embed="rId3"/>
+          <a:srcRect/>
           <a:stretch/>
         </p:blipFill>
         <p:spPr>
@@ -2427,14 +2204,14 @@
           </a:bodyPr>
           <a:lstStyle/>
           <a:p>
-            <a:pPr algn="l" indent="0" marL="0">
+            <a:pPr marL="0" indent="0" algn="l">
               <a:lnSpc>
                 <a:spcPts val="1680"/>
               </a:lnSpc>
               <a:buNone/>
             </a:pPr>
             <a:r>
-              <a:rPr lang="en-US" sz="1200" b="1" spc="200" kern="0" dirty="0">
+              <a:rPr lang="en-US" sz="1200" b="1" kern="0" spc="200" dirty="0">
                 <a:solidFill>
                   <a:srgbClr val="F96167"/>
                 </a:solidFill>
@@ -2451,7 +2228,9 @@
       <p:sp>
         <p:nvSpPr>
           <p:cNvPr id="5" name="Text 2"/>
-          <p:cNvSpPr/>
+          <p:cNvSpPr>
+            <a:spLocks noGrp="1"/>
+          </p:cNvSpPr>
           <p:nvPr>
             <p:ph type="title"/>
           </p:nvPr>
@@ -2473,14 +2252,14 @@
           </a:bodyPr>
           <a:lstStyle/>
           <a:p>
-            <a:pPr algn="l" indent="0" marL="0">
+            <a:pPr marL="0" indent="0" algn="l">
               <a:lnSpc>
                 <a:spcPts val="6600"/>
               </a:lnSpc>
               <a:buNone/>
             </a:pPr>
             <a:r>
-              <a:rPr lang="en-US" sz="6000" b="1" i="0" spc="400" kern="0" dirty="0">
+              <a:rPr lang="en-US" sz="6000" b="1" i="0" kern="0" spc="400" dirty="0">
                 <a:solidFill>
                   <a:srgbClr val="EAF2F6"/>
                 </a:solidFill>
@@ -2517,7 +2296,7 @@
           </a:bodyPr>
           <a:lstStyle/>
           <a:p>
-            <a:pPr algn="l" indent="0" marL="0">
+            <a:pPr marL="0" indent="0" algn="l">
               <a:lnSpc>
                 <a:spcPts val="2640"/>
               </a:lnSpc>
@@ -2540,15 +2319,15 @@
       </p:sp>
       <p:pic>
         <p:nvPicPr>
-          <p:cNvPr id="7" name="Image 1" descr="line">    </p:cNvPr>
+          <p:cNvPr id="7" name="Image 1" descr="line"/>
           <p:cNvPicPr>
             <a:picLocks noChangeAspect="1"/>
           </p:cNvPicPr>
           <p:nvPr/>
         </p:nvPicPr>
         <p:blipFill>
-          <a:blip r:embed="rId2"/>
-          <a:srcRect l="0" r="0" t="0" b="0"/>
+          <a:blip r:embed="rId4"/>
+          <a:srcRect/>
           <a:stretch/>
         </p:blipFill>
         <p:spPr>
@@ -2584,7 +2363,7 @@
           </a:bodyPr>
           <a:lstStyle/>
           <a:p>
-            <a:pPr algn="l" indent="0" marL="0">
+            <a:pPr marL="0" indent="0" algn="l">
               <a:lnSpc>
                 <a:spcPts val="2240"/>
               </a:lnSpc>
@@ -2621,6 +2400,7 @@
         <a:solidFill>
           <a:srgbClr val="17203E"/>
         </a:solidFill>
+        <a:effectLst/>
       </p:bgPr>
     </p:bg>
     <p:spTree>
@@ -2640,7 +2420,9 @@
       <p:sp>
         <p:nvSpPr>
           <p:cNvPr id="2" name="Text 0"/>
-          <p:cNvSpPr/>
+          <p:cNvSpPr>
+            <a:spLocks noGrp="1"/>
+          </p:cNvSpPr>
           <p:nvPr>
             <p:ph type="title"/>
           </p:nvPr>
@@ -2662,7 +2444,7 @@
           </a:bodyPr>
           <a:lstStyle/>
           <a:p>
-            <a:pPr algn="l" indent="0" marL="0">
+            <a:pPr marL="0" indent="0" algn="l">
               <a:lnSpc>
                 <a:spcPts val="3960"/>
               </a:lnSpc>
@@ -2737,14 +2519,14 @@
           </a:bodyPr>
           <a:lstStyle/>
           <a:p>
-            <a:pPr algn="ctr" indent="0" marL="0">
+            <a:pPr marL="0" indent="0" algn="ctr">
               <a:lnSpc>
                 <a:spcPts val="1680"/>
               </a:lnSpc>
               <a:buNone/>
             </a:pPr>
             <a:r>
-              <a:rPr lang="en-US" sz="1200" b="1" spc="150" kern="0" dirty="0">
+              <a:rPr lang="en-US" sz="1200" b="1" kern="0" spc="150" dirty="0">
                 <a:solidFill>
                   <a:srgbClr val="17203E"/>
                 </a:solidFill>
@@ -2781,7 +2563,7 @@
           </a:bodyPr>
           <a:lstStyle/>
           <a:p>
-            <a:pPr algn="l" marL="189992" indent="-189992">
+            <a:pPr marL="189992" indent="-189992" algn="l">
               <a:lnSpc>
                 <a:spcPts val="2240"/>
               </a:lnSpc>
@@ -2802,7 +2584,7 @@
             <a:endParaRPr lang="en-US" sz="1600" dirty="0"/>
           </a:p>
           <a:p>
-            <a:pPr algn="l" marL="189992" indent="-189992">
+            <a:pPr marL="189992" indent="-189992" algn="l">
               <a:lnSpc>
                 <a:spcPts val="2240"/>
               </a:lnSpc>
@@ -2823,7 +2605,7 @@
             <a:endParaRPr lang="en-US" sz="1600" dirty="0"/>
           </a:p>
           <a:p>
-            <a:pPr algn="l" marL="189992" indent="-189992">
+            <a:pPr marL="189992" indent="-189992" algn="l">
               <a:lnSpc>
                 <a:spcPts val="2240"/>
               </a:lnSpc>
@@ -2899,14 +2681,14 @@
           </a:bodyPr>
           <a:lstStyle/>
           <a:p>
-            <a:pPr algn="ctr" indent="0" marL="0">
+            <a:pPr marL="0" indent="0" algn="ctr">
               <a:lnSpc>
                 <a:spcPts val="1680"/>
               </a:lnSpc>
               <a:buNone/>
             </a:pPr>
             <a:r>
-              <a:rPr lang="en-US" sz="1200" b="1" spc="150" kern="0" dirty="0">
+              <a:rPr lang="en-US" sz="1200" b="1" kern="0" spc="150" dirty="0">
                 <a:solidFill>
                   <a:srgbClr val="17203E"/>
                 </a:solidFill>
@@ -2943,7 +2725,7 @@
           </a:bodyPr>
           <a:lstStyle/>
           <a:p>
-            <a:pPr algn="l" marL="189992" indent="-189992">
+            <a:pPr marL="189992" indent="-189992" algn="l">
               <a:lnSpc>
                 <a:spcPts val="2240"/>
               </a:lnSpc>
@@ -2964,7 +2746,7 @@
             <a:endParaRPr lang="en-US" sz="1600" dirty="0"/>
           </a:p>
           <a:p>
-            <a:pPr algn="l" marL="189992" indent="-189992">
+            <a:pPr marL="189992" indent="-189992" algn="l">
               <a:lnSpc>
                 <a:spcPts val="2240"/>
               </a:lnSpc>
@@ -2985,7 +2767,7 @@
             <a:endParaRPr lang="en-US" sz="1600" dirty="0"/>
           </a:p>
           <a:p>
-            <a:pPr algn="l" marL="189992" indent="-189992">
+            <a:pPr marL="189992" indent="-189992" algn="l">
               <a:lnSpc>
                 <a:spcPts val="2240"/>
               </a:lnSpc>
@@ -3030,7 +2812,7 @@
           </a:bodyPr>
           <a:lstStyle/>
           <a:p>
-            <a:pPr algn="l" indent="0" marL="0">
+            <a:pPr marL="0" indent="0" algn="l">
               <a:lnSpc>
                 <a:spcPts val="2240"/>
               </a:lnSpc>
@@ -3074,7 +2856,7 @@
           </a:bodyPr>
           <a:lstStyle/>
           <a:p>
-            <a:pPr algn="l" indent="0" marL="0">
+            <a:pPr marL="0" indent="0" algn="l">
               <a:lnSpc>
                 <a:spcPts val="1680"/>
               </a:lnSpc>
@@ -3118,7 +2900,7 @@
           </a:bodyPr>
           <a:lstStyle/>
           <a:p>
-            <a:pPr algn="r" indent="0" marL="0">
+            <a:pPr marL="0" indent="0" algn="r">
               <a:lnSpc>
                 <a:spcPts val="1680"/>
               </a:lnSpc>
@@ -3155,6 +2937,7 @@
         <a:solidFill>
           <a:srgbClr val="EAF2F6"/>
         </a:solidFill>
+        <a:effectLst/>
       </p:bgPr>
     </p:bg>
     <p:spTree>
@@ -3174,7 +2957,9 @@
       <p:sp>
         <p:nvSpPr>
           <p:cNvPr id="2" name="Text 0"/>
-          <p:cNvSpPr/>
+          <p:cNvSpPr>
+            <a:spLocks noGrp="1"/>
+          </p:cNvSpPr>
           <p:nvPr>
             <p:ph type="title"/>
           </p:nvPr>
@@ -3196,7 +2981,7 @@
           </a:bodyPr>
           <a:lstStyle/>
           <a:p>
-            <a:pPr algn="l" indent="0" marL="0">
+            <a:pPr marL="0" indent="0" algn="l">
               <a:lnSpc>
                 <a:spcPts val="3960"/>
               </a:lnSpc>
@@ -3267,7 +3052,7 @@
           </a:bodyPr>
           <a:lstStyle/>
           <a:p>
-            <a:pPr algn="l" indent="0" marL="0">
+            <a:pPr marL="0" indent="0" algn="l">
               <a:lnSpc>
                 <a:spcPts val="6600"/>
               </a:lnSpc>
@@ -3311,7 +3096,7 @@
           </a:bodyPr>
           <a:lstStyle/>
           <a:p>
-            <a:pPr algn="l" indent="0" marL="0">
+            <a:pPr marL="0" indent="0" algn="l">
               <a:lnSpc>
                 <a:spcPts val="2640"/>
               </a:lnSpc>
@@ -3355,7 +3140,7 @@
           </a:bodyPr>
           <a:lstStyle/>
           <a:p>
-            <a:pPr algn="l" indent="0" marL="0">
+            <a:pPr marL="0" indent="0" algn="l">
               <a:lnSpc>
                 <a:spcPts val="2240"/>
               </a:lnSpc>
@@ -3426,7 +3211,7 @@
           </a:bodyPr>
           <a:lstStyle/>
           <a:p>
-            <a:pPr algn="l" indent="0" marL="0">
+            <a:pPr marL="0" indent="0" algn="l">
               <a:lnSpc>
                 <a:spcPts val="6600"/>
               </a:lnSpc>
@@ -3470,7 +3255,7 @@
           </a:bodyPr>
           <a:lstStyle/>
           <a:p>
-            <a:pPr algn="l" indent="0" marL="0">
+            <a:pPr marL="0" indent="0" algn="l">
               <a:lnSpc>
                 <a:spcPts val="2640"/>
               </a:lnSpc>
@@ -3514,7 +3299,7 @@
           </a:bodyPr>
           <a:lstStyle/>
           <a:p>
-            <a:pPr algn="l" indent="0" marL="0">
+            <a:pPr marL="0" indent="0" algn="l">
               <a:lnSpc>
                 <a:spcPts val="2240"/>
               </a:lnSpc>
@@ -3564,15 +3349,15 @@
       </p:sp>
       <p:pic>
         <p:nvPicPr>
-          <p:cNvPr id="12" name="Image 0" descr="Search">    </p:cNvPr>
+          <p:cNvPr id="12" name="Image 0" descr="Search"/>
           <p:cNvPicPr>
             <a:picLocks noChangeAspect="1"/>
           </p:cNvPicPr>
           <p:nvPr/>
         </p:nvPicPr>
         <p:blipFill>
-          <a:blip r:embed="rId1"/>
-          <a:srcRect l="0" r="0" t="0" b="0"/>
+          <a:blip r:embed="rId3"/>
+          <a:srcRect/>
           <a:stretch/>
         </p:blipFill>
         <p:spPr>
@@ -3608,7 +3393,7 @@
           </a:bodyPr>
           <a:lstStyle/>
           <a:p>
-            <a:pPr algn="l" indent="0" marL="0">
+            <a:pPr marL="0" indent="0" algn="l">
               <a:lnSpc>
                 <a:spcPts val="2640"/>
               </a:lnSpc>
@@ -3652,7 +3437,7 @@
           </a:bodyPr>
           <a:lstStyle/>
           <a:p>
-            <a:pPr algn="l" indent="0" marL="0">
+            <a:pPr marL="0" indent="0" algn="l">
               <a:lnSpc>
                 <a:spcPts val="2240"/>
               </a:lnSpc>
@@ -3696,7 +3481,7 @@
           </a:bodyPr>
           <a:lstStyle/>
           <a:p>
-            <a:pPr algn="l" indent="0" marL="0">
+            <a:pPr marL="0" indent="0" algn="l">
               <a:lnSpc>
                 <a:spcPts val="1680"/>
               </a:lnSpc>
@@ -3740,7 +3525,7 @@
           </a:bodyPr>
           <a:lstStyle/>
           <a:p>
-            <a:pPr algn="r" indent="0" marL="0">
+            <a:pPr marL="0" indent="0" algn="r">
               <a:lnSpc>
                 <a:spcPts val="1680"/>
               </a:lnSpc>
@@ -3777,6 +3562,7 @@
         <a:solidFill>
           <a:srgbClr val="EAF2F6"/>
         </a:solidFill>
+        <a:effectLst/>
       </p:bgPr>
     </p:bg>
     <p:spTree>
@@ -3796,7 +3582,9 @@
       <p:sp>
         <p:nvSpPr>
           <p:cNvPr id="2" name="Text 0"/>
-          <p:cNvSpPr/>
+          <p:cNvSpPr>
+            <a:spLocks noGrp="1"/>
+          </p:cNvSpPr>
           <p:nvPr>
             <p:ph type="title"/>
           </p:nvPr>
@@ -3818,7 +3606,7 @@
           </a:bodyPr>
           <a:lstStyle/>
           <a:p>
-            <a:pPr algn="l" indent="0" marL="0">
+            <a:pPr marL="0" indent="0" algn="l">
               <a:lnSpc>
                 <a:spcPts val="3960"/>
               </a:lnSpc>
@@ -3889,7 +3677,7 @@
           </a:bodyPr>
           <a:lstStyle/>
           <a:p>
-            <a:pPr algn="l" indent="0" marL="0">
+            <a:pPr marL="0" indent="0" algn="l">
               <a:lnSpc>
                 <a:spcPts val="2640"/>
               </a:lnSpc>
@@ -3933,7 +3721,7 @@
           </a:bodyPr>
           <a:lstStyle/>
           <a:p>
-            <a:pPr algn="l" indent="0" marL="0">
+            <a:pPr marL="0" indent="0" algn="l">
               <a:lnSpc>
                 <a:spcPts val="2240"/>
               </a:lnSpc>
@@ -4004,7 +3792,7 @@
           </a:bodyPr>
           <a:lstStyle/>
           <a:p>
-            <a:pPr algn="l" indent="0" marL="0">
+            <a:pPr marL="0" indent="0" algn="l">
               <a:lnSpc>
                 <a:spcPts val="2640"/>
               </a:lnSpc>
@@ -4048,7 +3836,7 @@
           </a:bodyPr>
           <a:lstStyle/>
           <a:p>
-            <a:pPr algn="l" indent="0" marL="0">
+            <a:pPr marL="0" indent="0" algn="l">
               <a:lnSpc>
                 <a:spcPts val="2240"/>
               </a:lnSpc>
@@ -4119,7 +3907,7 @@
           </a:bodyPr>
           <a:lstStyle/>
           <a:p>
-            <a:pPr algn="l" indent="0" marL="0">
+            <a:pPr marL="0" indent="0" algn="l">
               <a:lnSpc>
                 <a:spcPts val="2640"/>
               </a:lnSpc>
@@ -4163,7 +3951,7 @@
           </a:bodyPr>
           <a:lstStyle/>
           <a:p>
-            <a:pPr algn="l" indent="0" marL="0">
+            <a:pPr marL="0" indent="0" algn="l">
               <a:lnSpc>
                 <a:spcPts val="2240"/>
               </a:lnSpc>
@@ -4211,7 +3999,7 @@
           </a:bodyPr>
           <a:lstStyle/>
           <a:p>
-            <a:pPr algn="l" indent="0" marL="0">
+            <a:pPr marL="0" indent="0" algn="l">
               <a:lnSpc>
                 <a:spcPts val="2240"/>
               </a:lnSpc>
@@ -4266,7 +4054,7 @@
           </a:bodyPr>
           <a:lstStyle/>
           <a:p>
-            <a:pPr algn="l" indent="0" marL="0">
+            <a:pPr marL="0" indent="0" algn="l">
               <a:lnSpc>
                 <a:spcPts val="1680"/>
               </a:lnSpc>
@@ -4310,7 +4098,7 @@
           </a:bodyPr>
           <a:lstStyle/>
           <a:p>
-            <a:pPr algn="r" indent="0" marL="0">
+            <a:pPr marL="0" indent="0" algn="r">
               <a:lnSpc>
                 <a:spcPts val="1680"/>
               </a:lnSpc>
@@ -4347,6 +4135,7 @@
         <a:solidFill>
           <a:srgbClr val="EAF2F6"/>
         </a:solidFill>
+        <a:effectLst/>
       </p:bgPr>
     </p:bg>
     <p:spTree>
@@ -4366,7 +4155,9 @@
       <p:sp>
         <p:nvSpPr>
           <p:cNvPr id="2" name="Text 0"/>
-          <p:cNvSpPr/>
+          <p:cNvSpPr>
+            <a:spLocks noGrp="1"/>
+          </p:cNvSpPr>
           <p:nvPr>
             <p:ph type="title"/>
           </p:nvPr>
@@ -4388,7 +4179,7 @@
           </a:bodyPr>
           <a:lstStyle/>
           <a:p>
-            <a:pPr algn="l" indent="0" marL="0">
+            <a:pPr marL="0" indent="0" algn="l">
               <a:lnSpc>
                 <a:spcPts val="3960"/>
               </a:lnSpc>
@@ -4463,14 +4254,14 @@
           </a:bodyPr>
           <a:lstStyle/>
           <a:p>
-            <a:pPr algn="ctr" indent="0" marL="0">
+            <a:pPr marL="0" indent="0" algn="ctr">
               <a:lnSpc>
                 <a:spcPts val="1680"/>
               </a:lnSpc>
               <a:buNone/>
             </a:pPr>
             <a:r>
-              <a:rPr lang="en-US" sz="1200" b="1" spc="150" kern="0" dirty="0">
+              <a:rPr lang="en-US" sz="1200" b="1" kern="0" spc="150" dirty="0">
                 <a:solidFill>
                   <a:srgbClr val="EAF2F6"/>
                 </a:solidFill>
@@ -4507,7 +4298,7 @@
           </a:bodyPr>
           <a:lstStyle/>
           <a:p>
-            <a:pPr algn="l" marL="189992" indent="-189992">
+            <a:pPr marL="189992" indent="-189992" algn="l">
               <a:lnSpc>
                 <a:spcPts val="2400"/>
               </a:lnSpc>
@@ -4528,7 +4319,7 @@
             <a:endParaRPr lang="en-US" sz="1600" dirty="0"/>
           </a:p>
           <a:p>
-            <a:pPr algn="l" marL="189992" indent="-189992">
+            <a:pPr marL="189992" indent="-189992" algn="l">
               <a:lnSpc>
                 <a:spcPts val="2400"/>
               </a:lnSpc>
@@ -4549,7 +4340,7 @@
             <a:endParaRPr lang="en-US" sz="1600" dirty="0"/>
           </a:p>
           <a:p>
-            <a:pPr algn="l" marL="189992" indent="-189992">
+            <a:pPr marL="189992" indent="-189992" algn="l">
               <a:lnSpc>
                 <a:spcPts val="2400"/>
               </a:lnSpc>
@@ -4570,7 +4361,7 @@
             <a:endParaRPr lang="en-US" sz="1600" dirty="0"/>
           </a:p>
           <a:p>
-            <a:pPr algn="l" marL="189992" indent="-189992">
+            <a:pPr marL="189992" indent="-189992" algn="l">
               <a:lnSpc>
                 <a:spcPts val="2400"/>
               </a:lnSpc>
@@ -4591,7 +4382,7 @@
             <a:endParaRPr lang="en-US" sz="1600" dirty="0"/>
           </a:p>
           <a:p>
-            <a:pPr algn="l" marL="189992" indent="-189992">
+            <a:pPr marL="189992" indent="-189992" algn="l">
               <a:lnSpc>
                 <a:spcPts val="2400"/>
               </a:lnSpc>
@@ -4612,7 +4403,7 @@
             <a:endParaRPr lang="en-US" sz="1600" dirty="0"/>
           </a:p>
           <a:p>
-            <a:pPr algn="l" marL="189992" indent="-189992">
+            <a:pPr marL="189992" indent="-189992" algn="l">
               <a:lnSpc>
                 <a:spcPts val="2400"/>
               </a:lnSpc>
@@ -4683,14 +4474,14 @@
           </a:bodyPr>
           <a:lstStyle/>
           <a:p>
-            <a:pPr algn="ctr" indent="0" marL="0">
+            <a:pPr marL="0" indent="0" algn="ctr">
               <a:lnSpc>
                 <a:spcPts val="1680"/>
               </a:lnSpc>
               <a:buNone/>
             </a:pPr>
             <a:r>
-              <a:rPr lang="en-US" sz="1200" b="1" spc="150" kern="0" dirty="0">
+              <a:rPr lang="en-US" sz="1200" b="1" kern="0" spc="150" dirty="0">
                 <a:solidFill>
                   <a:srgbClr val="17203E"/>
                 </a:solidFill>
@@ -4727,7 +4518,7 @@
           </a:bodyPr>
           <a:lstStyle/>
           <a:p>
-            <a:pPr algn="l" marL="189992" indent="-189992">
+            <a:pPr marL="189992" indent="-189992" algn="l">
               <a:lnSpc>
                 <a:spcPts val="2400"/>
               </a:lnSpc>
@@ -4748,7 +4539,7 @@
             <a:endParaRPr lang="en-US" sz="1600" dirty="0"/>
           </a:p>
           <a:p>
-            <a:pPr algn="l" marL="189992" indent="-189992">
+            <a:pPr marL="189992" indent="-189992" algn="l">
               <a:lnSpc>
                 <a:spcPts val="2400"/>
               </a:lnSpc>
@@ -4769,7 +4560,7 @@
             <a:endParaRPr lang="en-US" sz="1600" dirty="0"/>
           </a:p>
           <a:p>
-            <a:pPr algn="l" marL="189992" indent="-189992">
+            <a:pPr marL="189992" indent="-189992" algn="l">
               <a:lnSpc>
                 <a:spcPts val="2400"/>
               </a:lnSpc>
@@ -4790,7 +4581,7 @@
             <a:endParaRPr lang="en-US" sz="1600" dirty="0"/>
           </a:p>
           <a:p>
-            <a:pPr algn="l" marL="189992" indent="-189992">
+            <a:pPr marL="189992" indent="-189992" algn="l">
               <a:lnSpc>
                 <a:spcPts val="2400"/>
               </a:lnSpc>
@@ -4811,7 +4602,7 @@
             <a:endParaRPr lang="en-US" sz="1600" dirty="0"/>
           </a:p>
           <a:p>
-            <a:pPr algn="l" marL="189992" indent="-189992">
+            <a:pPr marL="189992" indent="-189992" algn="l">
               <a:lnSpc>
                 <a:spcPts val="2400"/>
               </a:lnSpc>
@@ -4856,7 +4647,7 @@
           </a:bodyPr>
           <a:lstStyle/>
           <a:p>
-            <a:pPr algn="l" indent="0" marL="0">
+            <a:pPr marL="0" indent="0" algn="l">
               <a:lnSpc>
                 <a:spcPts val="1680"/>
               </a:lnSpc>
@@ -4900,7 +4691,7 @@
           </a:bodyPr>
           <a:lstStyle/>
           <a:p>
-            <a:pPr algn="l" indent="0" marL="0">
+            <a:pPr marL="0" indent="0" algn="l">
               <a:lnSpc>
                 <a:spcPts val="1680"/>
               </a:lnSpc>
@@ -4944,7 +4735,7 @@
           </a:bodyPr>
           <a:lstStyle/>
           <a:p>
-            <a:pPr algn="r" indent="0" marL="0">
+            <a:pPr marL="0" indent="0" algn="r">
               <a:lnSpc>
                 <a:spcPts val="1680"/>
               </a:lnSpc>
@@ -4981,6 +4772,7 @@
         <a:solidFill>
           <a:srgbClr val="17203E"/>
         </a:solidFill>
+        <a:effectLst/>
       </p:bgPr>
     </p:bg>
     <p:spTree>
@@ -5000,7 +4792,9 @@
       <p:sp>
         <p:nvSpPr>
           <p:cNvPr id="2" name="Text 0"/>
-          <p:cNvSpPr/>
+          <p:cNvSpPr>
+            <a:spLocks noGrp="1"/>
+          </p:cNvSpPr>
           <p:nvPr>
             <p:ph type="title"/>
           </p:nvPr>
@@ -5022,7 +4816,7 @@
           </a:bodyPr>
           <a:lstStyle/>
           <a:p>
-            <a:pPr algn="l" indent="0" marL="0">
+            <a:pPr marL="0" indent="0" algn="l">
               <a:lnSpc>
                 <a:spcPts val="3960"/>
               </a:lnSpc>
@@ -5093,7 +4887,7 @@
           </a:bodyPr>
           <a:lstStyle/>
           <a:p>
-            <a:pPr algn="l" indent="0" marL="0">
+            <a:pPr marL="0" indent="0" algn="l">
               <a:lnSpc>
                 <a:spcPts val="2640"/>
               </a:lnSpc>
@@ -5137,7 +4931,7 @@
           </a:bodyPr>
           <a:lstStyle/>
           <a:p>
-            <a:pPr algn="l" indent="0" marL="0">
+            <a:pPr marL="0" indent="0" algn="l">
               <a:lnSpc>
                 <a:spcPts val="2240"/>
               </a:lnSpc>
@@ -5208,7 +5002,7 @@
           </a:bodyPr>
           <a:lstStyle/>
           <a:p>
-            <a:pPr algn="l" indent="0" marL="0">
+            <a:pPr marL="0" indent="0" algn="l">
               <a:lnSpc>
                 <a:spcPts val="2640"/>
               </a:lnSpc>
@@ -5252,7 +5046,7 @@
           </a:bodyPr>
           <a:lstStyle/>
           <a:p>
-            <a:pPr algn="l" indent="0" marL="0">
+            <a:pPr marL="0" indent="0" algn="l">
               <a:lnSpc>
                 <a:spcPts val="2240"/>
               </a:lnSpc>
@@ -5323,7 +5117,7 @@
           </a:bodyPr>
           <a:lstStyle/>
           <a:p>
-            <a:pPr algn="l" indent="0" marL="0">
+            <a:pPr marL="0" indent="0" algn="l">
               <a:lnSpc>
                 <a:spcPts val="2640"/>
               </a:lnSpc>
@@ -5367,7 +5161,7 @@
           </a:bodyPr>
           <a:lstStyle/>
           <a:p>
-            <a:pPr algn="l" indent="0" marL="0">
+            <a:pPr marL="0" indent="0" algn="l">
               <a:lnSpc>
                 <a:spcPts val="2240"/>
               </a:lnSpc>
@@ -5438,7 +5232,7 @@
           </a:bodyPr>
           <a:lstStyle/>
           <a:p>
-            <a:pPr algn="l" indent="0" marL="0">
+            <a:pPr marL="0" indent="0" algn="l">
               <a:lnSpc>
                 <a:spcPts val="2640"/>
               </a:lnSpc>
@@ -5482,7 +5276,7 @@
           </a:bodyPr>
           <a:lstStyle/>
           <a:p>
-            <a:pPr algn="l" indent="0" marL="0">
+            <a:pPr marL="0" indent="0" algn="l">
               <a:lnSpc>
                 <a:spcPts val="2240"/>
               </a:lnSpc>
@@ -5553,7 +5347,7 @@
           </a:bodyPr>
           <a:lstStyle/>
           <a:p>
-            <a:pPr algn="l" indent="0" marL="0">
+            <a:pPr marL="0" indent="0" algn="l">
               <a:lnSpc>
                 <a:spcPts val="2640"/>
               </a:lnSpc>
@@ -5597,7 +5391,7 @@
           </a:bodyPr>
           <a:lstStyle/>
           <a:p>
-            <a:pPr algn="l" indent="0" marL="0">
+            <a:pPr marL="0" indent="0" algn="l">
               <a:lnSpc>
                 <a:spcPts val="2240"/>
               </a:lnSpc>
@@ -5668,7 +5462,7 @@
           </a:bodyPr>
           <a:lstStyle/>
           <a:p>
-            <a:pPr algn="l" indent="0" marL="0">
+            <a:pPr marL="0" indent="0" algn="l">
               <a:lnSpc>
                 <a:spcPts val="2640"/>
               </a:lnSpc>
@@ -5712,7 +5506,7 @@
           </a:bodyPr>
           <a:lstStyle/>
           <a:p>
-            <a:pPr algn="l" indent="0" marL="0">
+            <a:pPr marL="0" indent="0" algn="l">
               <a:lnSpc>
                 <a:spcPts val="2240"/>
               </a:lnSpc>
@@ -5756,7 +5550,7 @@
           </a:bodyPr>
           <a:lstStyle/>
           <a:p>
-            <a:pPr algn="l" indent="0" marL="0">
+            <a:pPr marL="0" indent="0" algn="l">
               <a:lnSpc>
                 <a:spcPts val="2240"/>
               </a:lnSpc>
@@ -5800,7 +5594,7 @@
           </a:bodyPr>
           <a:lstStyle/>
           <a:p>
-            <a:pPr algn="l" indent="0" marL="0">
+            <a:pPr marL="0" indent="0" algn="l">
               <a:lnSpc>
                 <a:spcPts val="1680"/>
               </a:lnSpc>
@@ -5844,7 +5638,7 @@
           </a:bodyPr>
           <a:lstStyle/>
           <a:p>
-            <a:pPr algn="r" indent="0" marL="0">
+            <a:pPr marL="0" indent="0" algn="r">
               <a:lnSpc>
                 <a:spcPts val="1680"/>
               </a:lnSpc>
@@ -5881,6 +5675,7 @@
         <a:solidFill>
           <a:srgbClr val="17203E"/>
         </a:solidFill>
+        <a:effectLst/>
       </p:bgPr>
     </p:bg>
     <p:spTree>
@@ -5928,7 +5723,9 @@
       <p:sp>
         <p:nvSpPr>
           <p:cNvPr id="3" name="Text 1"/>
-          <p:cNvSpPr/>
+          <p:cNvSpPr>
+            <a:spLocks noGrp="1"/>
+          </p:cNvSpPr>
           <p:nvPr>
             <p:ph type="title"/>
           </p:nvPr>
@@ -5950,7 +5747,7 @@
           </a:bodyPr>
           <a:lstStyle/>
           <a:p>
-            <a:pPr algn="l" indent="0" marL="0">
+            <a:pPr marL="0" indent="0" algn="l">
               <a:lnSpc>
                 <a:spcPts val="6600"/>
               </a:lnSpc>
@@ -5973,15 +5770,15 @@
       </p:sp>
       <p:pic>
         <p:nvPicPr>
-          <p:cNvPr id="4" name="Image 0" descr="line">    </p:cNvPr>
+          <p:cNvPr id="4" name="Image 0" descr="line"/>
           <p:cNvPicPr>
             <a:picLocks noChangeAspect="1"/>
           </p:cNvPicPr>
           <p:nvPr/>
         </p:nvPicPr>
         <p:blipFill>
-          <a:blip r:embed="rId1"/>
-          <a:srcRect l="0" r="0" t="0" b="0"/>
+          <a:blip r:embed="rId3"/>
+          <a:srcRect/>
           <a:stretch/>
         </p:blipFill>
         <p:spPr>
@@ -6017,7 +5814,7 @@
           </a:bodyPr>
           <a:lstStyle/>
           <a:p>
-            <a:pPr algn="l" indent="0" marL="0">
+            <a:pPr marL="0" indent="0" algn="l">
               <a:lnSpc>
                 <a:spcPts val="2640"/>
               </a:lnSpc>
@@ -6061,7 +5858,7 @@
           </a:bodyPr>
           <a:lstStyle/>
           <a:p>
-            <a:pPr algn="l" indent="0" marL="0">
+            <a:pPr marL="0" indent="0" algn="l">
               <a:lnSpc>
                 <a:spcPts val="2240"/>
               </a:lnSpc>
@@ -6098,6 +5895,7 @@
         <a:solidFill>
           <a:srgbClr val="EAF2F6"/>
         </a:solidFill>
+        <a:effectLst/>
       </p:bgPr>
     </p:bg>
     <p:spTree>
@@ -6117,7 +5915,9 @@
       <p:sp>
         <p:nvSpPr>
           <p:cNvPr id="2" name="Text 0"/>
-          <p:cNvSpPr/>
+          <p:cNvSpPr>
+            <a:spLocks noGrp="1"/>
+          </p:cNvSpPr>
           <p:nvPr>
             <p:ph type="title"/>
           </p:nvPr>
@@ -6139,7 +5939,7 @@
           </a:bodyPr>
           <a:lstStyle/>
           <a:p>
-            <a:pPr algn="l" indent="0" marL="0">
+            <a:pPr marL="0" indent="0" algn="l">
               <a:lnSpc>
                 <a:spcPts val="3960"/>
               </a:lnSpc>
@@ -6210,7 +6010,7 @@
           </a:bodyPr>
           <a:lstStyle/>
           <a:p>
-            <a:pPr algn="l" indent="0" marL="0">
+            <a:pPr marL="0" indent="0" algn="l">
               <a:lnSpc>
                 <a:spcPts val="2640"/>
               </a:lnSpc>
@@ -6254,7 +6054,7 @@
           </a:bodyPr>
           <a:lstStyle/>
           <a:p>
-            <a:pPr algn="l" marL="189992" indent="-189992">
+            <a:pPr marL="189992" indent="-189992" algn="l">
               <a:lnSpc>
                 <a:spcPts val="2400"/>
               </a:lnSpc>
@@ -6275,7 +6075,7 @@
             <a:endParaRPr lang="en-US" sz="1600" dirty="0"/>
           </a:p>
           <a:p>
-            <a:pPr algn="l" marL="189992" indent="-189992">
+            <a:pPr marL="189992" indent="-189992" algn="l">
               <a:lnSpc>
                 <a:spcPts val="2400"/>
               </a:lnSpc>
@@ -6296,7 +6096,7 @@
             <a:endParaRPr lang="en-US" sz="1600" dirty="0"/>
           </a:p>
           <a:p>
-            <a:pPr algn="l" marL="189992" indent="-189992">
+            <a:pPr marL="189992" indent="-189992" algn="l">
               <a:lnSpc>
                 <a:spcPts val="2400"/>
               </a:lnSpc>
@@ -6363,7 +6163,7 @@
           </a:bodyPr>
           <a:lstStyle/>
           <a:p>
-            <a:pPr algn="l" indent="0" marL="0">
+            <a:pPr marL="0" indent="0" algn="l">
               <a:lnSpc>
                 <a:spcPts val="2640"/>
               </a:lnSpc>
@@ -6407,7 +6207,7 @@
           </a:bodyPr>
           <a:lstStyle/>
           <a:p>
-            <a:pPr algn="l" marL="189992" indent="-189992">
+            <a:pPr marL="189992" indent="-189992" algn="l">
               <a:lnSpc>
                 <a:spcPts val="2400"/>
               </a:lnSpc>
@@ -6428,7 +6228,7 @@
             <a:endParaRPr lang="en-US" sz="1600" dirty="0"/>
           </a:p>
           <a:p>
-            <a:pPr algn="l" marL="189992" indent="-189992">
+            <a:pPr marL="189992" indent="-189992" algn="l">
               <a:lnSpc>
                 <a:spcPts val="2400"/>
               </a:lnSpc>
@@ -6449,7 +6249,7 @@
             <a:endParaRPr lang="en-US" sz="1600" dirty="0"/>
           </a:p>
           <a:p>
-            <a:pPr algn="l" marL="189992" indent="-189992">
+            <a:pPr marL="189992" indent="-189992" algn="l">
               <a:lnSpc>
                 <a:spcPts val="2400"/>
               </a:lnSpc>
@@ -6494,7 +6294,7 @@
           </a:bodyPr>
           <a:lstStyle/>
           <a:p>
-            <a:pPr algn="l" indent="0" marL="0">
+            <a:pPr marL="0" indent="0" algn="l">
               <a:lnSpc>
                 <a:spcPts val="1680"/>
               </a:lnSpc>
@@ -6538,7 +6338,7 @@
           </a:bodyPr>
           <a:lstStyle/>
           <a:p>
-            <a:pPr algn="r" indent="0" marL="0">
+            <a:pPr marL="0" indent="0" algn="r">
               <a:lnSpc>
                 <a:spcPts val="1680"/>
               </a:lnSpc>
@@ -6575,6 +6375,7 @@
         <a:solidFill>
           <a:srgbClr val="17203E"/>
         </a:solidFill>
+        <a:effectLst/>
       </p:bgPr>
     </p:bg>
     <p:spTree>
@@ -6594,7 +6395,9 @@
       <p:sp>
         <p:nvSpPr>
           <p:cNvPr id="2" name="Text 0"/>
-          <p:cNvSpPr/>
+          <p:cNvSpPr>
+            <a:spLocks noGrp="1"/>
+          </p:cNvSpPr>
           <p:nvPr>
             <p:ph type="title"/>
           </p:nvPr>
@@ -6616,7 +6419,7 @@
           </a:bodyPr>
           <a:lstStyle/>
           <a:p>
-            <a:pPr algn="l" indent="0" marL="0">
+            <a:pPr marL="0" indent="0" algn="l">
               <a:lnSpc>
                 <a:spcPts val="3960"/>
               </a:lnSpc>
@@ -6666,15 +6469,15 @@
       </p:sp>
       <p:pic>
         <p:nvPicPr>
-          <p:cNvPr id="4" name="Image 0" descr="Verified">    </p:cNvPr>
+          <p:cNvPr id="4" name="Image 0" descr="Verified"/>
           <p:cNvPicPr>
             <a:picLocks noChangeAspect="1"/>
           </p:cNvPicPr>
           <p:nvPr/>
         </p:nvPicPr>
         <p:blipFill>
-          <a:blip r:embed="rId1"/>
-          <a:srcRect l="0" r="0" t="0" b="0"/>
+          <a:blip r:embed="rId3"/>
+          <a:srcRect/>
           <a:stretch/>
         </p:blipFill>
         <p:spPr>
@@ -6710,7 +6513,7 @@
           </a:bodyPr>
           <a:lstStyle/>
           <a:p>
-            <a:pPr algn="l" indent="0" marL="0">
+            <a:pPr marL="0" indent="0" algn="l">
               <a:lnSpc>
                 <a:spcPts val="2640"/>
               </a:lnSpc>
@@ -6754,7 +6557,7 @@
           </a:bodyPr>
           <a:lstStyle/>
           <a:p>
-            <a:pPr algn="l" indent="0" marL="0">
+            <a:pPr marL="0" indent="0" algn="l">
               <a:lnSpc>
                 <a:spcPts val="2240"/>
               </a:lnSpc>
@@ -6804,15 +6607,15 @@
       </p:sp>
       <p:pic>
         <p:nvPicPr>
-          <p:cNvPr id="8" name="Image 1" descr="Trust">    </p:cNvPr>
+          <p:cNvPr id="8" name="Image 1" descr="Trust"/>
           <p:cNvPicPr>
             <a:picLocks noChangeAspect="1"/>
           </p:cNvPicPr>
           <p:nvPr/>
         </p:nvPicPr>
         <p:blipFill>
-          <a:blip r:embed="rId2"/>
-          <a:srcRect l="0" r="0" t="0" b="0"/>
+          <a:blip r:embed="rId4"/>
+          <a:srcRect/>
           <a:stretch/>
         </p:blipFill>
         <p:spPr>
@@ -6848,7 +6651,7 @@
           </a:bodyPr>
           <a:lstStyle/>
           <a:p>
-            <a:pPr algn="l" indent="0" marL="0">
+            <a:pPr marL="0" indent="0" algn="l">
               <a:lnSpc>
                 <a:spcPts val="2640"/>
               </a:lnSpc>
@@ -6892,7 +6695,7 @@
           </a:bodyPr>
           <a:lstStyle/>
           <a:p>
-            <a:pPr algn="l" indent="0" marL="0">
+            <a:pPr marL="0" indent="0" algn="l">
               <a:lnSpc>
                 <a:spcPts val="2240"/>
               </a:lnSpc>
@@ -6942,15 +6745,15 @@
       </p:sp>
       <p:pic>
         <p:nvPicPr>
-          <p:cNvPr id="12" name="Image 2" descr="Lock">    </p:cNvPr>
+          <p:cNvPr id="12" name="Image 2" descr="Lock"/>
           <p:cNvPicPr>
             <a:picLocks noChangeAspect="1"/>
           </p:cNvPicPr>
           <p:nvPr/>
         </p:nvPicPr>
         <p:blipFill>
-          <a:blip r:embed="rId3"/>
-          <a:srcRect l="0" r="0" t="0" b="0"/>
+          <a:blip r:embed="rId5"/>
+          <a:srcRect/>
           <a:stretch/>
         </p:blipFill>
         <p:spPr>
@@ -6986,7 +6789,7 @@
           </a:bodyPr>
           <a:lstStyle/>
           <a:p>
-            <a:pPr algn="l" indent="0" marL="0">
+            <a:pPr marL="0" indent="0" algn="l">
               <a:lnSpc>
                 <a:spcPts val="2640"/>
               </a:lnSpc>
@@ -7030,7 +6833,7 @@
           </a:bodyPr>
           <a:lstStyle/>
           <a:p>
-            <a:pPr algn="l" indent="0" marL="0">
+            <a:pPr marL="0" indent="0" algn="l">
               <a:lnSpc>
                 <a:spcPts val="2240"/>
               </a:lnSpc>
@@ -7074,7 +6877,7 @@
           </a:bodyPr>
           <a:lstStyle/>
           <a:p>
-            <a:pPr algn="l" indent="0" marL="0">
+            <a:pPr marL="0" indent="0" algn="l">
               <a:lnSpc>
                 <a:spcPts val="2240"/>
               </a:lnSpc>
@@ -7118,7 +6921,7 @@
           </a:bodyPr>
           <a:lstStyle/>
           <a:p>
-            <a:pPr algn="l" indent="0" marL="0">
+            <a:pPr marL="0" indent="0" algn="l">
               <a:lnSpc>
                 <a:spcPts val="1680"/>
               </a:lnSpc>
@@ -7162,7 +6965,7 @@
           </a:bodyPr>
           <a:lstStyle/>
           <a:p>
-            <a:pPr algn="r" indent="0" marL="0">
+            <a:pPr marL="0" indent="0" algn="r">
               <a:lnSpc>
                 <a:spcPts val="1680"/>
               </a:lnSpc>
@@ -7199,6 +7002,7 @@
         <a:solidFill>
           <a:srgbClr val="EAF2F6"/>
         </a:solidFill>
+        <a:effectLst/>
       </p:bgPr>
     </p:bg>
     <p:spTree>
@@ -7218,7 +7022,9 @@
       <p:sp>
         <p:nvSpPr>
           <p:cNvPr id="2" name="Text 0"/>
-          <p:cNvSpPr/>
+          <p:cNvSpPr>
+            <a:spLocks noGrp="1"/>
+          </p:cNvSpPr>
           <p:nvPr>
             <p:ph type="title"/>
           </p:nvPr>
@@ -7240,7 +7046,7 @@
           </a:bodyPr>
           <a:lstStyle/>
           <a:p>
-            <a:pPr algn="l" indent="0" marL="0">
+            <a:pPr marL="0" indent="0" algn="l">
               <a:lnSpc>
                 <a:spcPts val="3960"/>
               </a:lnSpc>
@@ -7284,9 +7090,27 @@
             <a:tbl>
               <a:tblPr/>
               <a:tblGrid>
-                <a:gridCol w="2321814"/>
-                <a:gridCol w="4115943"/>
-                <a:gridCol w="4115943"/>
+                <a:gridCol w="2321814">
+                  <a:extLst>
+                    <a:ext uri="{9D8B030D-6E8A-4147-A177-3AD203B41FA5}">
+                      <a16:colId xmlns:a16="http://schemas.microsoft.com/office/drawing/2014/main" val="20000"/>
+                    </a:ext>
+                  </a:extLst>
+                </a:gridCol>
+                <a:gridCol w="4115943">
+                  <a:extLst>
+                    <a:ext uri="{9D8B030D-6E8A-4147-A177-3AD203B41FA5}">
+                      <a16:colId xmlns:a16="http://schemas.microsoft.com/office/drawing/2014/main" val="20001"/>
+                    </a:ext>
+                  </a:extLst>
+                </a:gridCol>
+                <a:gridCol w="4115943">
+                  <a:extLst>
+                    <a:ext uri="{9D8B030D-6E8A-4147-A177-3AD203B41FA5}">
+                      <a16:colId xmlns:a16="http://schemas.microsoft.com/office/drawing/2014/main" val="20002"/>
+                    </a:ext>
+                  </a:extLst>
+                </a:gridCol>
               </a:tblGrid>
               <a:tr h="385961">
                 <a:tc>
@@ -7294,7 +7118,7 @@
                     <a:bodyPr/>
                     <a:lstStyle/>
                     <a:p>
-                      <a:pPr indent="0" marL="0">
+                      <a:pPr marL="0" indent="0">
                         <a:lnSpc>
                           <a:spcPts val="1960"/>
                         </a:lnSpc>
@@ -7318,7 +7142,7 @@
                       </a:endParaRPr>
                     </a:p>
                   </a:txBody>
-                  <a:tcPr marL="62230" marR="62230" marT="62230" marB="62230" anchor="t">
+                  <a:tcPr marL="62230" marR="62230" marT="62230" marB="62230">
                     <a:lnL w="12700" cap="flat" cmpd="sng" algn="ctr">
                       <a:solidFill>
                         <a:srgbClr val="BBC1C4"/>
@@ -7365,7 +7189,7 @@
                     <a:bodyPr/>
                     <a:lstStyle/>
                     <a:p>
-                      <a:pPr indent="0" marL="0">
+                      <a:pPr marL="0" indent="0">
                         <a:lnSpc>
                           <a:spcPts val="1960"/>
                         </a:lnSpc>
@@ -7389,7 +7213,7 @@
                       </a:endParaRPr>
                     </a:p>
                   </a:txBody>
-                  <a:tcPr marL="62230" marR="62230" marT="62230" marB="62230" anchor="t">
+                  <a:tcPr marL="62230" marR="62230" marT="62230" marB="62230">
                     <a:lnL w="12700" cap="flat" cmpd="sng" algn="ctr">
                       <a:solidFill>
                         <a:srgbClr val="094B6A"/>
@@ -7436,7 +7260,7 @@
                     <a:bodyPr/>
                     <a:lstStyle/>
                     <a:p>
-                      <a:pPr indent="0" marL="0">
+                      <a:pPr marL="0" indent="0">
                         <a:lnSpc>
                           <a:spcPts val="1960"/>
                         </a:lnSpc>
@@ -7460,7 +7284,7 @@
                       </a:endParaRPr>
                     </a:p>
                   </a:txBody>
-                  <a:tcPr marL="62230" marR="62230" marT="62230" marB="62230" anchor="t">
+                  <a:tcPr marL="62230" marR="62230" marT="62230" marB="62230">
                     <a:lnL w="12700" cap="flat" cmpd="sng" algn="ctr">
                       <a:solidFill>
                         <a:srgbClr val="094B6A"/>
@@ -7502,6 +7326,11 @@
                     </a:solidFill>
                   </a:tcPr>
                 </a:tc>
+                <a:extLst>
+                  <a:ext uri="{0D108BD9-81ED-4DB2-BD59-A6C34878D82A}">
+                    <a16:rowId xmlns:a16="http://schemas.microsoft.com/office/drawing/2014/main" val="10000"/>
+                  </a:ext>
+                </a:extLst>
               </a:tr>
               <a:tr h="385961">
                 <a:tc>
@@ -7509,7 +7338,7 @@
                     <a:bodyPr/>
                     <a:lstStyle/>
                     <a:p>
-                      <a:pPr indent="0" marL="0">
+                      <a:pPr marL="0" indent="0">
                         <a:lnSpc>
                           <a:spcPts val="1960"/>
                         </a:lnSpc>
@@ -7533,7 +7362,7 @@
                       </a:endParaRPr>
                     </a:p>
                   </a:txBody>
-                  <a:tcPr marL="62230" marR="62230" marT="62230" marB="62230" anchor="t">
+                  <a:tcPr marL="62230" marR="62230" marT="62230" marB="62230">
                     <a:lnL w="12700" cap="flat" cmpd="sng" algn="ctr">
                       <a:solidFill>
                         <a:srgbClr val="BBC1C4"/>
@@ -7580,7 +7409,7 @@
                     <a:bodyPr/>
                     <a:lstStyle/>
                     <a:p>
-                      <a:pPr indent="0" marL="0">
+                      <a:pPr marL="0" indent="0">
                         <a:lnSpc>
                           <a:spcPts val="1960"/>
                         </a:lnSpc>
@@ -7604,7 +7433,7 @@
                       </a:endParaRPr>
                     </a:p>
                   </a:txBody>
-                  <a:tcPr marL="62230" marR="62230" marT="62230" marB="62230" anchor="t">
+                  <a:tcPr marL="62230" marR="62230" marT="62230" marB="62230">
                     <a:lnL w="12700" cap="flat" cmpd="sng" algn="ctr">
                       <a:solidFill>
                         <a:srgbClr val="C7C9CA"/>
@@ -7651,7 +7480,7 @@
                     <a:bodyPr/>
                     <a:lstStyle/>
                     <a:p>
-                      <a:pPr indent="0" marL="0">
+                      <a:pPr marL="0" indent="0">
                         <a:lnSpc>
                           <a:spcPts val="1960"/>
                         </a:lnSpc>
@@ -7675,7 +7504,7 @@
                       </a:endParaRPr>
                     </a:p>
                   </a:txBody>
-                  <a:tcPr marL="62230" marR="62230" marT="62230" marB="62230" anchor="t">
+                  <a:tcPr marL="62230" marR="62230" marT="62230" marB="62230">
                     <a:lnL w="12700" cap="flat" cmpd="sng" algn="ctr">
                       <a:solidFill>
                         <a:srgbClr val="C7C9CA"/>
@@ -7717,6 +7546,11 @@
                     </a:solidFill>
                   </a:tcPr>
                 </a:tc>
+                <a:extLst>
+                  <a:ext uri="{0D108BD9-81ED-4DB2-BD59-A6C34878D82A}">
+                    <a16:rowId xmlns:a16="http://schemas.microsoft.com/office/drawing/2014/main" val="10001"/>
+                  </a:ext>
+                </a:extLst>
               </a:tr>
               <a:tr h="385961">
                 <a:tc>
@@ -7724,7 +7558,7 @@
                     <a:bodyPr/>
                     <a:lstStyle/>
                     <a:p>
-                      <a:pPr indent="0" marL="0">
+                      <a:pPr marL="0" indent="0">
                         <a:lnSpc>
                           <a:spcPts val="1960"/>
                         </a:lnSpc>
@@ -7748,7 +7582,7 @@
                       </a:endParaRPr>
                     </a:p>
                   </a:txBody>
-                  <a:tcPr marL="62230" marR="62230" marT="62230" marB="62230" anchor="t">
+                  <a:tcPr marL="62230" marR="62230" marT="62230" marB="62230">
                     <a:lnL w="12700" cap="flat" cmpd="sng" algn="ctr">
                       <a:solidFill>
                         <a:srgbClr val="BBC1C4"/>
@@ -7792,7 +7626,7 @@
                     <a:bodyPr/>
                     <a:lstStyle/>
                     <a:p>
-                      <a:pPr indent="0" marL="0">
+                      <a:pPr marL="0" indent="0">
                         <a:lnSpc>
                           <a:spcPts val="1960"/>
                         </a:lnSpc>
@@ -7816,7 +7650,7 @@
                       </a:endParaRPr>
                     </a:p>
                   </a:txBody>
-                  <a:tcPr marL="62230" marR="62230" marT="62230" marB="62230" anchor="t">
+                  <a:tcPr marL="62230" marR="62230" marT="62230" marB="62230">
                     <a:lnL w="12700" cap="flat" cmpd="sng" algn="ctr">
                       <a:solidFill>
                         <a:srgbClr val="BBC1C4"/>
@@ -7860,7 +7694,7 @@
                     <a:bodyPr/>
                     <a:lstStyle/>
                     <a:p>
-                      <a:pPr indent="0" marL="0">
+                      <a:pPr marL="0" indent="0">
                         <a:lnSpc>
                           <a:spcPts val="1960"/>
                         </a:lnSpc>
@@ -7884,7 +7718,7 @@
                       </a:endParaRPr>
                     </a:p>
                   </a:txBody>
-                  <a:tcPr marL="62230" marR="62230" marT="62230" marB="62230" anchor="t">
+                  <a:tcPr marL="62230" marR="62230" marT="62230" marB="62230">
                     <a:lnL w="12700" cap="flat" cmpd="sng" algn="ctr">
                       <a:solidFill>
                         <a:srgbClr val="BBC1C4"/>
@@ -7923,6 +7757,11 @@
                     </a:lnB>
                   </a:tcPr>
                 </a:tc>
+                <a:extLst>
+                  <a:ext uri="{0D108BD9-81ED-4DB2-BD59-A6C34878D82A}">
+                    <a16:rowId xmlns:a16="http://schemas.microsoft.com/office/drawing/2014/main" val="10002"/>
+                  </a:ext>
+                </a:extLst>
               </a:tr>
               <a:tr h="385961">
                 <a:tc>
@@ -7930,7 +7769,7 @@
                     <a:bodyPr/>
                     <a:lstStyle/>
                     <a:p>
-                      <a:pPr indent="0" marL="0">
+                      <a:pPr marL="0" indent="0">
                         <a:lnSpc>
                           <a:spcPts val="1960"/>
                         </a:lnSpc>
@@ -7954,7 +7793,7 @@
                       </a:endParaRPr>
                     </a:p>
                   </a:txBody>
-                  <a:tcPr marL="62230" marR="62230" marT="62230" marB="62230" anchor="t">
+                  <a:tcPr marL="62230" marR="62230" marT="62230" marB="62230">
                     <a:lnL w="12700" cap="flat" cmpd="sng" algn="ctr">
                       <a:solidFill>
                         <a:srgbClr val="BBC1C4"/>
@@ -8001,7 +7840,7 @@
                     <a:bodyPr/>
                     <a:lstStyle/>
                     <a:p>
-                      <a:pPr indent="0" marL="0">
+                      <a:pPr marL="0" indent="0">
                         <a:lnSpc>
                           <a:spcPts val="1960"/>
                         </a:lnSpc>
@@ -8025,7 +7864,7 @@
                       </a:endParaRPr>
                     </a:p>
                   </a:txBody>
-                  <a:tcPr marL="62230" marR="62230" marT="62230" marB="62230" anchor="t">
+                  <a:tcPr marL="62230" marR="62230" marT="62230" marB="62230">
                     <a:lnL w="12700" cap="flat" cmpd="sng" algn="ctr">
                       <a:solidFill>
                         <a:srgbClr val="C7C9CA"/>
@@ -8072,7 +7911,7 @@
                     <a:bodyPr/>
                     <a:lstStyle/>
                     <a:p>
-                      <a:pPr indent="0" marL="0">
+                      <a:pPr marL="0" indent="0">
                         <a:lnSpc>
                           <a:spcPts val="1960"/>
                         </a:lnSpc>
@@ -8096,7 +7935,7 @@
                       </a:endParaRPr>
                     </a:p>
                   </a:txBody>
-                  <a:tcPr marL="62230" marR="62230" marT="62230" marB="62230" anchor="t">
+                  <a:tcPr marL="62230" marR="62230" marT="62230" marB="62230">
                     <a:lnL w="12700" cap="flat" cmpd="sng" algn="ctr">
                       <a:solidFill>
                         <a:srgbClr val="C7C9CA"/>
@@ -8138,6 +7977,11 @@
                     </a:solidFill>
                   </a:tcPr>
                 </a:tc>
+                <a:extLst>
+                  <a:ext uri="{0D108BD9-81ED-4DB2-BD59-A6C34878D82A}">
+                    <a16:rowId xmlns:a16="http://schemas.microsoft.com/office/drawing/2014/main" val="10003"/>
+                  </a:ext>
+                </a:extLst>
               </a:tr>
               <a:tr h="385961">
                 <a:tc>
@@ -8145,7 +7989,7 @@
                     <a:bodyPr/>
                     <a:lstStyle/>
                     <a:p>
-                      <a:pPr indent="0" marL="0">
+                      <a:pPr marL="0" indent="0">
                         <a:lnSpc>
                           <a:spcPts val="1960"/>
                         </a:lnSpc>
@@ -8169,7 +8013,7 @@
                       </a:endParaRPr>
                     </a:p>
                   </a:txBody>
-                  <a:tcPr marL="62230" marR="62230" marT="62230" marB="62230" anchor="t">
+                  <a:tcPr marL="62230" marR="62230" marT="62230" marB="62230">
                     <a:lnL w="12700" cap="flat" cmpd="sng" algn="ctr">
                       <a:solidFill>
                         <a:srgbClr val="BBC1C4"/>
@@ -8213,7 +8057,7 @@
                     <a:bodyPr/>
                     <a:lstStyle/>
                     <a:p>
-                      <a:pPr indent="0" marL="0">
+                      <a:pPr marL="0" indent="0">
                         <a:lnSpc>
                           <a:spcPts val="1960"/>
                         </a:lnSpc>
@@ -8237,7 +8081,7 @@
                       </a:endParaRPr>
                     </a:p>
                   </a:txBody>
-                  <a:tcPr marL="62230" marR="62230" marT="62230" marB="62230" anchor="t">
+                  <a:tcPr marL="62230" marR="62230" marT="62230" marB="62230">
                     <a:lnL w="12700" cap="flat" cmpd="sng" algn="ctr">
                       <a:solidFill>
                         <a:srgbClr val="BBC1C4"/>
@@ -8281,7 +8125,7 @@
                     <a:bodyPr/>
                     <a:lstStyle/>
                     <a:p>
-                      <a:pPr indent="0" marL="0">
+                      <a:pPr marL="0" indent="0">
                         <a:lnSpc>
                           <a:spcPts val="1960"/>
                         </a:lnSpc>
@@ -8305,7 +8149,7 @@
                       </a:endParaRPr>
                     </a:p>
                   </a:txBody>
-                  <a:tcPr marL="62230" marR="62230" marT="62230" marB="62230" anchor="t">
+                  <a:tcPr marL="62230" marR="62230" marT="62230" marB="62230">
                     <a:lnL w="12700" cap="flat" cmpd="sng" algn="ctr">
                       <a:solidFill>
                         <a:srgbClr val="BBC1C4"/>
@@ -8344,6 +8188,11 @@
                     </a:lnB>
                   </a:tcPr>
                 </a:tc>
+                <a:extLst>
+                  <a:ext uri="{0D108BD9-81ED-4DB2-BD59-A6C34878D82A}">
+                    <a16:rowId xmlns:a16="http://schemas.microsoft.com/office/drawing/2014/main" val="10004"/>
+                  </a:ext>
+                </a:extLst>
               </a:tr>
               <a:tr h="385961">
                 <a:tc>
@@ -8351,7 +8200,7 @@
                     <a:bodyPr/>
                     <a:lstStyle/>
                     <a:p>
-                      <a:pPr indent="0" marL="0">
+                      <a:pPr marL="0" indent="0">
                         <a:lnSpc>
                           <a:spcPts val="1960"/>
                         </a:lnSpc>
@@ -8375,7 +8224,7 @@
                       </a:endParaRPr>
                     </a:p>
                   </a:txBody>
-                  <a:tcPr marL="62230" marR="62230" marT="62230" marB="62230" anchor="t">
+                  <a:tcPr marL="62230" marR="62230" marT="62230" marB="62230">
                     <a:lnL w="12700" cap="flat" cmpd="sng" algn="ctr">
                       <a:solidFill>
                         <a:srgbClr val="BBC1C4"/>
@@ -8422,7 +8271,7 @@
                     <a:bodyPr/>
                     <a:lstStyle/>
                     <a:p>
-                      <a:pPr indent="0" marL="0">
+                      <a:pPr marL="0" indent="0">
                         <a:lnSpc>
                           <a:spcPts val="1960"/>
                         </a:lnSpc>
@@ -8446,7 +8295,7 @@
                       </a:endParaRPr>
                     </a:p>
                   </a:txBody>
-                  <a:tcPr marL="62230" marR="62230" marT="62230" marB="62230" anchor="t">
+                  <a:tcPr marL="62230" marR="62230" marT="62230" marB="62230">
                     <a:lnL w="12700" cap="flat" cmpd="sng" algn="ctr">
                       <a:solidFill>
                         <a:srgbClr val="C7C9CA"/>
@@ -8493,7 +8342,7 @@
                     <a:bodyPr/>
                     <a:lstStyle/>
                     <a:p>
-                      <a:pPr indent="0" marL="0">
+                      <a:pPr marL="0" indent="0">
                         <a:lnSpc>
                           <a:spcPts val="1960"/>
                         </a:lnSpc>
@@ -8517,7 +8366,7 @@
                       </a:endParaRPr>
                     </a:p>
                   </a:txBody>
-                  <a:tcPr marL="62230" marR="62230" marT="62230" marB="62230" anchor="t">
+                  <a:tcPr marL="62230" marR="62230" marT="62230" marB="62230">
                     <a:lnL w="12700" cap="flat" cmpd="sng" algn="ctr">
                       <a:solidFill>
                         <a:srgbClr val="C7C9CA"/>
@@ -8559,6 +8408,11 @@
                     </a:solidFill>
                   </a:tcPr>
                 </a:tc>
+                <a:extLst>
+                  <a:ext uri="{0D108BD9-81ED-4DB2-BD59-A6C34878D82A}">
+                    <a16:rowId xmlns:a16="http://schemas.microsoft.com/office/drawing/2014/main" val="10005"/>
+                  </a:ext>
+                </a:extLst>
               </a:tr>
               <a:tr h="385961">
                 <a:tc>
@@ -8566,7 +8420,7 @@
                     <a:bodyPr/>
                     <a:lstStyle/>
                     <a:p>
-                      <a:pPr indent="0" marL="0">
+                      <a:pPr marL="0" indent="0">
                         <a:lnSpc>
                           <a:spcPts val="1960"/>
                         </a:lnSpc>
@@ -8590,7 +8444,7 @@
                       </a:endParaRPr>
                     </a:p>
                   </a:txBody>
-                  <a:tcPr marL="62230" marR="62230" marT="62230" marB="62230" anchor="t">
+                  <a:tcPr marL="62230" marR="62230" marT="62230" marB="62230">
                     <a:lnL w="12700" cap="flat" cmpd="sng" algn="ctr">
                       <a:solidFill>
                         <a:srgbClr val="BBC1C4"/>
@@ -8634,7 +8488,7 @@
                     <a:bodyPr/>
                     <a:lstStyle/>
                     <a:p>
-                      <a:pPr indent="0" marL="0">
+                      <a:pPr marL="0" indent="0">
                         <a:lnSpc>
                           <a:spcPts val="1960"/>
                         </a:lnSpc>
@@ -8658,7 +8512,7 @@
                       </a:endParaRPr>
                     </a:p>
                   </a:txBody>
-                  <a:tcPr marL="62230" marR="62230" marT="62230" marB="62230" anchor="t">
+                  <a:tcPr marL="62230" marR="62230" marT="62230" marB="62230">
                     <a:lnL w="12700" cap="flat" cmpd="sng" algn="ctr">
                       <a:solidFill>
                         <a:srgbClr val="BBC1C4"/>
@@ -8702,7 +8556,7 @@
                     <a:bodyPr/>
                     <a:lstStyle/>
                     <a:p>
-                      <a:pPr indent="0" marL="0">
+                      <a:pPr marL="0" indent="0">
                         <a:lnSpc>
                           <a:spcPts val="1960"/>
                         </a:lnSpc>
@@ -8726,7 +8580,7 @@
                       </a:endParaRPr>
                     </a:p>
                   </a:txBody>
-                  <a:tcPr marL="62230" marR="62230" marT="62230" marB="62230" anchor="t">
+                  <a:tcPr marL="62230" marR="62230" marT="62230" marB="62230">
                     <a:lnL w="12700" cap="flat" cmpd="sng" algn="ctr">
                       <a:solidFill>
                         <a:srgbClr val="BBC1C4"/>
@@ -8765,6 +8619,11 @@
                     </a:lnB>
                   </a:tcPr>
                 </a:tc>
+                <a:extLst>
+                  <a:ext uri="{0D108BD9-81ED-4DB2-BD59-A6C34878D82A}">
+                    <a16:rowId xmlns:a16="http://schemas.microsoft.com/office/drawing/2014/main" val="10006"/>
+                  </a:ext>
+                </a:extLst>
               </a:tr>
               <a:tr h="385961">
                 <a:tc>
@@ -8772,7 +8631,7 @@
                     <a:bodyPr/>
                     <a:lstStyle/>
                     <a:p>
-                      <a:pPr indent="0" marL="0">
+                      <a:pPr marL="0" indent="0">
                         <a:lnSpc>
                           <a:spcPts val="1960"/>
                         </a:lnSpc>
@@ -8796,7 +8655,7 @@
                       </a:endParaRPr>
                     </a:p>
                   </a:txBody>
-                  <a:tcPr marL="62230" marR="62230" marT="62230" marB="62230" anchor="t">
+                  <a:tcPr marL="62230" marR="62230" marT="62230" marB="62230">
                     <a:lnL w="12700" cap="flat" cmpd="sng" algn="ctr">
                       <a:solidFill>
                         <a:srgbClr val="BBC1C4"/>
@@ -8843,7 +8702,7 @@
                     <a:bodyPr/>
                     <a:lstStyle/>
                     <a:p>
-                      <a:pPr indent="0" marL="0">
+                      <a:pPr marL="0" indent="0">
                         <a:lnSpc>
                           <a:spcPts val="1960"/>
                         </a:lnSpc>
@@ -8867,7 +8726,7 @@
                       </a:endParaRPr>
                     </a:p>
                   </a:txBody>
-                  <a:tcPr marL="62230" marR="62230" marT="62230" marB="62230" anchor="t">
+                  <a:tcPr marL="62230" marR="62230" marT="62230" marB="62230">
                     <a:lnL w="12700" cap="flat" cmpd="sng" algn="ctr">
                       <a:solidFill>
                         <a:srgbClr val="C7C9CA"/>
@@ -8914,7 +8773,7 @@
                     <a:bodyPr/>
                     <a:lstStyle/>
                     <a:p>
-                      <a:pPr indent="0" marL="0">
+                      <a:pPr marL="0" indent="0">
                         <a:lnSpc>
                           <a:spcPts val="1960"/>
                         </a:lnSpc>
@@ -8938,7 +8797,7 @@
                       </a:endParaRPr>
                     </a:p>
                   </a:txBody>
-                  <a:tcPr marL="62230" marR="62230" marT="62230" marB="62230" anchor="t">
+                  <a:tcPr marL="62230" marR="62230" marT="62230" marB="62230">
                     <a:lnL w="12700" cap="flat" cmpd="sng" algn="ctr">
                       <a:solidFill>
                         <a:srgbClr val="C7C9CA"/>
@@ -8980,6 +8839,11 @@
                     </a:solidFill>
                   </a:tcPr>
                 </a:tc>
+                <a:extLst>
+                  <a:ext uri="{0D108BD9-81ED-4DB2-BD59-A6C34878D82A}">
+                    <a16:rowId xmlns:a16="http://schemas.microsoft.com/office/drawing/2014/main" val="10007"/>
+                  </a:ext>
+                </a:extLst>
               </a:tr>
             </a:tbl>
           </a:graphicData>
@@ -9008,7 +8872,7 @@
           </a:bodyPr>
           <a:lstStyle/>
           <a:p>
-            <a:pPr algn="l" indent="0" marL="0">
+            <a:pPr marL="0" indent="0" algn="l">
               <a:lnSpc>
                 <a:spcPts val="2240"/>
               </a:lnSpc>
@@ -9052,7 +8916,7 @@
           </a:bodyPr>
           <a:lstStyle/>
           <a:p>
-            <a:pPr algn="l" indent="0" marL="0">
+            <a:pPr marL="0" indent="0" algn="l">
               <a:lnSpc>
                 <a:spcPts val="1680"/>
               </a:lnSpc>
@@ -9096,7 +8960,7 @@
           </a:bodyPr>
           <a:lstStyle/>
           <a:p>
-            <a:pPr algn="r" indent="0" marL="0">
+            <a:pPr marL="0" indent="0" algn="r">
               <a:lnSpc>
                 <a:spcPts val="1680"/>
               </a:lnSpc>
@@ -9133,6 +8997,7 @@
         <a:solidFill>
           <a:srgbClr val="EAF2F6"/>
         </a:solidFill>
+        <a:effectLst/>
       </p:bgPr>
     </p:bg>
     <p:spTree>
@@ -9152,7 +9017,9 @@
       <p:sp>
         <p:nvSpPr>
           <p:cNvPr id="2" name="Text 0"/>
-          <p:cNvSpPr/>
+          <p:cNvSpPr>
+            <a:spLocks noGrp="1"/>
+          </p:cNvSpPr>
           <p:nvPr>
             <p:ph type="title"/>
           </p:nvPr>
@@ -9174,7 +9041,7 @@
           </a:bodyPr>
           <a:lstStyle/>
           <a:p>
-            <a:pPr algn="l" indent="0" marL="0">
+            <a:pPr marL="0" indent="0" algn="l">
               <a:lnSpc>
                 <a:spcPts val="3923"/>
               </a:lnSpc>
@@ -9211,16 +9078,34 @@
         </p:nvGraphicFramePr>
         <p:xfrm>
           <a:off x="825500" y="1574998"/>
-          <a:ext cx="10553700" cy="3802856"/>
+          <a:ext cx="10553700" cy="3802852"/>
         </p:xfrm>
         <a:graphic>
           <a:graphicData uri="http://schemas.openxmlformats.org/drawingml/2006/table">
             <a:tbl>
               <a:tblPr/>
               <a:tblGrid>
-                <a:gridCol w="5487924"/>
-                <a:gridCol w="2955036"/>
-                <a:gridCol w="2110740"/>
+                <a:gridCol w="5487924">
+                  <a:extLst>
+                    <a:ext uri="{9D8B030D-6E8A-4147-A177-3AD203B41FA5}">
+                      <a16:colId xmlns:a16="http://schemas.microsoft.com/office/drawing/2014/main" val="20000"/>
+                    </a:ext>
+                  </a:extLst>
+                </a:gridCol>
+                <a:gridCol w="2955036">
+                  <a:extLst>
+                    <a:ext uri="{9D8B030D-6E8A-4147-A177-3AD203B41FA5}">
+                      <a16:colId xmlns:a16="http://schemas.microsoft.com/office/drawing/2014/main" val="20001"/>
+                    </a:ext>
+                  </a:extLst>
+                </a:gridCol>
+                <a:gridCol w="2110740">
+                  <a:extLst>
+                    <a:ext uri="{9D8B030D-6E8A-4147-A177-3AD203B41FA5}">
+                      <a16:colId xmlns:a16="http://schemas.microsoft.com/office/drawing/2014/main" val="20002"/>
+                    </a:ext>
+                  </a:extLst>
+                </a:gridCol>
               </a:tblGrid>
               <a:tr h="380206">
                 <a:tc>
@@ -9228,7 +9113,7 @@
                     <a:bodyPr/>
                     <a:lstStyle/>
                     <a:p>
-                      <a:pPr indent="0" marL="0">
+                      <a:pPr marL="0" indent="0">
                         <a:lnSpc>
                           <a:spcPts val="1929"/>
                         </a:lnSpc>
@@ -9252,7 +9137,7 @@
                       </a:endParaRPr>
                     </a:p>
                   </a:txBody>
-                  <a:tcPr marL="61258" marR="61258" marT="61258" marB="61258" anchor="t">
+                  <a:tcPr marL="61258" marR="61258" marT="61258" marB="61258">
                     <a:lnL w="12700" cap="flat" cmpd="sng" algn="ctr">
                       <a:solidFill>
                         <a:srgbClr val="BBC1C4"/>
@@ -9299,7 +9184,7 @@
                     <a:bodyPr/>
                     <a:lstStyle/>
                     <a:p>
-                      <a:pPr indent="0" marL="0">
+                      <a:pPr marL="0" indent="0">
                         <a:lnSpc>
                           <a:spcPts val="1929"/>
                         </a:lnSpc>
@@ -9323,7 +9208,7 @@
                       </a:endParaRPr>
                     </a:p>
                   </a:txBody>
-                  <a:tcPr marL="61258" marR="61258" marT="61258" marB="61258" anchor="t">
+                  <a:tcPr marL="61258" marR="61258" marT="61258" marB="61258">
                     <a:lnL w="12700" cap="flat" cmpd="sng" algn="ctr">
                       <a:solidFill>
                         <a:srgbClr val="094B6A"/>
@@ -9370,7 +9255,7 @@
                     <a:bodyPr/>
                     <a:lstStyle/>
                     <a:p>
-                      <a:pPr indent="0" marL="0">
+                      <a:pPr marL="0" indent="0">
                         <a:lnSpc>
                           <a:spcPts val="1929"/>
                         </a:lnSpc>
@@ -9394,7 +9279,7 @@
                       </a:endParaRPr>
                     </a:p>
                   </a:txBody>
-                  <a:tcPr marL="61258" marR="61258" marT="61258" marB="61258" anchor="t">
+                  <a:tcPr marL="61258" marR="61258" marT="61258" marB="61258">
                     <a:lnL w="12700" cap="flat" cmpd="sng" algn="ctr">
                       <a:solidFill>
                         <a:srgbClr val="094B6A"/>
@@ -9436,6 +9321,11 @@
                     </a:solidFill>
                   </a:tcPr>
                 </a:tc>
+                <a:extLst>
+                  <a:ext uri="{0D108BD9-81ED-4DB2-BD59-A6C34878D82A}">
+                    <a16:rowId xmlns:a16="http://schemas.microsoft.com/office/drawing/2014/main" val="10000"/>
+                  </a:ext>
+                </a:extLst>
               </a:tr>
               <a:tr h="380206">
                 <a:tc>
@@ -9443,7 +9333,7 @@
                     <a:bodyPr/>
                     <a:lstStyle/>
                     <a:p>
-                      <a:pPr indent="0" marL="0">
+                      <a:pPr marL="0" indent="0">
                         <a:lnSpc>
                           <a:spcPts val="1929"/>
                         </a:lnSpc>
@@ -9467,7 +9357,7 @@
                       </a:endParaRPr>
                     </a:p>
                   </a:txBody>
-                  <a:tcPr marL="61258" marR="61258" marT="61258" marB="61258" anchor="t">
+                  <a:tcPr marL="61258" marR="61258" marT="61258" marB="61258">
                     <a:lnL w="12700" cap="flat" cmpd="sng" algn="ctr">
                       <a:solidFill>
                         <a:srgbClr val="BBC1C4"/>
@@ -9514,7 +9404,7 @@
                     <a:bodyPr/>
                     <a:lstStyle/>
                     <a:p>
-                      <a:pPr indent="0" marL="0">
+                      <a:pPr marL="0" indent="0">
                         <a:lnSpc>
                           <a:spcPts val="1929"/>
                         </a:lnSpc>
@@ -9538,7 +9428,7 @@
                       </a:endParaRPr>
                     </a:p>
                   </a:txBody>
-                  <a:tcPr marL="61258" marR="61258" marT="61258" marB="61258" anchor="t">
+                  <a:tcPr marL="61258" marR="61258" marT="61258" marB="61258">
                     <a:lnL w="12700" cap="flat" cmpd="sng" algn="ctr">
                       <a:solidFill>
                         <a:srgbClr val="C7C9CA"/>
@@ -9585,7 +9475,7 @@
                     <a:bodyPr/>
                     <a:lstStyle/>
                     <a:p>
-                      <a:pPr indent="0" marL="0">
+                      <a:pPr marL="0" indent="0">
                         <a:lnSpc>
                           <a:spcPts val="1929"/>
                         </a:lnSpc>
@@ -9609,7 +9499,7 @@
                       </a:endParaRPr>
                     </a:p>
                   </a:txBody>
-                  <a:tcPr marL="61258" marR="61258" marT="61258" marB="61258" anchor="t">
+                  <a:tcPr marL="61258" marR="61258" marT="61258" marB="61258">
                     <a:lnL w="12700" cap="flat" cmpd="sng" algn="ctr">
                       <a:solidFill>
                         <a:srgbClr val="C7C9CA"/>
@@ -9651,6 +9541,11 @@
                     </a:solidFill>
                   </a:tcPr>
                 </a:tc>
+                <a:extLst>
+                  <a:ext uri="{0D108BD9-81ED-4DB2-BD59-A6C34878D82A}">
+                    <a16:rowId xmlns:a16="http://schemas.microsoft.com/office/drawing/2014/main" val="10001"/>
+                  </a:ext>
+                </a:extLst>
               </a:tr>
               <a:tr h="380305">
                 <a:tc>
@@ -9658,7 +9553,7 @@
                     <a:bodyPr/>
                     <a:lstStyle/>
                     <a:p>
-                      <a:pPr indent="0" marL="0">
+                      <a:pPr marL="0" indent="0">
                         <a:lnSpc>
                           <a:spcPts val="1929"/>
                         </a:lnSpc>
@@ -9682,7 +9577,7 @@
                       </a:endParaRPr>
                     </a:p>
                   </a:txBody>
-                  <a:tcPr marL="61258" marR="61258" marT="61258" marB="61258" anchor="t">
+                  <a:tcPr marL="61258" marR="61258" marT="61258" marB="61258">
                     <a:lnL w="12700" cap="flat" cmpd="sng" algn="ctr">
                       <a:solidFill>
                         <a:srgbClr val="BBC1C4"/>
@@ -9726,7 +9621,7 @@
                     <a:bodyPr/>
                     <a:lstStyle/>
                     <a:p>
-                      <a:pPr indent="0" marL="0">
+                      <a:pPr marL="0" indent="0">
                         <a:lnSpc>
                           <a:spcPts val="1929"/>
                         </a:lnSpc>
@@ -9750,7 +9645,7 @@
                       </a:endParaRPr>
                     </a:p>
                   </a:txBody>
-                  <a:tcPr marL="61258" marR="61258" marT="61258" marB="61258" anchor="t">
+                  <a:tcPr marL="61258" marR="61258" marT="61258" marB="61258">
                     <a:lnL w="12700" cap="flat" cmpd="sng" algn="ctr">
                       <a:solidFill>
                         <a:srgbClr val="BBC1C4"/>
@@ -9794,7 +9689,7 @@
                     <a:bodyPr/>
                     <a:lstStyle/>
                     <a:p>
-                      <a:pPr indent="0" marL="0">
+                      <a:pPr marL="0" indent="0">
                         <a:lnSpc>
                           <a:spcPts val="1929"/>
                         </a:lnSpc>
@@ -9818,7 +9713,7 @@
                       </a:endParaRPr>
                     </a:p>
                   </a:txBody>
-                  <a:tcPr marL="61258" marR="61258" marT="61258" marB="61258" anchor="t">
+                  <a:tcPr marL="61258" marR="61258" marT="61258" marB="61258">
                     <a:lnL w="12700" cap="flat" cmpd="sng" algn="ctr">
                       <a:solidFill>
                         <a:srgbClr val="BBC1C4"/>
@@ -9857,6 +9752,11 @@
                     </a:lnB>
                   </a:tcPr>
                 </a:tc>
+                <a:extLst>
+                  <a:ext uri="{0D108BD9-81ED-4DB2-BD59-A6C34878D82A}">
+                    <a16:rowId xmlns:a16="http://schemas.microsoft.com/office/drawing/2014/main" val="10002"/>
+                  </a:ext>
+                </a:extLst>
               </a:tr>
               <a:tr h="380305">
                 <a:tc>
@@ -9864,7 +9764,7 @@
                     <a:bodyPr/>
                     <a:lstStyle/>
                     <a:p>
-                      <a:pPr indent="0" marL="0">
+                      <a:pPr marL="0" indent="0">
                         <a:lnSpc>
                           <a:spcPts val="1929"/>
                         </a:lnSpc>
@@ -9888,7 +9788,7 @@
                       </a:endParaRPr>
                     </a:p>
                   </a:txBody>
-                  <a:tcPr marL="61258" marR="61258" marT="61258" marB="61258" anchor="t">
+                  <a:tcPr marL="61258" marR="61258" marT="61258" marB="61258">
                     <a:lnL w="12700" cap="flat" cmpd="sng" algn="ctr">
                       <a:solidFill>
                         <a:srgbClr val="BBC1C4"/>
@@ -9935,7 +9835,7 @@
                     <a:bodyPr/>
                     <a:lstStyle/>
                     <a:p>
-                      <a:pPr indent="0" marL="0">
+                      <a:pPr marL="0" indent="0">
                         <a:lnSpc>
                           <a:spcPts val="1929"/>
                         </a:lnSpc>
@@ -9959,7 +9859,7 @@
                       </a:endParaRPr>
                     </a:p>
                   </a:txBody>
-                  <a:tcPr marL="61258" marR="61258" marT="61258" marB="61258" anchor="t">
+                  <a:tcPr marL="61258" marR="61258" marT="61258" marB="61258">
                     <a:lnL w="12700" cap="flat" cmpd="sng" algn="ctr">
                       <a:solidFill>
                         <a:srgbClr val="C7C9CA"/>
@@ -10006,7 +9906,7 @@
                     <a:bodyPr/>
                     <a:lstStyle/>
                     <a:p>
-                      <a:pPr indent="0" marL="0">
+                      <a:pPr marL="0" indent="0">
                         <a:lnSpc>
                           <a:spcPts val="1929"/>
                         </a:lnSpc>
@@ -10030,7 +9930,7 @@
                       </a:endParaRPr>
                     </a:p>
                   </a:txBody>
-                  <a:tcPr marL="61258" marR="61258" marT="61258" marB="61258" anchor="t">
+                  <a:tcPr marL="61258" marR="61258" marT="61258" marB="61258">
                     <a:lnL w="12700" cap="flat" cmpd="sng" algn="ctr">
                       <a:solidFill>
                         <a:srgbClr val="C7C9CA"/>
@@ -10072,6 +9972,11 @@
                     </a:solidFill>
                   </a:tcPr>
                 </a:tc>
+                <a:extLst>
+                  <a:ext uri="{0D108BD9-81ED-4DB2-BD59-A6C34878D82A}">
+                    <a16:rowId xmlns:a16="http://schemas.microsoft.com/office/drawing/2014/main" val="10003"/>
+                  </a:ext>
+                </a:extLst>
               </a:tr>
               <a:tr h="380305">
                 <a:tc>
@@ -10079,7 +9984,7 @@
                     <a:bodyPr/>
                     <a:lstStyle/>
                     <a:p>
-                      <a:pPr indent="0" marL="0">
+                      <a:pPr marL="0" indent="0">
                         <a:lnSpc>
                           <a:spcPts val="1929"/>
                         </a:lnSpc>
@@ -10103,7 +10008,7 @@
                       </a:endParaRPr>
                     </a:p>
                   </a:txBody>
-                  <a:tcPr marL="61258" marR="61258" marT="61258" marB="61258" anchor="t">
+                  <a:tcPr marL="61258" marR="61258" marT="61258" marB="61258">
                     <a:lnL w="12700" cap="flat" cmpd="sng" algn="ctr">
                       <a:solidFill>
                         <a:srgbClr val="BBC1C4"/>
@@ -10147,7 +10052,7 @@
                     <a:bodyPr/>
                     <a:lstStyle/>
                     <a:p>
-                      <a:pPr indent="0" marL="0">
+                      <a:pPr marL="0" indent="0">
                         <a:lnSpc>
                           <a:spcPts val="1929"/>
                         </a:lnSpc>
@@ -10171,7 +10076,7 @@
                       </a:endParaRPr>
                     </a:p>
                   </a:txBody>
-                  <a:tcPr marL="61258" marR="61258" marT="61258" marB="61258" anchor="t">
+                  <a:tcPr marL="61258" marR="61258" marT="61258" marB="61258">
                     <a:lnL w="12700" cap="flat" cmpd="sng" algn="ctr">
                       <a:solidFill>
                         <a:srgbClr val="BBC1C4"/>
@@ -10215,7 +10120,7 @@
                     <a:bodyPr/>
                     <a:lstStyle/>
                     <a:p>
-                      <a:pPr indent="0" marL="0">
+                      <a:pPr marL="0" indent="0">
                         <a:lnSpc>
                           <a:spcPts val="1929"/>
                         </a:lnSpc>
@@ -10239,7 +10144,7 @@
                       </a:endParaRPr>
                     </a:p>
                   </a:txBody>
-                  <a:tcPr marL="61258" marR="61258" marT="61258" marB="61258" anchor="t">
+                  <a:tcPr marL="61258" marR="61258" marT="61258" marB="61258">
                     <a:lnL w="12700" cap="flat" cmpd="sng" algn="ctr">
                       <a:solidFill>
                         <a:srgbClr val="BBC1C4"/>
@@ -10278,6 +10183,11 @@
                     </a:lnB>
                   </a:tcPr>
                 </a:tc>
+                <a:extLst>
+                  <a:ext uri="{0D108BD9-81ED-4DB2-BD59-A6C34878D82A}">
+                    <a16:rowId xmlns:a16="http://schemas.microsoft.com/office/drawing/2014/main" val="10004"/>
+                  </a:ext>
+                </a:extLst>
               </a:tr>
               <a:tr h="380305">
                 <a:tc>
@@ -10285,7 +10195,7 @@
                     <a:bodyPr/>
                     <a:lstStyle/>
                     <a:p>
-                      <a:pPr indent="0" marL="0">
+                      <a:pPr marL="0" indent="0">
                         <a:lnSpc>
                           <a:spcPts val="1929"/>
                         </a:lnSpc>
@@ -10309,7 +10219,7 @@
                       </a:endParaRPr>
                     </a:p>
                   </a:txBody>
-                  <a:tcPr marL="61258" marR="61258" marT="61258" marB="61258" anchor="t">
+                  <a:tcPr marL="61258" marR="61258" marT="61258" marB="61258">
                     <a:lnL w="12700" cap="flat" cmpd="sng" algn="ctr">
                       <a:solidFill>
                         <a:srgbClr val="BBC1C4"/>
@@ -10356,7 +10266,7 @@
                     <a:bodyPr/>
                     <a:lstStyle/>
                     <a:p>
-                      <a:pPr indent="0" marL="0">
+                      <a:pPr marL="0" indent="0">
                         <a:lnSpc>
                           <a:spcPts val="1929"/>
                         </a:lnSpc>
@@ -10380,7 +10290,7 @@
                       </a:endParaRPr>
                     </a:p>
                   </a:txBody>
-                  <a:tcPr marL="61258" marR="61258" marT="61258" marB="61258" anchor="t">
+                  <a:tcPr marL="61258" marR="61258" marT="61258" marB="61258">
                     <a:lnL w="12700" cap="flat" cmpd="sng" algn="ctr">
                       <a:solidFill>
                         <a:srgbClr val="C7C9CA"/>
@@ -10427,7 +10337,7 @@
                     <a:bodyPr/>
                     <a:lstStyle/>
                     <a:p>
-                      <a:pPr indent="0" marL="0">
+                      <a:pPr marL="0" indent="0">
                         <a:lnSpc>
                           <a:spcPts val="1929"/>
                         </a:lnSpc>
@@ -10451,7 +10361,7 @@
                       </a:endParaRPr>
                     </a:p>
                   </a:txBody>
-                  <a:tcPr marL="61258" marR="61258" marT="61258" marB="61258" anchor="t">
+                  <a:tcPr marL="61258" marR="61258" marT="61258" marB="61258">
                     <a:lnL w="12700" cap="flat" cmpd="sng" algn="ctr">
                       <a:solidFill>
                         <a:srgbClr val="C7C9CA"/>
@@ -10493,6 +10403,11 @@
                     </a:solidFill>
                   </a:tcPr>
                 </a:tc>
+                <a:extLst>
+                  <a:ext uri="{0D108BD9-81ED-4DB2-BD59-A6C34878D82A}">
+                    <a16:rowId xmlns:a16="http://schemas.microsoft.com/office/drawing/2014/main" val="10005"/>
+                  </a:ext>
+                </a:extLst>
               </a:tr>
               <a:tr h="380305">
                 <a:tc>
@@ -10500,7 +10415,7 @@
                     <a:bodyPr/>
                     <a:lstStyle/>
                     <a:p>
-                      <a:pPr indent="0" marL="0">
+                      <a:pPr marL="0" indent="0">
                         <a:lnSpc>
                           <a:spcPts val="1929"/>
                         </a:lnSpc>
@@ -10524,7 +10439,7 @@
                       </a:endParaRPr>
                     </a:p>
                   </a:txBody>
-                  <a:tcPr marL="61258" marR="61258" marT="61258" marB="61258" anchor="t">
+                  <a:tcPr marL="61258" marR="61258" marT="61258" marB="61258">
                     <a:lnL w="12700" cap="flat" cmpd="sng" algn="ctr">
                       <a:solidFill>
                         <a:srgbClr val="BBC1C4"/>
@@ -10568,7 +10483,7 @@
                     <a:bodyPr/>
                     <a:lstStyle/>
                     <a:p>
-                      <a:pPr indent="0" marL="0">
+                      <a:pPr marL="0" indent="0">
                         <a:lnSpc>
                           <a:spcPts val="1929"/>
                         </a:lnSpc>
@@ -10592,7 +10507,7 @@
                       </a:endParaRPr>
                     </a:p>
                   </a:txBody>
-                  <a:tcPr marL="61258" marR="61258" marT="61258" marB="61258" anchor="t">
+                  <a:tcPr marL="61258" marR="61258" marT="61258" marB="61258">
                     <a:lnL w="12700" cap="flat" cmpd="sng" algn="ctr">
                       <a:solidFill>
                         <a:srgbClr val="BBC1C4"/>
@@ -10636,7 +10551,7 @@
                     <a:bodyPr/>
                     <a:lstStyle/>
                     <a:p>
-                      <a:pPr indent="0" marL="0">
+                      <a:pPr marL="0" indent="0">
                         <a:lnSpc>
                           <a:spcPts val="1929"/>
                         </a:lnSpc>
@@ -10660,7 +10575,7 @@
                       </a:endParaRPr>
                     </a:p>
                   </a:txBody>
-                  <a:tcPr marL="61258" marR="61258" marT="61258" marB="61258" anchor="t">
+                  <a:tcPr marL="61258" marR="61258" marT="61258" marB="61258">
                     <a:lnL w="12700" cap="flat" cmpd="sng" algn="ctr">
                       <a:solidFill>
                         <a:srgbClr val="BBC1C4"/>
@@ -10699,6 +10614,11 @@
                     </a:lnB>
                   </a:tcPr>
                 </a:tc>
+                <a:extLst>
+                  <a:ext uri="{0D108BD9-81ED-4DB2-BD59-A6C34878D82A}">
+                    <a16:rowId xmlns:a16="http://schemas.microsoft.com/office/drawing/2014/main" val="10006"/>
+                  </a:ext>
+                </a:extLst>
               </a:tr>
               <a:tr h="380305">
                 <a:tc>
@@ -10706,7 +10626,7 @@
                     <a:bodyPr/>
                     <a:lstStyle/>
                     <a:p>
-                      <a:pPr indent="0" marL="0">
+                      <a:pPr marL="0" indent="0">
                         <a:lnSpc>
                           <a:spcPts val="1929"/>
                         </a:lnSpc>
@@ -10730,7 +10650,7 @@
                       </a:endParaRPr>
                     </a:p>
                   </a:txBody>
-                  <a:tcPr marL="61258" marR="61258" marT="61258" marB="61258" anchor="t">
+                  <a:tcPr marL="61258" marR="61258" marT="61258" marB="61258">
                     <a:lnL w="12700" cap="flat" cmpd="sng" algn="ctr">
                       <a:solidFill>
                         <a:srgbClr val="BBC1C4"/>
@@ -10777,7 +10697,7 @@
                     <a:bodyPr/>
                     <a:lstStyle/>
                     <a:p>
-                      <a:pPr indent="0" marL="0">
+                      <a:pPr marL="0" indent="0">
                         <a:lnSpc>
                           <a:spcPts val="1929"/>
                         </a:lnSpc>
@@ -10801,7 +10721,7 @@
                       </a:endParaRPr>
                     </a:p>
                   </a:txBody>
-                  <a:tcPr marL="61258" marR="61258" marT="61258" marB="61258" anchor="t">
+                  <a:tcPr marL="61258" marR="61258" marT="61258" marB="61258">
                     <a:lnL w="12700" cap="flat" cmpd="sng" algn="ctr">
                       <a:solidFill>
                         <a:srgbClr val="C7C9CA"/>
@@ -10848,7 +10768,7 @@
                     <a:bodyPr/>
                     <a:lstStyle/>
                     <a:p>
-                      <a:pPr indent="0" marL="0">
+                      <a:pPr marL="0" indent="0">
                         <a:lnSpc>
                           <a:spcPts val="1929"/>
                         </a:lnSpc>
@@ -10872,7 +10792,7 @@
                       </a:endParaRPr>
                     </a:p>
                   </a:txBody>
-                  <a:tcPr marL="61258" marR="61258" marT="61258" marB="61258" anchor="t">
+                  <a:tcPr marL="61258" marR="61258" marT="61258" marB="61258">
                     <a:lnL w="12700" cap="flat" cmpd="sng" algn="ctr">
                       <a:solidFill>
                         <a:srgbClr val="C7C9CA"/>
@@ -10914,6 +10834,11 @@
                     </a:solidFill>
                   </a:tcPr>
                 </a:tc>
+                <a:extLst>
+                  <a:ext uri="{0D108BD9-81ED-4DB2-BD59-A6C34878D82A}">
+                    <a16:rowId xmlns:a16="http://schemas.microsoft.com/office/drawing/2014/main" val="10007"/>
+                  </a:ext>
+                </a:extLst>
               </a:tr>
               <a:tr h="380305">
                 <a:tc>
@@ -10921,7 +10846,7 @@
                     <a:bodyPr/>
                     <a:lstStyle/>
                     <a:p>
-                      <a:pPr indent="0" marL="0">
+                      <a:pPr marL="0" indent="0">
                         <a:lnSpc>
                           <a:spcPts val="1929"/>
                         </a:lnSpc>
@@ -10945,7 +10870,7 @@
                       </a:endParaRPr>
                     </a:p>
                   </a:txBody>
-                  <a:tcPr marL="61258" marR="61258" marT="61258" marB="61258" anchor="t">
+                  <a:tcPr marL="61258" marR="61258" marT="61258" marB="61258">
                     <a:lnL w="12700" cap="flat" cmpd="sng" algn="ctr">
                       <a:solidFill>
                         <a:srgbClr val="BBC1C4"/>
@@ -10989,7 +10914,7 @@
                     <a:bodyPr/>
                     <a:lstStyle/>
                     <a:p>
-                      <a:pPr indent="0" marL="0">
+                      <a:pPr marL="0" indent="0">
                         <a:lnSpc>
                           <a:spcPts val="1929"/>
                         </a:lnSpc>
@@ -11013,7 +10938,7 @@
                       </a:endParaRPr>
                     </a:p>
                   </a:txBody>
-                  <a:tcPr marL="61258" marR="61258" marT="61258" marB="61258" anchor="t">
+                  <a:tcPr marL="61258" marR="61258" marT="61258" marB="61258">
                     <a:lnL w="12700" cap="flat" cmpd="sng" algn="ctr">
                       <a:solidFill>
                         <a:srgbClr val="BBC1C4"/>
@@ -11057,7 +10982,7 @@
                     <a:bodyPr/>
                     <a:lstStyle/>
                     <a:p>
-                      <a:pPr indent="0" marL="0">
+                      <a:pPr marL="0" indent="0">
                         <a:lnSpc>
                           <a:spcPts val="1929"/>
                         </a:lnSpc>
@@ -11081,7 +11006,7 @@
                       </a:endParaRPr>
                     </a:p>
                   </a:txBody>
-                  <a:tcPr marL="61258" marR="61258" marT="61258" marB="61258" anchor="t">
+                  <a:tcPr marL="61258" marR="61258" marT="61258" marB="61258">
                     <a:lnL w="12700" cap="flat" cmpd="sng" algn="ctr">
                       <a:solidFill>
                         <a:srgbClr val="BBC1C4"/>
@@ -11120,6 +11045,11 @@
                     </a:lnB>
                   </a:tcPr>
                 </a:tc>
+                <a:extLst>
+                  <a:ext uri="{0D108BD9-81ED-4DB2-BD59-A6C34878D82A}">
+                    <a16:rowId xmlns:a16="http://schemas.microsoft.com/office/drawing/2014/main" val="10008"/>
+                  </a:ext>
+                </a:extLst>
               </a:tr>
               <a:tr h="380305">
                 <a:tc>
@@ -11127,7 +11057,7 @@
                     <a:bodyPr/>
                     <a:lstStyle/>
                     <a:p>
-                      <a:pPr indent="0" marL="0">
+                      <a:pPr marL="0" indent="0">
                         <a:lnSpc>
                           <a:spcPts val="1929"/>
                         </a:lnSpc>
@@ -11151,7 +11081,7 @@
                       </a:endParaRPr>
                     </a:p>
                   </a:txBody>
-                  <a:tcPr marL="61258" marR="61258" marT="61258" marB="61258" anchor="t">
+                  <a:tcPr marL="61258" marR="61258" marT="61258" marB="61258">
                     <a:lnL w="12700" cap="flat" cmpd="sng" algn="ctr">
                       <a:solidFill>
                         <a:srgbClr val="BBC1C4"/>
@@ -11198,7 +11128,7 @@
                     <a:bodyPr/>
                     <a:lstStyle/>
                     <a:p>
-                      <a:pPr indent="0" marL="0">
+                      <a:pPr marL="0" indent="0">
                         <a:lnSpc>
                           <a:spcPts val="1929"/>
                         </a:lnSpc>
@@ -11222,7 +11152,7 @@
                       </a:endParaRPr>
                     </a:p>
                   </a:txBody>
-                  <a:tcPr marL="61258" marR="61258" marT="61258" marB="61258" anchor="t">
+                  <a:tcPr marL="61258" marR="61258" marT="61258" marB="61258">
                     <a:lnL w="12700" cap="flat" cmpd="sng" algn="ctr">
                       <a:solidFill>
                         <a:srgbClr val="C7C9CA"/>
@@ -11269,7 +11199,7 @@
                     <a:bodyPr/>
                     <a:lstStyle/>
                     <a:p>
-                      <a:pPr indent="0" marL="0">
+                      <a:pPr marL="0" indent="0">
                         <a:lnSpc>
                           <a:spcPts val="1929"/>
                         </a:lnSpc>
@@ -11293,7 +11223,7 @@
                       </a:endParaRPr>
                     </a:p>
                   </a:txBody>
-                  <a:tcPr marL="61258" marR="61258" marT="61258" marB="61258" anchor="t">
+                  <a:tcPr marL="61258" marR="61258" marT="61258" marB="61258">
                     <a:lnL w="12700" cap="flat" cmpd="sng" algn="ctr">
                       <a:solidFill>
                         <a:srgbClr val="C7C9CA"/>
@@ -11335,6 +11265,11 @@
                     </a:solidFill>
                   </a:tcPr>
                 </a:tc>
+                <a:extLst>
+                  <a:ext uri="{0D108BD9-81ED-4DB2-BD59-A6C34878D82A}">
+                    <a16:rowId xmlns:a16="http://schemas.microsoft.com/office/drawing/2014/main" val="10009"/>
+                  </a:ext>
+                </a:extLst>
               </a:tr>
             </a:tbl>
           </a:graphicData>
@@ -11363,7 +11298,7 @@
           </a:bodyPr>
           <a:lstStyle/>
           <a:p>
-            <a:pPr algn="l" indent="0" marL="0">
+            <a:pPr marL="0" indent="0" algn="l">
               <a:lnSpc>
                 <a:spcPts val="1675"/>
               </a:lnSpc>
@@ -11407,7 +11342,7 @@
           </a:bodyPr>
           <a:lstStyle/>
           <a:p>
-            <a:pPr algn="l" indent="0" marL="0">
+            <a:pPr marL="0" indent="0" algn="l">
               <a:lnSpc>
                 <a:spcPts val="1680"/>
               </a:lnSpc>
@@ -11451,7 +11386,7 @@
           </a:bodyPr>
           <a:lstStyle/>
           <a:p>
-            <a:pPr algn="r" indent="0" marL="0">
+            <a:pPr marL="0" indent="0" algn="r">
               <a:lnSpc>
                 <a:spcPts val="1680"/>
               </a:lnSpc>
@@ -11488,6 +11423,7 @@
         <a:solidFill>
           <a:srgbClr val="EAF2F6"/>
         </a:solidFill>
+        <a:effectLst/>
       </p:bgPr>
     </p:bg>
     <p:spTree>
@@ -11507,7 +11443,9 @@
       <p:sp>
         <p:nvSpPr>
           <p:cNvPr id="2" name="Text 0"/>
-          <p:cNvSpPr/>
+          <p:cNvSpPr>
+            <a:spLocks noGrp="1"/>
+          </p:cNvSpPr>
           <p:nvPr>
             <p:ph type="title"/>
           </p:nvPr>
@@ -11529,7 +11467,7 @@
           </a:bodyPr>
           <a:lstStyle/>
           <a:p>
-            <a:pPr algn="l" indent="0" marL="0">
+            <a:pPr marL="0" indent="0" algn="l">
               <a:lnSpc>
                 <a:spcPts val="3960"/>
               </a:lnSpc>
@@ -11595,7 +11533,7 @@
           </a:bodyPr>
           <a:lstStyle/>
           <a:p>
-            <a:pPr algn="l" indent="0" marL="0">
+            <a:pPr marL="0" indent="0" algn="l">
               <a:lnSpc>
                 <a:spcPts val="2640"/>
               </a:lnSpc>
@@ -11639,7 +11577,7 @@
           </a:bodyPr>
           <a:lstStyle/>
           <a:p>
-            <a:pPr algn="l" indent="0" marL="0">
+            <a:pPr marL="0" indent="0" algn="l">
               <a:lnSpc>
                 <a:spcPts val="2240"/>
               </a:lnSpc>
@@ -11662,15 +11600,15 @@
       </p:sp>
       <p:pic>
         <p:nvPicPr>
-          <p:cNvPr id="6" name="Image 0" descr="arrow-right">    </p:cNvPr>
+          <p:cNvPr id="6" name="Image 0" descr="arrow-right"/>
           <p:cNvPicPr>
             <a:picLocks noChangeAspect="1"/>
           </p:cNvPicPr>
           <p:nvPr/>
         </p:nvPicPr>
         <p:blipFill>
-          <a:blip r:embed="rId1"/>
-          <a:srcRect l="0" r="0" t="0" b="0"/>
+          <a:blip r:embed="rId3"/>
+          <a:srcRect/>
           <a:stretch/>
         </p:blipFill>
         <p:spPr>
@@ -11728,7 +11666,7 @@
           </a:bodyPr>
           <a:lstStyle/>
           <a:p>
-            <a:pPr algn="l" indent="0" marL="0">
+            <a:pPr marL="0" indent="0" algn="l">
               <a:lnSpc>
                 <a:spcPts val="2640"/>
               </a:lnSpc>
@@ -11772,7 +11710,7 @@
           </a:bodyPr>
           <a:lstStyle/>
           <a:p>
-            <a:pPr algn="l" indent="0" marL="0">
+            <a:pPr marL="0" indent="0" algn="l">
               <a:lnSpc>
                 <a:spcPts val="2240"/>
               </a:lnSpc>
@@ -11795,15 +11733,15 @@
       </p:sp>
       <p:pic>
         <p:nvPicPr>
-          <p:cNvPr id="10" name="Image 1" descr="arrow-right">    </p:cNvPr>
+          <p:cNvPr id="10" name="Image 1" descr="arrow-right"/>
           <p:cNvPicPr>
             <a:picLocks noChangeAspect="1"/>
           </p:cNvPicPr>
           <p:nvPr/>
         </p:nvPicPr>
         <p:blipFill>
-          <a:blip r:embed="rId2"/>
-          <a:srcRect l="0" r="0" t="0" b="0"/>
+          <a:blip r:embed="rId3"/>
+          <a:srcRect/>
           <a:stretch/>
         </p:blipFill>
         <p:spPr>
@@ -11861,7 +11799,7 @@
           </a:bodyPr>
           <a:lstStyle/>
           <a:p>
-            <a:pPr algn="l" indent="0" marL="0">
+            <a:pPr marL="0" indent="0" algn="l">
               <a:lnSpc>
                 <a:spcPts val="2640"/>
               </a:lnSpc>
@@ -11905,7 +11843,7 @@
           </a:bodyPr>
           <a:lstStyle/>
           <a:p>
-            <a:pPr algn="l" indent="0" marL="0">
+            <a:pPr marL="0" indent="0" algn="l">
               <a:lnSpc>
                 <a:spcPts val="2240"/>
               </a:lnSpc>
@@ -11949,7 +11887,7 @@
           </a:bodyPr>
           <a:lstStyle/>
           <a:p>
-            <a:pPr algn="l" indent="0" marL="0">
+            <a:pPr marL="0" indent="0" algn="l">
               <a:lnSpc>
                 <a:spcPts val="2240"/>
               </a:lnSpc>
@@ -12020,7 +11958,7 @@
           </a:bodyPr>
           <a:lstStyle/>
           <a:p>
-            <a:pPr algn="l" indent="0" marL="0">
+            <a:pPr marL="0" indent="0" algn="l">
               <a:lnSpc>
                 <a:spcPts val="2640"/>
               </a:lnSpc>
@@ -12064,7 +12002,7 @@
           </a:bodyPr>
           <a:lstStyle/>
           <a:p>
-            <a:pPr algn="l" indent="0" marL="0">
+            <a:pPr marL="0" indent="0" algn="l">
               <a:lnSpc>
                 <a:spcPts val="2240"/>
               </a:lnSpc>
@@ -12135,7 +12073,7 @@
           </a:bodyPr>
           <a:lstStyle/>
           <a:p>
-            <a:pPr algn="l" indent="0" marL="0">
+            <a:pPr marL="0" indent="0" algn="l">
               <a:lnSpc>
                 <a:spcPts val="2640"/>
               </a:lnSpc>
@@ -12179,7 +12117,7 @@
           </a:bodyPr>
           <a:lstStyle/>
           <a:p>
-            <a:pPr algn="l" indent="0" marL="0">
+            <a:pPr marL="0" indent="0" algn="l">
               <a:lnSpc>
                 <a:spcPts val="2240"/>
               </a:lnSpc>
@@ -12250,7 +12188,7 @@
           </a:bodyPr>
           <a:lstStyle/>
           <a:p>
-            <a:pPr algn="l" indent="0" marL="0">
+            <a:pPr marL="0" indent="0" algn="l">
               <a:lnSpc>
                 <a:spcPts val="2640"/>
               </a:lnSpc>
@@ -12294,7 +12232,7 @@
           </a:bodyPr>
           <a:lstStyle/>
           <a:p>
-            <a:pPr algn="l" indent="0" marL="0">
+            <a:pPr marL="0" indent="0" algn="l">
               <a:lnSpc>
                 <a:spcPts val="2240"/>
               </a:lnSpc>
@@ -12338,7 +12276,7 @@
           </a:bodyPr>
           <a:lstStyle/>
           <a:p>
-            <a:pPr algn="l" indent="0" marL="0">
+            <a:pPr marL="0" indent="0" algn="l">
               <a:lnSpc>
                 <a:spcPts val="2240"/>
               </a:lnSpc>
@@ -12382,7 +12320,7 @@
           </a:bodyPr>
           <a:lstStyle/>
           <a:p>
-            <a:pPr algn="l" indent="0" marL="0">
+            <a:pPr marL="0" indent="0" algn="l">
               <a:lnSpc>
                 <a:spcPts val="1680"/>
               </a:lnSpc>
@@ -12426,7 +12364,7 @@
           </a:bodyPr>
           <a:lstStyle/>
           <a:p>
-            <a:pPr algn="r" indent="0" marL="0">
+            <a:pPr marL="0" indent="0" algn="r">
               <a:lnSpc>
                 <a:spcPts val="1680"/>
               </a:lnSpc>
@@ -12463,6 +12401,7 @@
         <a:solidFill>
           <a:srgbClr val="EAF2F6"/>
         </a:solidFill>
+        <a:effectLst/>
       </p:bgPr>
     </p:bg>
     <p:spTree>
@@ -12482,7 +12421,9 @@
       <p:sp>
         <p:nvSpPr>
           <p:cNvPr id="2" name="Text 0"/>
-          <p:cNvSpPr/>
+          <p:cNvSpPr>
+            <a:spLocks noGrp="1"/>
+          </p:cNvSpPr>
           <p:nvPr>
             <p:ph type="title"/>
           </p:nvPr>
@@ -12504,7 +12445,7 @@
           </a:bodyPr>
           <a:lstStyle/>
           <a:p>
-            <a:pPr algn="l" indent="0" marL="0">
+            <a:pPr marL="0" indent="0" algn="l">
               <a:lnSpc>
                 <a:spcPts val="3960"/>
               </a:lnSpc>
@@ -12548,7 +12489,7 @@
           </a:bodyPr>
           <a:lstStyle/>
           <a:p>
-            <a:pPr algn="l" indent="0" marL="0">
+            <a:pPr marL="0" indent="0" algn="l">
               <a:lnSpc>
                 <a:spcPts val="1960"/>
               </a:lnSpc>
@@ -12615,15 +12556,15 @@
       </p:sp>
       <p:pic>
         <p:nvPicPr>
-          <p:cNvPr id="6" name="Image 0" descr="Logo de Jetpack Compose">    </p:cNvPr>
+          <p:cNvPr id="6" name="Image 0" descr="Logo de Jetpack Compose"/>
           <p:cNvPicPr>
             <a:picLocks noChangeAspect="1"/>
           </p:cNvPicPr>
           <p:nvPr/>
         </p:nvPicPr>
         <p:blipFill>
-          <a:blip r:embed="rId1"/>
-          <a:srcRect l="0" r="0" t="0" b="0"/>
+          <a:blip r:embed="rId3"/>
+          <a:srcRect/>
           <a:stretch/>
         </p:blipFill>
         <p:spPr>
@@ -12659,7 +12600,7 @@
           </a:bodyPr>
           <a:lstStyle/>
           <a:p>
-            <a:pPr algn="l" indent="0" marL="0">
+            <a:pPr marL="0" indent="0" algn="l">
               <a:lnSpc>
                 <a:spcPts val="1960"/>
               </a:lnSpc>
@@ -12726,15 +12667,15 @@
       </p:sp>
       <p:pic>
         <p:nvPicPr>
-          <p:cNvPr id="10" name="Image 1" descr="Logo de Material Design">    </p:cNvPr>
+          <p:cNvPr id="10" name="Image 1" descr="Logo de Material Design"/>
           <p:cNvPicPr>
             <a:picLocks noChangeAspect="1"/>
           </p:cNvPicPr>
           <p:nvPr/>
         </p:nvPicPr>
         <p:blipFill>
-          <a:blip r:embed="rId2"/>
-          <a:srcRect l="0" r="0" t="0" b="0"/>
+          <a:blip r:embed="rId4"/>
+          <a:srcRect/>
           <a:stretch/>
         </p:blipFill>
         <p:spPr>
@@ -12770,7 +12711,7 @@
           </a:bodyPr>
           <a:lstStyle/>
           <a:p>
-            <a:pPr algn="l" indent="0" marL="0">
+            <a:pPr marL="0" indent="0" algn="l">
               <a:lnSpc>
                 <a:spcPts val="1960"/>
               </a:lnSpc>
@@ -12837,7 +12778,7 @@
       </p:sp>
       <p:pic>
         <p:nvPicPr>
-          <p:cNvPr id="14" name="Image 2" descr="Logo de Jetpack Compose">    </p:cNvPr>
+          <p:cNvPr id="14" name="Image 2" descr="Logo de Jetpack Compose"/>
           <p:cNvPicPr>
             <a:picLocks noChangeAspect="1"/>
           </p:cNvPicPr>
@@ -12845,7 +12786,7 @@
         </p:nvPicPr>
         <p:blipFill>
           <a:blip r:embed="rId3"/>
-          <a:srcRect l="0" r="0" t="0" b="0"/>
+          <a:srcRect/>
           <a:stretch/>
         </p:blipFill>
         <p:spPr>
@@ -12881,7 +12822,7 @@
           </a:bodyPr>
           <a:lstStyle/>
           <a:p>
-            <a:pPr algn="l" indent="0" marL="0">
+            <a:pPr marL="0" indent="0" algn="l">
               <a:lnSpc>
                 <a:spcPts val="1960"/>
               </a:lnSpc>
@@ -12925,7 +12866,7 @@
           </a:bodyPr>
           <a:lstStyle/>
           <a:p>
-            <a:pPr algn="l" indent="0" marL="0">
+            <a:pPr marL="0" indent="0" algn="l">
               <a:lnSpc>
                 <a:spcPts val="1960"/>
               </a:lnSpc>
@@ -12992,15 +12933,15 @@
       </p:sp>
       <p:pic>
         <p:nvPicPr>
-          <p:cNvPr id="19" name="Image 3" descr="Logo de Kotlin">    </p:cNvPr>
+          <p:cNvPr id="19" name="Image 3" descr="Logo de Kotlin"/>
           <p:cNvPicPr>
             <a:picLocks noChangeAspect="1"/>
           </p:cNvPicPr>
           <p:nvPr/>
         </p:nvPicPr>
         <p:blipFill>
-          <a:blip r:embed="rId4"/>
-          <a:srcRect l="0" r="0" t="0" b="0"/>
+          <a:blip r:embed="rId5"/>
+          <a:srcRect/>
           <a:stretch/>
         </p:blipFill>
         <p:spPr>
@@ -13036,7 +12977,7 @@
           </a:bodyPr>
           <a:lstStyle/>
           <a:p>
-            <a:pPr algn="l" indent="0" marL="0">
+            <a:pPr marL="0" indent="0" algn="l">
               <a:lnSpc>
                 <a:spcPts val="1960"/>
               </a:lnSpc>
@@ -13084,7 +13025,7 @@
           </a:bodyPr>
           <a:lstStyle/>
           <a:p>
-            <a:pPr algn="ctr" indent="0" marL="0">
+            <a:pPr marL="0" indent="0" algn="ctr">
               <a:lnSpc>
                 <a:spcPts val="1960"/>
               </a:lnSpc>
@@ -13132,7 +13073,7 @@
           </a:bodyPr>
           <a:lstStyle/>
           <a:p>
-            <a:pPr algn="ctr" indent="0" marL="0">
+            <a:pPr marL="0" indent="0" algn="ctr">
               <a:lnSpc>
                 <a:spcPts val="1960"/>
               </a:lnSpc>
@@ -13180,7 +13121,7 @@
           </a:bodyPr>
           <a:lstStyle/>
           <a:p>
-            <a:pPr algn="ctr" indent="0" marL="0">
+            <a:pPr marL="0" indent="0" algn="ctr">
               <a:lnSpc>
                 <a:spcPts val="1960"/>
               </a:lnSpc>
@@ -13224,7 +13165,7 @@
           </a:bodyPr>
           <a:lstStyle/>
           <a:p>
-            <a:pPr algn="l" indent="0" marL="0">
+            <a:pPr marL="0" indent="0" algn="l">
               <a:lnSpc>
                 <a:spcPts val="1960"/>
               </a:lnSpc>
@@ -13291,15 +13232,15 @@
       </p:sp>
       <p:pic>
         <p:nvPicPr>
-          <p:cNvPr id="27" name="Image 4" descr="Logo de SQLite">    </p:cNvPr>
+          <p:cNvPr id="27" name="Image 4" descr="Logo de SQLite"/>
           <p:cNvPicPr>
             <a:picLocks noChangeAspect="1"/>
           </p:cNvPicPr>
           <p:nvPr/>
         </p:nvPicPr>
         <p:blipFill>
-          <a:blip r:embed="rId5"/>
-          <a:srcRect l="0" r="0" t="0" b="0"/>
+          <a:blip r:embed="rId6"/>
+          <a:srcRect/>
           <a:stretch/>
         </p:blipFill>
         <p:spPr>
@@ -13335,7 +13276,7 @@
           </a:bodyPr>
           <a:lstStyle/>
           <a:p>
-            <a:pPr algn="l" indent="0" marL="0">
+            <a:pPr marL="0" indent="0" algn="l">
               <a:lnSpc>
                 <a:spcPts val="1960"/>
               </a:lnSpc>
@@ -13383,7 +13324,7 @@
           </a:bodyPr>
           <a:lstStyle/>
           <a:p>
-            <a:pPr algn="ctr" indent="0" marL="0">
+            <a:pPr marL="0" indent="0" algn="ctr">
               <a:lnSpc>
                 <a:spcPts val="1960"/>
               </a:lnSpc>
@@ -13431,7 +13372,7 @@
           </a:bodyPr>
           <a:lstStyle/>
           <a:p>
-            <a:pPr algn="ctr" indent="0" marL="0">
+            <a:pPr marL="0" indent="0" algn="ctr">
               <a:lnSpc>
                 <a:spcPts val="1960"/>
               </a:lnSpc>
@@ -13475,7 +13416,7 @@
           </a:bodyPr>
           <a:lstStyle/>
           <a:p>
-            <a:pPr algn="l" indent="0" marL="0">
+            <a:pPr marL="0" indent="0" algn="l">
               <a:lnSpc>
                 <a:spcPts val="1960"/>
               </a:lnSpc>
@@ -13542,15 +13483,15 @@
       </p:sp>
       <p:pic>
         <p:nvPicPr>
-          <p:cNvPr id="34" name="Image 5" descr="Logo de Android">    </p:cNvPr>
+          <p:cNvPr id="34" name="Image 5" descr="Logo de Android"/>
           <p:cNvPicPr>
             <a:picLocks noChangeAspect="1"/>
           </p:cNvPicPr>
           <p:nvPr/>
         </p:nvPicPr>
         <p:blipFill>
-          <a:blip r:embed="rId6"/>
-          <a:srcRect l="0" r="0" t="0" b="0"/>
+          <a:blip r:embed="rId7"/>
+          <a:srcRect/>
           <a:stretch/>
         </p:blipFill>
         <p:spPr>
@@ -13586,7 +13527,7 @@
           </a:bodyPr>
           <a:lstStyle/>
           <a:p>
-            <a:pPr algn="l" indent="0" marL="0">
+            <a:pPr marL="0" indent="0" algn="l">
               <a:lnSpc>
                 <a:spcPts val="1960"/>
               </a:lnSpc>
@@ -13653,7 +13594,7 @@
       </p:sp>
       <p:pic>
         <p:nvPicPr>
-          <p:cNvPr id="38" name="Image 6" descr="Logo de Android">    </p:cNvPr>
+          <p:cNvPr id="38" name="Image 6" descr="Logo de Android"/>
           <p:cNvPicPr>
             <a:picLocks noChangeAspect="1"/>
           </p:cNvPicPr>
@@ -13661,7 +13602,7 @@
         </p:nvPicPr>
         <p:blipFill>
           <a:blip r:embed="rId7"/>
-          <a:srcRect l="0" r="0" t="0" b="0"/>
+          <a:srcRect/>
           <a:stretch/>
         </p:blipFill>
         <p:spPr>
@@ -13697,7 +13638,7 @@
           </a:bodyPr>
           <a:lstStyle/>
           <a:p>
-            <a:pPr algn="l" indent="0" marL="0">
+            <a:pPr marL="0" indent="0" algn="l">
               <a:lnSpc>
                 <a:spcPts val="1960"/>
               </a:lnSpc>
@@ -13764,15 +13705,15 @@
       </p:sp>
       <p:pic>
         <p:nvPicPr>
-          <p:cNvPr id="42" name="Image 7" descr="Logo de Android">    </p:cNvPr>
+          <p:cNvPr id="42" name="Image 7" descr="Logo de Android"/>
           <p:cNvPicPr>
             <a:picLocks noChangeAspect="1"/>
           </p:cNvPicPr>
           <p:nvPr/>
         </p:nvPicPr>
         <p:blipFill>
-          <a:blip r:embed="rId8"/>
-          <a:srcRect l="0" r="0" t="0" b="0"/>
+          <a:blip r:embed="rId7"/>
+          <a:srcRect/>
           <a:stretch/>
         </p:blipFill>
         <p:spPr>
@@ -13808,7 +13749,7 @@
           </a:bodyPr>
           <a:lstStyle/>
           <a:p>
-            <a:pPr algn="l" indent="0" marL="0">
+            <a:pPr marL="0" indent="0" algn="l">
               <a:lnSpc>
                 <a:spcPts val="1960"/>
               </a:lnSpc>
@@ -13852,7 +13793,7 @@
           </a:bodyPr>
           <a:lstStyle/>
           <a:p>
-            <a:pPr algn="l" indent="0" marL="0">
+            <a:pPr marL="0" indent="0" algn="l">
               <a:lnSpc>
                 <a:spcPts val="1960"/>
               </a:lnSpc>
@@ -13900,7 +13841,7 @@
           </a:bodyPr>
           <a:lstStyle/>
           <a:p>
-            <a:pPr algn="ctr" indent="0" marL="0">
+            <a:pPr marL="0" indent="0" algn="ctr">
               <a:lnSpc>
                 <a:spcPts val="1960"/>
               </a:lnSpc>
@@ -13948,7 +13889,7 @@
           </a:bodyPr>
           <a:lstStyle/>
           <a:p>
-            <a:pPr algn="ctr" indent="0" marL="0">
+            <a:pPr marL="0" indent="0" algn="ctr">
               <a:lnSpc>
                 <a:spcPts val="1960"/>
               </a:lnSpc>
@@ -13996,7 +13937,7 @@
           </a:bodyPr>
           <a:lstStyle/>
           <a:p>
-            <a:pPr algn="ctr" indent="0" marL="0">
+            <a:pPr marL="0" indent="0" algn="ctr">
               <a:lnSpc>
                 <a:spcPts val="1960"/>
               </a:lnSpc>
@@ -14040,7 +13981,7 @@
           </a:bodyPr>
           <a:lstStyle/>
           <a:p>
-            <a:pPr algn="l" indent="0" marL="0">
+            <a:pPr marL="0" indent="0" algn="l">
               <a:lnSpc>
                 <a:spcPts val="1960"/>
               </a:lnSpc>
@@ -14107,15 +14048,15 @@
       </p:sp>
       <p:pic>
         <p:nvPicPr>
-          <p:cNvPr id="51" name="Image 8" descr="Logo de Android Studio">    </p:cNvPr>
+          <p:cNvPr id="51" name="Image 8" descr="Logo de Android Studio"/>
           <p:cNvPicPr>
             <a:picLocks noChangeAspect="1"/>
           </p:cNvPicPr>
           <p:nvPr/>
         </p:nvPicPr>
         <p:blipFill>
-          <a:blip r:embed="rId9"/>
-          <a:srcRect l="0" r="0" t="0" b="0"/>
+          <a:blip r:embed="rId8"/>
+          <a:srcRect/>
           <a:stretch/>
         </p:blipFill>
         <p:spPr>
@@ -14151,7 +14092,7 @@
           </a:bodyPr>
           <a:lstStyle/>
           <a:p>
-            <a:pPr algn="l" indent="0" marL="0">
+            <a:pPr marL="0" indent="0" algn="l">
               <a:lnSpc>
                 <a:spcPts val="1960"/>
               </a:lnSpc>
@@ -14218,15 +14159,15 @@
       </p:sp>
       <p:pic>
         <p:nvPicPr>
-          <p:cNvPr id="55" name="Image 9" descr="Logo de GitHub">    </p:cNvPr>
+          <p:cNvPr id="55" name="Image 9" descr="Logo de GitHub"/>
           <p:cNvPicPr>
             <a:picLocks noChangeAspect="1"/>
           </p:cNvPicPr>
           <p:nvPr/>
         </p:nvPicPr>
         <p:blipFill>
-          <a:blip r:embed="rId10"/>
-          <a:srcRect l="0" r="0" t="0" b="0"/>
+          <a:blip r:embed="rId9"/>
+          <a:srcRect/>
           <a:stretch/>
         </p:blipFill>
         <p:spPr>
@@ -14262,7 +14203,7 @@
           </a:bodyPr>
           <a:lstStyle/>
           <a:p>
-            <a:pPr algn="l" indent="0" marL="0">
+            <a:pPr marL="0" indent="0" algn="l">
               <a:lnSpc>
                 <a:spcPts val="1960"/>
               </a:lnSpc>
@@ -14329,15 +14270,15 @@
       </p:sp>
       <p:pic>
         <p:nvPicPr>
-          <p:cNvPr id="59" name="Image 10" descr="Logo de JUnit">    </p:cNvPr>
+          <p:cNvPr id="59" name="Image 10" descr="Logo de JUnit"/>
           <p:cNvPicPr>
             <a:picLocks noChangeAspect="1"/>
           </p:cNvPicPr>
           <p:nvPr/>
         </p:nvPicPr>
         <p:blipFill>
-          <a:blip r:embed="rId11"/>
-          <a:srcRect l="0" r="0" t="0" b="0"/>
+          <a:blip r:embed="rId10"/>
+          <a:srcRect/>
           <a:stretch/>
         </p:blipFill>
         <p:spPr>
@@ -14373,7 +14314,7 @@
           </a:bodyPr>
           <a:lstStyle/>
           <a:p>
-            <a:pPr algn="l" indent="0" marL="0">
+            <a:pPr marL="0" indent="0" algn="l">
               <a:lnSpc>
                 <a:spcPts val="1960"/>
               </a:lnSpc>
@@ -14417,7 +14358,7 @@
           </a:bodyPr>
           <a:lstStyle/>
           <a:p>
-            <a:pPr algn="l" indent="0" marL="0">
+            <a:pPr marL="0" indent="0" algn="l">
               <a:lnSpc>
                 <a:spcPts val="1960"/>
               </a:lnSpc>
@@ -14492,15 +14433,15 @@
       </p:sp>
       <p:pic>
         <p:nvPicPr>
-          <p:cNvPr id="64" name="Image 11" descr="Logo de Django">    </p:cNvPr>
+          <p:cNvPr id="64" name="Image 11" descr="Logo de Django"/>
           <p:cNvPicPr>
             <a:picLocks noChangeAspect="1"/>
           </p:cNvPicPr>
           <p:nvPr/>
         </p:nvPicPr>
         <p:blipFill>
-          <a:blip r:embed="rId12"/>
-          <a:srcRect l="0" r="0" t="0" b="0"/>
+          <a:blip r:embed="rId11"/>
+          <a:srcRect/>
           <a:stretch/>
         </p:blipFill>
         <p:spPr>
@@ -14536,7 +14477,7 @@
           </a:bodyPr>
           <a:lstStyle/>
           <a:p>
-            <a:pPr algn="l" indent="0" marL="0">
+            <a:pPr marL="0" indent="0" algn="l">
               <a:lnSpc>
                 <a:spcPts val="1960"/>
               </a:lnSpc>
@@ -14611,15 +14552,15 @@
       </p:sp>
       <p:pic>
         <p:nvPicPr>
-          <p:cNvPr id="68" name="Image 12" descr="Logo de PostgreSQL">    </p:cNvPr>
+          <p:cNvPr id="68" name="Image 12" descr="Logo de PostgreSQL"/>
           <p:cNvPicPr>
             <a:picLocks noChangeAspect="1"/>
           </p:cNvPicPr>
           <p:nvPr/>
         </p:nvPicPr>
         <p:blipFill>
-          <a:blip r:embed="rId13"/>
-          <a:srcRect l="0" r="0" t="0" b="0"/>
+          <a:blip r:embed="rId12"/>
+          <a:srcRect/>
           <a:stretch/>
         </p:blipFill>
         <p:spPr>
@@ -14655,7 +14596,7 @@
           </a:bodyPr>
           <a:lstStyle/>
           <a:p>
-            <a:pPr algn="l" indent="0" marL="0">
+            <a:pPr marL="0" indent="0" algn="l">
               <a:lnSpc>
                 <a:spcPts val="1960"/>
               </a:lnSpc>
@@ -14699,7 +14640,7 @@
           </a:bodyPr>
           <a:lstStyle/>
           <a:p>
-            <a:pPr algn="l" indent="0" marL="0">
+            <a:pPr marL="0" indent="0" algn="l">
               <a:lnSpc>
                 <a:spcPts val="2240"/>
               </a:lnSpc>
@@ -14743,7 +14684,7 @@
           </a:bodyPr>
           <a:lstStyle/>
           <a:p>
-            <a:pPr algn="l" indent="0" marL="0">
+            <a:pPr marL="0" indent="0" algn="l">
               <a:lnSpc>
                 <a:spcPts val="1680"/>
               </a:lnSpc>
@@ -14787,7 +14728,7 @@
           </a:bodyPr>
           <a:lstStyle/>
           <a:p>
-            <a:pPr algn="r" indent="0" marL="0">
+            <a:pPr marL="0" indent="0" algn="r">
               <a:lnSpc>
                 <a:spcPts val="1680"/>
               </a:lnSpc>
@@ -14824,6 +14765,7 @@
         <a:solidFill>
           <a:srgbClr val="EAF2F6"/>
         </a:solidFill>
+        <a:effectLst/>
       </p:bgPr>
     </p:bg>
     <p:spTree>
@@ -14843,7 +14785,9 @@
       <p:sp>
         <p:nvSpPr>
           <p:cNvPr id="2" name="Text 0"/>
-          <p:cNvSpPr/>
+          <p:cNvSpPr>
+            <a:spLocks noGrp="1"/>
+          </p:cNvSpPr>
           <p:nvPr>
             <p:ph type="title"/>
           </p:nvPr>
@@ -14865,7 +14809,7 @@
           </a:bodyPr>
           <a:lstStyle/>
           <a:p>
-            <a:pPr algn="l" indent="0" marL="0">
+            <a:pPr marL="0" indent="0" algn="l">
               <a:lnSpc>
                 <a:spcPts val="3960"/>
               </a:lnSpc>
@@ -14936,7 +14880,7 @@
           </a:bodyPr>
           <a:lstStyle/>
           <a:p>
-            <a:pPr algn="l" indent="0" marL="0">
+            <a:pPr marL="0" indent="0" algn="l">
               <a:lnSpc>
                 <a:spcPts val="3080"/>
               </a:lnSpc>
@@ -14980,7 +14924,7 @@
           </a:bodyPr>
           <a:lstStyle/>
           <a:p>
-            <a:pPr algn="l" indent="0" marL="0">
+            <a:pPr marL="0" indent="0" algn="l">
               <a:lnSpc>
                 <a:spcPts val="2240"/>
               </a:lnSpc>
@@ -15024,7 +14968,7 @@
           </a:bodyPr>
           <a:lstStyle/>
           <a:p>
-            <a:pPr algn="l" indent="0" marL="0">
+            <a:pPr marL="0" indent="0" algn="l">
               <a:lnSpc>
                 <a:spcPts val="1960"/>
               </a:lnSpc>
@@ -15095,7 +15039,7 @@
           </a:bodyPr>
           <a:lstStyle/>
           <a:p>
-            <a:pPr algn="l" indent="0" marL="0">
+            <a:pPr marL="0" indent="0" algn="l">
               <a:lnSpc>
                 <a:spcPts val="3080"/>
               </a:lnSpc>
@@ -15139,7 +15083,7 @@
           </a:bodyPr>
           <a:lstStyle/>
           <a:p>
-            <a:pPr algn="l" indent="0" marL="0">
+            <a:pPr marL="0" indent="0" algn="l">
               <a:lnSpc>
                 <a:spcPts val="2240"/>
               </a:lnSpc>
@@ -15183,7 +15127,7 @@
           </a:bodyPr>
           <a:lstStyle/>
           <a:p>
-            <a:pPr algn="l" indent="0" marL="0">
+            <a:pPr marL="0" indent="0" algn="l">
               <a:lnSpc>
                 <a:spcPts val="1960"/>
               </a:lnSpc>
@@ -15254,7 +15198,7 @@
           </a:bodyPr>
           <a:lstStyle/>
           <a:p>
-            <a:pPr algn="l" indent="0" marL="0">
+            <a:pPr marL="0" indent="0" algn="l">
               <a:lnSpc>
                 <a:spcPts val="3080"/>
               </a:lnSpc>
@@ -15298,7 +15242,7 @@
           </a:bodyPr>
           <a:lstStyle/>
           <a:p>
-            <a:pPr algn="l" indent="0" marL="0">
+            <a:pPr marL="0" indent="0" algn="l">
               <a:lnSpc>
                 <a:spcPts val="2240"/>
               </a:lnSpc>
@@ -15342,7 +15286,7 @@
           </a:bodyPr>
           <a:lstStyle/>
           <a:p>
-            <a:pPr algn="l" indent="0" marL="0">
+            <a:pPr marL="0" indent="0" algn="l">
               <a:lnSpc>
                 <a:spcPts val="1960"/>
               </a:lnSpc>
@@ -15413,7 +15357,7 @@
           </a:bodyPr>
           <a:lstStyle/>
           <a:p>
-            <a:pPr algn="l" indent="0" marL="0">
+            <a:pPr marL="0" indent="0" algn="l">
               <a:lnSpc>
                 <a:spcPts val="3080"/>
               </a:lnSpc>
@@ -15457,7 +15401,7 @@
           </a:bodyPr>
           <a:lstStyle/>
           <a:p>
-            <a:pPr algn="l" indent="0" marL="0">
+            <a:pPr marL="0" indent="0" algn="l">
               <a:lnSpc>
                 <a:spcPts val="2240"/>
               </a:lnSpc>
@@ -15501,7 +15445,7 @@
           </a:bodyPr>
           <a:lstStyle/>
           <a:p>
-            <a:pPr algn="l" indent="0" marL="0">
+            <a:pPr marL="0" indent="0" algn="l">
               <a:lnSpc>
                 <a:spcPts val="1960"/>
               </a:lnSpc>
@@ -15572,7 +15516,7 @@
           </a:bodyPr>
           <a:lstStyle/>
           <a:p>
-            <a:pPr algn="l" indent="0" marL="0">
+            <a:pPr marL="0" indent="0" algn="l">
               <a:lnSpc>
                 <a:spcPts val="3080"/>
               </a:lnSpc>
@@ -15616,7 +15560,7 @@
           </a:bodyPr>
           <a:lstStyle/>
           <a:p>
-            <a:pPr algn="l" indent="0" marL="0">
+            <a:pPr marL="0" indent="0" algn="l">
               <a:lnSpc>
                 <a:spcPts val="2240"/>
               </a:lnSpc>
@@ -15660,7 +15604,7 @@
           </a:bodyPr>
           <a:lstStyle/>
           <a:p>
-            <a:pPr algn="l" indent="0" marL="0">
+            <a:pPr marL="0" indent="0" algn="l">
               <a:lnSpc>
                 <a:spcPts val="1960"/>
               </a:lnSpc>
@@ -15675,7 +15619,51 @@
                 <a:ea typeface="DM Sans" pitchFamily="34" charset="-122"/>
                 <a:cs typeface="DM Sans" pitchFamily="34" charset="-120"/>
               </a:rPr>
-              <a:t>Cada app va a su categoría y el informe se guarda en Room.</a:t>
+              <a:t>Cada app va a su categoría y </a:t>
+            </a:r>
+            <a:r>
+              <a:rPr lang="en-US" sz="1400" dirty="0" err="1">
+                <a:solidFill>
+                  <a:srgbClr val="1B2430"/>
+                </a:solidFill>
+                <a:latin typeface="DM Sans" pitchFamily="34" charset="0"/>
+                <a:ea typeface="DM Sans" pitchFamily="34" charset="-122"/>
+                <a:cs typeface="DM Sans" pitchFamily="34" charset="-120"/>
+              </a:rPr>
+              <a:t>el</a:t>
+            </a:r>
+            <a:r>
+              <a:rPr lang="en-US" sz="1400" dirty="0">
+                <a:solidFill>
+                  <a:srgbClr val="1B2430"/>
+                </a:solidFill>
+                <a:latin typeface="DM Sans" pitchFamily="34" charset="0"/>
+                <a:ea typeface="DM Sans" pitchFamily="34" charset="-122"/>
+                <a:cs typeface="DM Sans" pitchFamily="34" charset="-120"/>
+              </a:rPr>
+              <a:t> </a:t>
+            </a:r>
+            <a:r>
+              <a:rPr lang="en-US" sz="1400" dirty="0" err="1">
+                <a:solidFill>
+                  <a:srgbClr val="1B2430"/>
+                </a:solidFill>
+                <a:latin typeface="DM Sans" pitchFamily="34" charset="0"/>
+                <a:ea typeface="DM Sans" pitchFamily="34" charset="-122"/>
+                <a:cs typeface="DM Sans" pitchFamily="34" charset="-120"/>
+              </a:rPr>
+              <a:t>informe</a:t>
+            </a:r>
+            <a:r>
+              <a:rPr lang="en-US" sz="1400" dirty="0">
+                <a:solidFill>
+                  <a:srgbClr val="1B2430"/>
+                </a:solidFill>
+                <a:latin typeface="DM Sans" pitchFamily="34" charset="0"/>
+                <a:ea typeface="DM Sans" pitchFamily="34" charset="-122"/>
+                <a:cs typeface="DM Sans" pitchFamily="34" charset="-120"/>
+              </a:rPr>
+              <a:t> se guarda en Room.</a:t>
             </a:r>
             <a:endParaRPr lang="en-US" sz="1400" dirty="0"/>
           </a:p>
@@ -15731,7 +15719,7 @@
           </a:bodyPr>
           <a:lstStyle/>
           <a:p>
-            <a:pPr algn="l" indent="0" marL="0">
+            <a:pPr marL="0" indent="0" algn="l">
               <a:lnSpc>
                 <a:spcPts val="3080"/>
               </a:lnSpc>
@@ -15775,7 +15763,7 @@
           </a:bodyPr>
           <a:lstStyle/>
           <a:p>
-            <a:pPr algn="l" indent="0" marL="0">
+            <a:pPr marL="0" indent="0" algn="l">
               <a:lnSpc>
                 <a:spcPts val="2240"/>
               </a:lnSpc>
@@ -15819,7 +15807,7 @@
           </a:bodyPr>
           <a:lstStyle/>
           <a:p>
-            <a:pPr algn="l" indent="0" marL="0">
+            <a:pPr marL="0" indent="0" algn="l">
               <a:lnSpc>
                 <a:spcPts val="1960"/>
               </a:lnSpc>
@@ -15863,7 +15851,7 @@
           </a:bodyPr>
           <a:lstStyle/>
           <a:p>
-            <a:pPr algn="l" indent="0" marL="0">
+            <a:pPr marL="0" indent="0" algn="l">
               <a:lnSpc>
                 <a:spcPts val="2240"/>
               </a:lnSpc>
@@ -15907,7 +15895,7 @@
           </a:bodyPr>
           <a:lstStyle/>
           <a:p>
-            <a:pPr algn="l" indent="0" marL="0">
+            <a:pPr marL="0" indent="0" algn="l">
               <a:lnSpc>
                 <a:spcPts val="1680"/>
               </a:lnSpc>
@@ -15951,7 +15939,7 @@
           </a:bodyPr>
           <a:lstStyle/>
           <a:p>
-            <a:pPr algn="r" indent="0" marL="0">
+            <a:pPr marL="0" indent="0" algn="r">
               <a:lnSpc>
                 <a:spcPts val="1680"/>
               </a:lnSpc>
@@ -15988,6 +15976,7 @@
         <a:solidFill>
           <a:srgbClr val="EAF2F6"/>
         </a:solidFill>
+        <a:effectLst/>
       </p:bgPr>
     </p:bg>
     <p:spTree>
@@ -16007,7 +15996,9 @@
       <p:sp>
         <p:nvSpPr>
           <p:cNvPr id="2" name="Text 0"/>
-          <p:cNvSpPr/>
+          <p:cNvSpPr>
+            <a:spLocks noGrp="1"/>
+          </p:cNvSpPr>
           <p:nvPr>
             <p:ph type="title"/>
           </p:nvPr>
@@ -16029,7 +16020,7 @@
           </a:bodyPr>
           <a:lstStyle/>
           <a:p>
-            <a:pPr algn="l" indent="0" marL="0">
+            <a:pPr marL="0" indent="0" algn="l">
               <a:lnSpc>
                 <a:spcPts val="3960"/>
               </a:lnSpc>
@@ -16079,15 +16070,15 @@
       </p:sp>
       <p:pic>
         <p:nvPicPr>
-          <p:cNvPr id="4" name="Image 0" descr="Clock">    </p:cNvPr>
+          <p:cNvPr id="4" name="Image 0" descr="Clock"/>
           <p:cNvPicPr>
             <a:picLocks noChangeAspect="1"/>
           </p:cNvPicPr>
           <p:nvPr/>
         </p:nvPicPr>
         <p:blipFill>
-          <a:blip r:embed="rId1"/>
-          <a:srcRect l="0" r="0" t="0" b="0"/>
+          <a:blip r:embed="rId3"/>
+          <a:srcRect/>
           <a:stretch/>
         </p:blipFill>
         <p:spPr>
@@ -16123,7 +16114,7 @@
           </a:bodyPr>
           <a:lstStyle/>
           <a:p>
-            <a:pPr algn="l" indent="0" marL="0">
+            <a:pPr marL="0" indent="0" algn="l">
               <a:lnSpc>
                 <a:spcPts val="2640"/>
               </a:lnSpc>
@@ -16167,7 +16158,7 @@
           </a:bodyPr>
           <a:lstStyle/>
           <a:p>
-            <a:pPr algn="l" indent="0" marL="0">
+            <a:pPr marL="0" indent="0" algn="l">
               <a:lnSpc>
                 <a:spcPts val="2240"/>
               </a:lnSpc>
@@ -16217,15 +16208,15 @@
       </p:sp>
       <p:pic>
         <p:nvPicPr>
-          <p:cNvPr id="8" name="Image 1" descr="Activity">    </p:cNvPr>
+          <p:cNvPr id="8" name="Image 1" descr="Activity"/>
           <p:cNvPicPr>
             <a:picLocks noChangeAspect="1"/>
           </p:cNvPicPr>
           <p:nvPr/>
         </p:nvPicPr>
         <p:blipFill>
-          <a:blip r:embed="rId2"/>
-          <a:srcRect l="0" r="0" t="0" b="0"/>
+          <a:blip r:embed="rId4"/>
+          <a:srcRect/>
           <a:stretch/>
         </p:blipFill>
         <p:spPr>
@@ -16261,7 +16252,7 @@
           </a:bodyPr>
           <a:lstStyle/>
           <a:p>
-            <a:pPr algn="l" indent="0" marL="0">
+            <a:pPr marL="0" indent="0" algn="l">
               <a:lnSpc>
                 <a:spcPts val="2640"/>
               </a:lnSpc>
@@ -16305,7 +16296,7 @@
           </a:bodyPr>
           <a:lstStyle/>
           <a:p>
-            <a:pPr algn="l" indent="0" marL="0">
+            <a:pPr marL="0" indent="0" algn="l">
               <a:lnSpc>
                 <a:spcPts val="2240"/>
               </a:lnSpc>
@@ -16355,15 +16346,15 @@
       </p:sp>
       <p:pic>
         <p:nvPicPr>
-          <p:cNvPr id="12" name="Image 2" descr="Chart">    </p:cNvPr>
+          <p:cNvPr id="12" name="Image 2" descr="Chart"/>
           <p:cNvPicPr>
             <a:picLocks noChangeAspect="1"/>
           </p:cNvPicPr>
           <p:nvPr/>
         </p:nvPicPr>
         <p:blipFill>
-          <a:blip r:embed="rId3"/>
-          <a:srcRect l="0" r="0" t="0" b="0"/>
+          <a:blip r:embed="rId5"/>
+          <a:srcRect/>
           <a:stretch/>
         </p:blipFill>
         <p:spPr>
@@ -16399,7 +16390,7 @@
           </a:bodyPr>
           <a:lstStyle/>
           <a:p>
-            <a:pPr algn="l" indent="0" marL="0">
+            <a:pPr marL="0" indent="0" algn="l">
               <a:lnSpc>
                 <a:spcPts val="2640"/>
               </a:lnSpc>
@@ -16443,7 +16434,7 @@
           </a:bodyPr>
           <a:lstStyle/>
           <a:p>
-            <a:pPr algn="l" indent="0" marL="0">
+            <a:pPr marL="0" indent="0" algn="l">
               <a:lnSpc>
                 <a:spcPts val="2240"/>
               </a:lnSpc>
@@ -16493,15 +16484,15 @@
       </p:sp>
       <p:pic>
         <p:nvPicPr>
-          <p:cNvPr id="16" name="Image 3" descr="Lock">    </p:cNvPr>
+          <p:cNvPr id="16" name="Image 3" descr="Lock"/>
           <p:cNvPicPr>
             <a:picLocks noChangeAspect="1"/>
           </p:cNvPicPr>
           <p:nvPr/>
         </p:nvPicPr>
         <p:blipFill>
-          <a:blip r:embed="rId4"/>
-          <a:srcRect l="0" r="0" t="0" b="0"/>
+          <a:blip r:embed="rId6"/>
+          <a:srcRect/>
           <a:stretch/>
         </p:blipFill>
         <p:spPr>
@@ -16537,7 +16528,7 @@
           </a:bodyPr>
           <a:lstStyle/>
           <a:p>
-            <a:pPr algn="l" indent="0" marL="0">
+            <a:pPr marL="0" indent="0" algn="l">
               <a:lnSpc>
                 <a:spcPts val="2640"/>
               </a:lnSpc>
@@ -16581,7 +16572,7 @@
           </a:bodyPr>
           <a:lstStyle/>
           <a:p>
-            <a:pPr algn="l" indent="0" marL="0">
+            <a:pPr marL="0" indent="0" algn="l">
               <a:lnSpc>
                 <a:spcPts val="2240"/>
               </a:lnSpc>
@@ -16625,7 +16616,7 @@
           </a:bodyPr>
           <a:lstStyle/>
           <a:p>
-            <a:pPr algn="l" indent="0" marL="0">
+            <a:pPr marL="0" indent="0" algn="l">
               <a:lnSpc>
                 <a:spcPts val="1680"/>
               </a:lnSpc>
@@ -16669,7 +16660,7 @@
           </a:bodyPr>
           <a:lstStyle/>
           <a:p>
-            <a:pPr algn="r" indent="0" marL="0">
+            <a:pPr marL="0" indent="0" algn="r">
               <a:lnSpc>
                 <a:spcPts val="1680"/>
               </a:lnSpc>
@@ -16986,4 +16977,299 @@
   <a:objectDefaults/>
   <a:extraClrSchemeLst/>
 </a:theme>
+</file>
+
+<file path=ppt/theme/theme2.xml><?xml version="1.0" encoding="utf-8"?>
+<a:theme xmlns:a="http://schemas.openxmlformats.org/drawingml/2006/main" name="Tema de Office">
+  <a:themeElements>
+    <a:clrScheme name="Office">
+      <a:dk1>
+        <a:sysClr val="windowText" lastClr="000000"/>
+      </a:dk1>
+      <a:lt1>
+        <a:sysClr val="window" lastClr="FFFFFF"/>
+      </a:lt1>
+      <a:dk2>
+        <a:srgbClr val="44546A"/>
+      </a:dk2>
+      <a:lt2>
+        <a:srgbClr val="E7E6E6"/>
+      </a:lt2>
+      <a:accent1>
+        <a:srgbClr val="4472C4"/>
+      </a:accent1>
+      <a:accent2>
+        <a:srgbClr val="ED7D31"/>
+      </a:accent2>
+      <a:accent3>
+        <a:srgbClr val="A5A5A5"/>
+      </a:accent3>
+      <a:accent4>
+        <a:srgbClr val="FFC000"/>
+      </a:accent4>
+      <a:accent5>
+        <a:srgbClr val="5B9BD5"/>
+      </a:accent5>
+      <a:accent6>
+        <a:srgbClr val="70AD47"/>
+      </a:accent6>
+      <a:hlink>
+        <a:srgbClr val="0563C1"/>
+      </a:hlink>
+      <a:folHlink>
+        <a:srgbClr val="954F72"/>
+      </a:folHlink>
+    </a:clrScheme>
+    <a:fontScheme name="Office">
+      <a:majorFont>
+        <a:latin typeface="Calibri Light" panose="020F0302020204030204"/>
+        <a:ea typeface=""/>
+        <a:cs typeface=""/>
+        <a:font script="Jpan" typeface="游ゴシック Light"/>
+        <a:font script="Hang" typeface="맑은 고딕"/>
+        <a:font script="Hans" typeface="等线 Light"/>
+        <a:font script="Hant" typeface="新細明體"/>
+        <a:font script="Arab" typeface="Times New Roman"/>
+        <a:font script="Hebr" typeface="Times New Roman"/>
+        <a:font script="Thai" typeface="Angsana New"/>
+        <a:font script="Ethi" typeface="Nyala"/>
+        <a:font script="Beng" typeface="Vrinda"/>
+        <a:font script="Gujr" typeface="Shruti"/>
+        <a:font script="Khmr" typeface="MoolBoran"/>
+        <a:font script="Knda" typeface="Tunga"/>
+        <a:font script="Guru" typeface="Raavi"/>
+        <a:font script="Cans" typeface="Euphemia"/>
+        <a:font script="Cher" typeface="Plantagenet Cherokee"/>
+        <a:font script="Yiii" typeface="Microsoft Yi Baiti"/>
+        <a:font script="Tibt" typeface="Microsoft Himalaya"/>
+        <a:font script="Thaa" typeface="MV Boli"/>
+        <a:font script="Deva" typeface="Mangal"/>
+        <a:font script="Telu" typeface="Gautami"/>
+        <a:font script="Taml" typeface="Latha"/>
+        <a:font script="Syrc" typeface="Estrangelo Edessa"/>
+        <a:font script="Orya" typeface="Kalinga"/>
+        <a:font script="Mlym" typeface="Kartika"/>
+        <a:font script="Laoo" typeface="DokChampa"/>
+        <a:font script="Sinh" typeface="Iskoola Pota"/>
+        <a:font script="Mong" typeface="Mongolian Baiti"/>
+        <a:font script="Viet" typeface="Times New Roman"/>
+        <a:font script="Uigh" typeface="Microsoft Uighur"/>
+        <a:font script="Geor" typeface="Sylfaen"/>
+        <a:font script="Armn" typeface="Arial"/>
+        <a:font script="Bugi" typeface="Leelawadee UI"/>
+        <a:font script="Bopo" typeface="Microsoft JhengHei"/>
+        <a:font script="Java" typeface="Javanese Text"/>
+        <a:font script="Lisu" typeface="Segoe UI"/>
+        <a:font script="Mymr" typeface="Myanmar Text"/>
+        <a:font script="Nkoo" typeface="Ebrima"/>
+        <a:font script="Olck" typeface="Nirmala UI"/>
+        <a:font script="Osma" typeface="Ebrima"/>
+        <a:font script="Phag" typeface="Phagspa"/>
+        <a:font script="Syrn" typeface="Estrangelo Edessa"/>
+        <a:font script="Syrj" typeface="Estrangelo Edessa"/>
+        <a:font script="Syre" typeface="Estrangelo Edessa"/>
+        <a:font script="Sora" typeface="Nirmala UI"/>
+        <a:font script="Tale" typeface="Microsoft Tai Le"/>
+        <a:font script="Talu" typeface="Microsoft New Tai Lue"/>
+        <a:font script="Tfng" typeface="Ebrima"/>
+      </a:majorFont>
+      <a:minorFont>
+        <a:latin typeface="Calibri" panose="020F0502020204030204"/>
+        <a:ea typeface=""/>
+        <a:cs typeface=""/>
+        <a:font script="Jpan" typeface="游ゴシック"/>
+        <a:font script="Hang" typeface="맑은 고딕"/>
+        <a:font script="Hans" typeface="等线"/>
+        <a:font script="Hant" typeface="新細明體"/>
+        <a:font script="Arab" typeface="Arial"/>
+        <a:font script="Hebr" typeface="Arial"/>
+        <a:font script="Thai" typeface="Cordia New"/>
+        <a:font script="Ethi" typeface="Nyala"/>
+        <a:font script="Beng" typeface="Vrinda"/>
+        <a:font script="Gujr" typeface="Shruti"/>
+        <a:font script="Khmr" typeface="DaunPenh"/>
+        <a:font script="Knda" typeface="Tunga"/>
+        <a:font script="Guru" typeface="Raavi"/>
+        <a:font script="Cans" typeface="Euphemia"/>
+        <a:font script="Cher" typeface="Plantagenet Cherokee"/>
+        <a:font script="Yiii" typeface="Microsoft Yi Baiti"/>
+        <a:font script="Tibt" typeface="Microsoft Himalaya"/>
+        <a:font script="Thaa" typeface="MV Boli"/>
+        <a:font script="Deva" typeface="Mangal"/>
+        <a:font script="Telu" typeface="Gautami"/>
+        <a:font script="Taml" typeface="Latha"/>
+        <a:font script="Syrc" typeface="Estrangelo Edessa"/>
+        <a:font script="Orya" typeface="Kalinga"/>
+        <a:font script="Mlym" typeface="Kartika"/>
+        <a:font script="Laoo" typeface="DokChampa"/>
+        <a:font script="Sinh" typeface="Iskoola Pota"/>
+        <a:font script="Mong" typeface="Mongolian Baiti"/>
+        <a:font script="Viet" typeface="Arial"/>
+        <a:font script="Uigh" typeface="Microsoft Uighur"/>
+        <a:font script="Geor" typeface="Sylfaen"/>
+        <a:font script="Armn" typeface="Arial"/>
+        <a:font script="Bugi" typeface="Leelawadee UI"/>
+        <a:font script="Bopo" typeface="Microsoft JhengHei"/>
+        <a:font script="Java" typeface="Javanese Text"/>
+        <a:font script="Lisu" typeface="Segoe UI"/>
+        <a:font script="Mymr" typeface="Myanmar Text"/>
+        <a:font script="Nkoo" typeface="Ebrima"/>
+        <a:font script="Olck" typeface="Nirmala UI"/>
+        <a:font script="Osma" typeface="Ebrima"/>
+        <a:font script="Phag" typeface="Phagspa"/>
+        <a:font script="Syrn" typeface="Estrangelo Edessa"/>
+        <a:font script="Syrj" typeface="Estrangelo Edessa"/>
+        <a:font script="Syre" typeface="Estrangelo Edessa"/>
+        <a:font script="Sora" typeface="Nirmala UI"/>
+        <a:font script="Tale" typeface="Microsoft Tai Le"/>
+        <a:font script="Talu" typeface="Microsoft New Tai Lue"/>
+        <a:font script="Tfng" typeface="Ebrima"/>
+      </a:minorFont>
+    </a:fontScheme>
+    <a:fmtScheme name="Office">
+      <a:fillStyleLst>
+        <a:solidFill>
+          <a:schemeClr val="phClr"/>
+        </a:solidFill>
+        <a:gradFill rotWithShape="1">
+          <a:gsLst>
+            <a:gs pos="0">
+              <a:schemeClr val="phClr">
+                <a:lumMod val="110000"/>
+                <a:satMod val="105000"/>
+                <a:tint val="67000"/>
+              </a:schemeClr>
+            </a:gs>
+            <a:gs pos="50000">
+              <a:schemeClr val="phClr">
+                <a:lumMod val="105000"/>
+                <a:satMod val="103000"/>
+                <a:tint val="73000"/>
+              </a:schemeClr>
+            </a:gs>
+            <a:gs pos="100000">
+              <a:schemeClr val="phClr">
+                <a:lumMod val="105000"/>
+                <a:satMod val="109000"/>
+                <a:tint val="81000"/>
+              </a:schemeClr>
+            </a:gs>
+          </a:gsLst>
+          <a:lin ang="5400000" scaled="0"/>
+        </a:gradFill>
+        <a:gradFill rotWithShape="1">
+          <a:gsLst>
+            <a:gs pos="0">
+              <a:schemeClr val="phClr">
+                <a:satMod val="103000"/>
+                <a:lumMod val="102000"/>
+                <a:tint val="94000"/>
+              </a:schemeClr>
+            </a:gs>
+            <a:gs pos="50000">
+              <a:schemeClr val="phClr">
+                <a:satMod val="110000"/>
+                <a:lumMod val="100000"/>
+                <a:shade val="100000"/>
+              </a:schemeClr>
+            </a:gs>
+            <a:gs pos="100000">
+              <a:schemeClr val="phClr">
+                <a:lumMod val="99000"/>
+                <a:satMod val="120000"/>
+                <a:shade val="78000"/>
+              </a:schemeClr>
+            </a:gs>
+          </a:gsLst>
+          <a:lin ang="5400000" scaled="0"/>
+        </a:gradFill>
+      </a:fillStyleLst>
+      <a:lnStyleLst>
+        <a:ln w="6350" cap="flat" cmpd="sng" algn="ctr">
+          <a:solidFill>
+            <a:schemeClr val="phClr"/>
+          </a:solidFill>
+          <a:prstDash val="solid"/>
+          <a:miter lim="800000"/>
+        </a:ln>
+        <a:ln w="12700" cap="flat" cmpd="sng" algn="ctr">
+          <a:solidFill>
+            <a:schemeClr val="phClr"/>
+          </a:solidFill>
+          <a:prstDash val="solid"/>
+          <a:miter lim="800000"/>
+        </a:ln>
+        <a:ln w="19050" cap="flat" cmpd="sng" algn="ctr">
+          <a:solidFill>
+            <a:schemeClr val="phClr"/>
+          </a:solidFill>
+          <a:prstDash val="solid"/>
+          <a:miter lim="800000"/>
+        </a:ln>
+      </a:lnStyleLst>
+      <a:effectStyleLst>
+        <a:effectStyle>
+          <a:effectLst/>
+        </a:effectStyle>
+        <a:effectStyle>
+          <a:effectLst/>
+        </a:effectStyle>
+        <a:effectStyle>
+          <a:effectLst>
+            <a:outerShdw blurRad="57150" dist="19050" dir="5400000" algn="ctr" rotWithShape="0">
+              <a:srgbClr val="000000">
+                <a:alpha val="63000"/>
+              </a:srgbClr>
+            </a:outerShdw>
+          </a:effectLst>
+        </a:effectStyle>
+      </a:effectStyleLst>
+      <a:bgFillStyleLst>
+        <a:solidFill>
+          <a:schemeClr val="phClr"/>
+        </a:solidFill>
+        <a:solidFill>
+          <a:schemeClr val="phClr">
+            <a:tint val="95000"/>
+            <a:satMod val="170000"/>
+          </a:schemeClr>
+        </a:solidFill>
+        <a:gradFill rotWithShape="1">
+          <a:gsLst>
+            <a:gs pos="0">
+              <a:schemeClr val="phClr">
+                <a:tint val="93000"/>
+                <a:satMod val="150000"/>
+                <a:shade val="98000"/>
+                <a:lumMod val="102000"/>
+              </a:schemeClr>
+            </a:gs>
+            <a:gs pos="50000">
+              <a:schemeClr val="phClr">
+                <a:tint val="98000"/>
+                <a:satMod val="130000"/>
+                <a:shade val="90000"/>
+                <a:lumMod val="103000"/>
+              </a:schemeClr>
+            </a:gs>
+            <a:gs pos="100000">
+              <a:schemeClr val="phClr">
+                <a:shade val="63000"/>
+                <a:satMod val="120000"/>
+              </a:schemeClr>
+            </a:gs>
+          </a:gsLst>
+          <a:lin ang="5400000" scaled="0"/>
+        </a:gradFill>
+      </a:bgFillStyleLst>
+    </a:fmtScheme>
+  </a:themeElements>
+  <a:objectDefaults/>
+  <a:extraClrSchemeLst/>
+  <a:extLst>
+    <a:ext uri="{05A4C25C-085E-4340-85A3-A5531E510DB2}">
+      <thm15:themeFamily xmlns:thm15="http://schemas.microsoft.com/office/thememl/2012/main" name="Office Theme" id="{62F939B6-93AF-4DB8-9C6B-D6C7DFDC589F}" vid="{4A3C46E8-61CC-4603-A589-7422A47A8E4A}"/>
+    </a:ext>
+  </a:extLst>
+</a:theme>
 </file>